--- a/deep-dives/CoalIndia-DeepDive-2026-05-12.pptx
+++ b/deep-dives/CoalIndia-DeepDive-2026-05-12.pptx
@@ -13,10 +13,9 @@
     <p:sldId id="261" r:id="rId7"/>
     <p:sldId id="262" r:id="rId8"/>
     <p:sldId id="263" r:id="rId9"/>
-    <p:sldId id="264" r:id="rId10"/>
   </p:sldIdLst>
   <p:notesMasterIdLst>
-    <p:notesMasterId r:id="rId11"/>
+    <p:notesMasterId r:id="rId10"/>
   </p:notesMasterIdLst>
   <p:sldSz cx="9144000" cy="5143500"/>
   <p:notesSz cx="5143500" cy="9144000"/>
@@ -113,1475 +112,6 @@
     </a:lvl9pPr>
   </p:defaultTextStyle>
 </p:presentation>
-</file>
-
-<file path=ppt/charts/chart1.xml><?xml version="1.0" encoding="utf-8"?>
-<c:chartSpace xmlns:c="http://schemas.openxmlformats.org/drawingml/2006/chart" xmlns:a="http://schemas.openxmlformats.org/drawingml/2006/main" xmlns:r="http://schemas.openxmlformats.org/officeDocument/2006/relationships">
-  <c:date1904 val="0"/>
-  <c:roundedCorners val="1"/>
-  <c:chart>
-    <c:autoTitleDeleted val="1"/>
-    <c:plotArea>
-      <c:layout/>
-      <c:lineChart>
-        <c:varyColors val="0"/>
-        <c:ser>
-          <c:idx val="0"/>
-          <c:order val="0"/>
-          <c:tx>
-            <c:strRef>
-              <c:f>Sheet1!$B$1</c:f>
-              <c:strCache>
-                <c:ptCount val="1"/>
-                <c:pt idx="0">
-                  <c:v>Gross Margin</c:v>
-                </c:pt>
-              </c:strCache>
-            </c:strRef>
-          </c:tx>
-          <c:spPr>
-            <a:solidFill>
-              <a:srgbClr val="2D5BE3"/>
-            </a:solidFill>
-            <a:ln w="31750" cap="flat">
-              <a:solidFill>
-                <a:srgbClr val="2D5BE3"/>
-              </a:solidFill>
-              <a:prstDash val="solid"/>
-              <a:round/>
-            </a:ln>
-            <a:effectLst/>
-          </c:spPr>
-          <c:invertIfNegative val="0"/>
-          <c:dLbls>
-            <c:numFmt formatCode="#,##0" sourceLinked="0"/>
-            <c:txPr>
-              <a:bodyPr/>
-              <a:lstStyle/>
-              <a:p>
-                <a:pPr>
-                  <a:defRPr b="0" i="0" strike="noStrike" sz="1200" u="none">
-                    <a:solidFill>
-                      <a:srgbClr val="000000"/>
-                    </a:solidFill>
-                    <a:latin typeface="Arial"/>
-                  </a:defRPr>
-                </a:pPr>
-              </a:p>
-            </c:txPr>
-            <c:showLegendKey val="0"/>
-            <c:showVal val="0"/>
-            <c:showCatName val="0"/>
-            <c:showSerName val="0"/>
-            <c:showPercent val="0"/>
-            <c:showBubbleSize val="0"/>
-            <c:showLeaderLines val="0"/>
-          </c:dLbls>
-          <c:marker>
-            <c:symbol val="circle"/>
-            <c:size val="6"/>
-            <c:spPr>
-              <a:solidFill>
-                <a:srgbClr val="2D5BE3"/>
-              </a:solidFill>
-              <a:ln w="9525" cap="flat">
-                <a:solidFill>
-                  <a:srgbClr val="2D5BE3"/>
-                </a:solidFill>
-                <a:prstDash val="solid"/>
-                <a:round/>
-              </a:ln>
-              <a:effectLst/>
-            </c:spPr>
-          </c:marker>
-          <c:cat>
-            <c:multiLvlStrRef>
-              <c:f>Sheet1!$A$2:$A$5</c:f>
-              <c:multiLvlStrCache>
-                <c:ptCount val="4"/>
-                <c:lvl>
-                  <c:pt idx="0">
-                    <c:v>FY2023</c:v>
-                  </c:pt>
-                  <c:pt idx="1">
-                    <c:v>FY2024</c:v>
-                  </c:pt>
-                  <c:pt idx="2">
-                    <c:v>FY2025</c:v>
-                  </c:pt>
-                  <c:pt idx="3">
-                    <c:v>FY2026</c:v>
-                  </c:pt>
-                </c:lvl>
-              </c:multiLvlStrCache>
-            </c:multiLvlStrRef>
-          </c:cat>
-          <c:val>
-            <c:numRef>
-              <c:f>Sheet1!$B$2:$B$5</c:f>
-              <c:numCache>
-                <c:formatCode>General</c:formatCode>
-                <c:ptCount val="4"/>
-                <c:pt idx="0">
-                  <c:v>82</c:v>
-                </c:pt>
-                <c:pt idx="1">
-                  <c:v>84.5</c:v>
-                </c:pt>
-                <c:pt idx="2">
-                  <c:v>89.3</c:v>
-                </c:pt>
-                <c:pt idx="3">
-                  <c:v>89</c:v>
-                </c:pt>
-              </c:numCache>
-            </c:numRef>
-          </c:val>
-          <c:smooth val="1"/>
-        </c:ser>
-        <c:ser>
-          <c:idx val="1"/>
-          <c:order val="1"/>
-          <c:tx>
-            <c:strRef>
-              <c:f>Sheet1!$C$1</c:f>
-              <c:strCache>
-                <c:ptCount val="1"/>
-                <c:pt idx="0">
-                  <c:v>Operating Margin</c:v>
-                </c:pt>
-              </c:strCache>
-            </c:strRef>
-          </c:tx>
-          <c:spPr>
-            <a:solidFill>
-              <a:srgbClr val="1C2B5E"/>
-            </a:solidFill>
-            <a:ln w="31750" cap="flat">
-              <a:solidFill>
-                <a:srgbClr val="1C2B5E"/>
-              </a:solidFill>
-              <a:prstDash val="solid"/>
-              <a:round/>
-            </a:ln>
-            <a:effectLst/>
-          </c:spPr>
-          <c:invertIfNegative val="0"/>
-          <c:dLbls>
-            <c:numFmt formatCode="#,##0" sourceLinked="0"/>
-            <c:txPr>
-              <a:bodyPr/>
-              <a:lstStyle/>
-              <a:p>
-                <a:pPr>
-                  <a:defRPr b="0" i="0" strike="noStrike" sz="1200" u="none">
-                    <a:solidFill>
-                      <a:srgbClr val="000000"/>
-                    </a:solidFill>
-                    <a:latin typeface="Arial"/>
-                  </a:defRPr>
-                </a:pPr>
-              </a:p>
-            </c:txPr>
-            <c:showLegendKey val="0"/>
-            <c:showVal val="0"/>
-            <c:showCatName val="0"/>
-            <c:showSerName val="0"/>
-            <c:showPercent val="0"/>
-            <c:showBubbleSize val="0"/>
-            <c:showLeaderLines val="0"/>
-          </c:dLbls>
-          <c:marker>
-            <c:symbol val="circle"/>
-            <c:size val="6"/>
-            <c:spPr>
-              <a:solidFill>
-                <a:srgbClr val="1C2B5E"/>
-              </a:solidFill>
-              <a:ln w="9525" cap="flat">
-                <a:solidFill>
-                  <a:srgbClr val="1C2B5E"/>
-                </a:solidFill>
-                <a:prstDash val="solid"/>
-                <a:round/>
-              </a:ln>
-              <a:effectLst/>
-            </c:spPr>
-          </c:marker>
-          <c:cat>
-            <c:multiLvlStrRef>
-              <c:f>Sheet1!$A$2:$A$5</c:f>
-              <c:multiLvlStrCache>
-                <c:ptCount val="4"/>
-                <c:lvl>
-                  <c:pt idx="0">
-                    <c:v>FY2023</c:v>
-                  </c:pt>
-                  <c:pt idx="1">
-                    <c:v>FY2024</c:v>
-                  </c:pt>
-                  <c:pt idx="2">
-                    <c:v>FY2025</c:v>
-                  </c:pt>
-                  <c:pt idx="3">
-                    <c:v>FY2026</c:v>
-                  </c:pt>
-                </c:lvl>
-              </c:multiLvlStrCache>
-            </c:multiLvlStrRef>
-          </c:cat>
-          <c:val>
-            <c:numRef>
-              <c:f>Sheet1!$C$2:$C$5</c:f>
-              <c:numCache>
-                <c:formatCode>General</c:formatCode>
-                <c:ptCount val="4"/>
-                <c:pt idx="0">
-                  <c:v>29.6</c:v>
-                </c:pt>
-                <c:pt idx="1">
-                  <c:v>32.5</c:v>
-                </c:pt>
-                <c:pt idx="2">
-                  <c:v>22.5</c:v>
-                </c:pt>
-                <c:pt idx="3">
-                  <c:v>18.5</c:v>
-                </c:pt>
-              </c:numCache>
-            </c:numRef>
-          </c:val>
-          <c:smooth val="1"/>
-        </c:ser>
-        <c:ser>
-          <c:idx val="2"/>
-          <c:order val="2"/>
-          <c:tx>
-            <c:strRef>
-              <c:f>Sheet1!$D$1</c:f>
-              <c:strCache>
-                <c:ptCount val="1"/>
-                <c:pt idx="0">
-                  <c:v>Net Margin</c:v>
-                </c:pt>
-              </c:strCache>
-            </c:strRef>
-          </c:tx>
-          <c:spPr>
-            <a:solidFill>
-              <a:srgbClr val="D4A017"/>
-            </a:solidFill>
-            <a:ln w="31750" cap="flat">
-              <a:solidFill>
-                <a:srgbClr val="D4A017"/>
-              </a:solidFill>
-              <a:prstDash val="solid"/>
-              <a:round/>
-            </a:ln>
-            <a:effectLst/>
-          </c:spPr>
-          <c:invertIfNegative val="0"/>
-          <c:dLbls>
-            <c:numFmt formatCode="#,##0" sourceLinked="0"/>
-            <c:txPr>
-              <a:bodyPr/>
-              <a:lstStyle/>
-              <a:p>
-                <a:pPr>
-                  <a:defRPr b="0" i="0" strike="noStrike" sz="1200" u="none">
-                    <a:solidFill>
-                      <a:srgbClr val="000000"/>
-                    </a:solidFill>
-                    <a:latin typeface="Arial"/>
-                  </a:defRPr>
-                </a:pPr>
-              </a:p>
-            </c:txPr>
-            <c:showLegendKey val="0"/>
-            <c:showVal val="0"/>
-            <c:showCatName val="0"/>
-            <c:showSerName val="0"/>
-            <c:showPercent val="0"/>
-            <c:showBubbleSize val="0"/>
-            <c:showLeaderLines val="0"/>
-          </c:dLbls>
-          <c:marker>
-            <c:symbol val="circle"/>
-            <c:size val="6"/>
-            <c:spPr>
-              <a:solidFill>
-                <a:srgbClr val="D4A017"/>
-              </a:solidFill>
-              <a:ln w="9525" cap="flat">
-                <a:solidFill>
-                  <a:srgbClr val="D4A017"/>
-                </a:solidFill>
-                <a:prstDash val="solid"/>
-                <a:round/>
-              </a:ln>
-              <a:effectLst/>
-            </c:spPr>
-          </c:marker>
-          <c:cat>
-            <c:multiLvlStrRef>
-              <c:f>Sheet1!$A$2:$A$5</c:f>
-              <c:multiLvlStrCache>
-                <c:ptCount val="4"/>
-                <c:lvl>
-                  <c:pt idx="0">
-                    <c:v>FY2023</c:v>
-                  </c:pt>
-                  <c:pt idx="1">
-                    <c:v>FY2024</c:v>
-                  </c:pt>
-                  <c:pt idx="2">
-                    <c:v>FY2025</c:v>
-                  </c:pt>
-                  <c:pt idx="3">
-                    <c:v>FY2026</c:v>
-                  </c:pt>
-                </c:lvl>
-              </c:multiLvlStrCache>
-            </c:multiLvlStrRef>
-          </c:cat>
-          <c:val>
-            <c:numRef>
-              <c:f>Sheet1!$D$2:$D$5</c:f>
-              <c:numCache>
-                <c:formatCode>General</c:formatCode>
-                <c:ptCount val="4"/>
-                <c:pt idx="0">
-                  <c:v>24.9</c:v>
-                </c:pt>
-                <c:pt idx="1">
-                  <c:v>29.4</c:v>
-                </c:pt>
-                <c:pt idx="2">
-                  <c:v>21</c:v>
-                </c:pt>
-                <c:pt idx="3">
-                  <c:v>18.5</c:v>
-                </c:pt>
-              </c:numCache>
-            </c:numRef>
-          </c:val>
-          <c:smooth val="1"/>
-        </c:ser>
-        <c:dLbls>
-          <c:numFmt formatCode="#,##0" sourceLinked="0"/>
-          <c:txPr>
-            <a:bodyPr/>
-            <a:lstStyle/>
-            <a:p>
-              <a:pPr>
-                <a:defRPr b="0" i="0" strike="noStrike" sz="1200" u="none">
-                  <a:solidFill>
-                    <a:srgbClr val="000000"/>
-                  </a:solidFill>
-                  <a:latin typeface="Arial"/>
-                </a:defRPr>
-              </a:pPr>
-            </a:p>
-          </c:txPr>
-          <c:showLegendKey val="0"/>
-          <c:showVal val="0"/>
-          <c:showCatName val="0"/>
-          <c:showSerName val="0"/>
-          <c:showPercent val="0"/>
-          <c:showBubbleSize val="0"/>
-          <c:showLeaderLines val="0"/>
-        </c:dLbls>
-        <c:marker val="1"/>
-        <c:axId val="2094734554"/>
-        <c:axId val="2094734552"/>
-        <c:axId val="2094734556"/>
-      </c:lineChart>
-      <c:catAx>
-        <c:axId val="2094734554"/>
-        <c:scaling>
-          <c:orientation val="minMax"/>
-        </c:scaling>
-        <c:delete val="0"/>
-        <c:axPos val="b"/>
-        <c:numFmt formatCode="General" sourceLinked="1"/>
-        <c:majorTickMark val="out"/>
-        <c:minorTickMark val="none"/>
-        <c:tickLblPos val="low"/>
-        <c:spPr>
-          <a:ln w="12700" cap="flat">
-            <a:solidFill>
-              <a:srgbClr val="888888"/>
-            </a:solidFill>
-            <a:prstDash val="solid"/>
-            <a:round/>
-          </a:ln>
-        </c:spPr>
-        <c:txPr>
-          <a:bodyPr/>
-          <a:lstStyle/>
-          <a:p>
-            <a:pPr>
-              <a:defRPr sz="1200" b="0" i="0" u="none" strike="noStrike">
-                <a:solidFill>
-                  <a:srgbClr val="64748B"/>
-                </a:solidFill>
-                <a:latin typeface="Arial"/>
-              </a:defRPr>
-            </a:pPr>
-            <a:endParaRPr lang="en-US"/>
-          </a:p>
-        </c:txPr>
-        <c:crossAx val="2094734552"/>
-        <c:crosses val="autoZero"/>
-        <c:auto val="1"/>
-        <c:lblAlgn val="ctr"/>
-        <c:noMultiLvlLbl val="1"/>
-      </c:catAx>
-      <c:valAx>
-        <c:axId val="2094734552"/>
-        <c:scaling>
-          <c:orientation val="minMax"/>
-          <c:min val="0"/>
-        </c:scaling>
-        <c:delete val="0"/>
-        <c:axPos val="l"/>
-        <c:majorGridlines>
-          <c:spPr>
-            <a:ln w="6350" cap="flat">
-              <a:solidFill>
-                <a:srgbClr val="E2E8F0"/>
-              </a:solidFill>
-              <a:prstDash val="solid"/>
-              <a:round/>
-            </a:ln>
-          </c:spPr>
-        </c:majorGridlines>
-        <c:numFmt formatCode="General" sourceLinked="0"/>
-        <c:majorTickMark val="out"/>
-        <c:minorTickMark val="none"/>
-        <c:tickLblPos val="nextTo"/>
-        <c:spPr>
-          <a:ln w="12700" cap="flat">
-            <a:solidFill>
-              <a:srgbClr val="888888"/>
-            </a:solidFill>
-            <a:prstDash val="solid"/>
-            <a:round/>
-          </a:ln>
-        </c:spPr>
-        <c:txPr>
-          <a:bodyPr/>
-          <a:lstStyle/>
-          <a:p>
-            <a:pPr>
-              <a:defRPr sz="1200" b="0" i="0" u="none" strike="noStrike">
-                <a:solidFill>
-                  <a:srgbClr val="64748B"/>
-                </a:solidFill>
-                <a:latin typeface="Arial"/>
-              </a:defRPr>
-            </a:pPr>
-            <a:endParaRPr lang="en-US"/>
-          </a:p>
-        </c:txPr>
-        <c:crossAx val="2094734554"/>
-        <c:crosses val="autoZero"/>
-        <c:crossBetween val="between"/>
-      </c:valAx>
-      <c:spPr>
-        <a:noFill/>
-        <a:ln>
-          <a:noFill/>
-        </a:ln>
-        <a:effectLst/>
-      </c:spPr>
-    </c:plotArea>
-    <c:legend>
-      <c:legendPos val="b"/>
-      <c:overlay val="0"/>
-      <c:txPr>
-        <a:bodyPr/>
-        <a:lstStyle/>
-        <a:p>
-          <a:pPr>
-            <a:defRPr sz="900">      </a:defRPr>
-          </a:pPr>
-          <a:endParaRPr lang="en-US"/>
-        </a:p>
-      </c:txPr>
-    </c:legend>
-    <c:plotVisOnly val="1"/>
-    <c:dispBlanksAs val="span"/>
-  </c:chart>
-  <c:spPr>
-    <a:solidFill>
-      <a:srgbClr val="FFFFFF"/>
-    </a:solidFill>
-    <a:ln>
-      <a:noFill/>
-    </a:ln>
-    <a:effectLst/>
-  </c:spPr>
-  <c:externalData r:id="rId1">
-    <c:autoUpdate val="0"/>
-  </c:externalData>
-</c:chartSpace>
-</file>
-
-<file path=ppt/charts/chart2.xml><?xml version="1.0" encoding="utf-8"?>
-<c:chartSpace xmlns:c="http://schemas.openxmlformats.org/drawingml/2006/chart" xmlns:a="http://schemas.openxmlformats.org/drawingml/2006/main" xmlns:r="http://schemas.openxmlformats.org/officeDocument/2006/relationships">
-  <c:date1904 val="0"/>
-  <c:roundedCorners val="1"/>
-  <c:chart>
-    <c:autoTitleDeleted val="1"/>
-    <c:plotArea>
-      <c:layout/>
-      <c:barChart>
-        <c:barDir val="col"/>
-        <c:grouping val="clustered"/>
-        <c:varyColors val="0"/>
-        <c:ser>
-          <c:idx val="0"/>
-          <c:order val="0"/>
-          <c:tx>
-            <c:strRef>
-              <c:f>Sheet1!$B$1</c:f>
-              <c:strCache>
-                <c:ptCount val="1"/>
-                <c:pt idx="0">
-                  <c:v>Free Cash Flow</c:v>
-                </c:pt>
-              </c:strCache>
-            </c:strRef>
-          </c:tx>
-          <c:spPr>
-            <a:solidFill>
-              <a:srgbClr val="2D5BE3"/>
-            </a:solidFill>
-            <a:effectLst/>
-          </c:spPr>
-          <c:invertIfNegative val="0"/>
-          <c:dLbls>
-            <c:numFmt formatCode="#,##0" sourceLinked="0"/>
-            <c:txPr>
-              <a:bodyPr/>
-              <a:lstStyle/>
-              <a:p>
-                <a:pPr>
-                  <a:defRPr b="0" i="0" strike="noStrike" sz="800" u="none">
-                    <a:solidFill>
-                      <a:srgbClr val="0F172A"/>
-                    </a:solidFill>
-                    <a:latin typeface="Arial"/>
-                  </a:defRPr>
-                </a:pPr>
-              </a:p>
-            </c:txPr>
-            <c:showLegendKey val="0"/>
-            <c:showVal val="1"/>
-            <c:showCatName val="0"/>
-            <c:showSerName val="0"/>
-            <c:showPercent val="0"/>
-            <c:showBubbleSize val="0"/>
-            <c:showLeaderLines val="0"/>
-          </c:dLbls>
-          <c:cat>
-            <c:multiLvlStrRef>
-              <c:f>Sheet1!$A$2:$A$5</c:f>
-              <c:multiLvlStrCache>
-                <c:ptCount val="4"/>
-                <c:lvl>
-                  <c:pt idx="0">
-                    <c:v>FY2023</c:v>
-                  </c:pt>
-                  <c:pt idx="1">
-                    <c:v>FY2024</c:v>
-                  </c:pt>
-                  <c:pt idx="2">
-                    <c:v>FY2025</c:v>
-                  </c:pt>
-                  <c:pt idx="3">
-                    <c:v>FY2026</c:v>
-                  </c:pt>
-                </c:lvl>
-              </c:multiLvlStrCache>
-            </c:multiLvlStrRef>
-          </c:cat>
-          <c:val>
-            <c:numRef>
-              <c:f>Sheet1!$B$2:$B$5</c:f>
-              <c:numCache>
-                <c:formatCode>General</c:formatCode>
-                <c:ptCount val="4"/>
-                <c:pt idx="0">
-                  <c:v>204</c:v>
-                </c:pt>
-                <c:pt idx="1">
-                  <c:v>13</c:v>
-                </c:pt>
-                <c:pt idx="2">
-                  <c:v>159</c:v>
-                </c:pt>
-                <c:pt idx="3">
-                  <c:v>307</c:v>
-                </c:pt>
-              </c:numCache>
-            </c:numRef>
-          </c:val>
-        </c:ser>
-        <c:ser>
-          <c:idx val="1"/>
-          <c:order val="1"/>
-          <c:tx>
-            <c:strRef>
-              <c:f>Sheet1!$C$1</c:f>
-              <c:strCache>
-                <c:ptCount val="1"/>
-                <c:pt idx="0">
-                  <c:v>Net Income</c:v>
-                </c:pt>
-              </c:strCache>
-            </c:strRef>
-          </c:tx>
-          <c:spPr>
-            <a:solidFill>
-              <a:srgbClr val="D6E4FF"/>
-            </a:solidFill>
-            <a:effectLst/>
-          </c:spPr>
-          <c:invertIfNegative val="0"/>
-          <c:dLbls>
-            <c:numFmt formatCode="#,##0" sourceLinked="0"/>
-            <c:txPr>
-              <a:bodyPr/>
-              <a:lstStyle/>
-              <a:p>
-                <a:pPr>
-                  <a:defRPr b="0" i="0" strike="noStrike" sz="800" u="none">
-                    <a:solidFill>
-                      <a:srgbClr val="0F172A"/>
-                    </a:solidFill>
-                    <a:latin typeface="Arial"/>
-                  </a:defRPr>
-                </a:pPr>
-              </a:p>
-            </c:txPr>
-            <c:showLegendKey val="0"/>
-            <c:showVal val="1"/>
-            <c:showCatName val="0"/>
-            <c:showSerName val="0"/>
-            <c:showPercent val="0"/>
-            <c:showBubbleSize val="0"/>
-            <c:showLeaderLines val="0"/>
-          </c:dLbls>
-          <c:cat>
-            <c:multiLvlStrRef>
-              <c:f>Sheet1!$A$2:$A$5</c:f>
-              <c:multiLvlStrCache>
-                <c:ptCount val="4"/>
-                <c:lvl>
-                  <c:pt idx="0">
-                    <c:v>FY2023</c:v>
-                  </c:pt>
-                  <c:pt idx="1">
-                    <c:v>FY2024</c:v>
-                  </c:pt>
-                  <c:pt idx="2">
-                    <c:v>FY2025</c:v>
-                  </c:pt>
-                  <c:pt idx="3">
-                    <c:v>FY2026</c:v>
-                  </c:pt>
-                </c:lvl>
-              </c:multiLvlStrCache>
-            </c:multiLvlStrRef>
-          </c:cat>
-          <c:val>
-            <c:numRef>
-              <c:f>Sheet1!$C$2:$C$5</c:f>
-              <c:numCache>
-                <c:formatCode>General</c:formatCode>
-                <c:ptCount val="4"/>
-                <c:pt idx="0">
-                  <c:v>318</c:v>
-                </c:pt>
-                <c:pt idx="1">
-                  <c:v>374</c:v>
-                </c:pt>
-                <c:pt idx="2">
-                  <c:v>355</c:v>
-                </c:pt>
-                <c:pt idx="3">
-                  <c:v>311</c:v>
-                </c:pt>
-              </c:numCache>
-            </c:numRef>
-          </c:val>
-        </c:ser>
-        <c:dLbls>
-          <c:numFmt formatCode="#,##0" sourceLinked="0"/>
-          <c:txPr>
-            <a:bodyPr/>
-            <a:lstStyle/>
-            <a:p>
-              <a:pPr>
-                <a:defRPr b="0" i="0" strike="noStrike" sz="800" u="none">
-                  <a:solidFill>
-                    <a:srgbClr val="0F172A"/>
-                  </a:solidFill>
-                  <a:latin typeface="Arial"/>
-                </a:defRPr>
-              </a:pPr>
-            </a:p>
-          </c:txPr>
-          <c:showLegendKey val="0"/>
-          <c:showVal val="1"/>
-          <c:showCatName val="0"/>
-          <c:showSerName val="0"/>
-          <c:showPercent val="0"/>
-          <c:showBubbleSize val="0"/>
-          <c:showLeaderLines val="0"/>
-        </c:dLbls>
-        <c:gapWidth val="150"/>
-        <c:overlap val="0"/>
-        <c:axId val="2094734554"/>
-        <c:axId val="2094734552"/>
-        <c:axId val="2094734556"/>
-      </c:barChart>
-      <c:catAx>
-        <c:axId val="2094734554"/>
-        <c:scaling>
-          <c:orientation val="minMax"/>
-        </c:scaling>
-        <c:delete val="0"/>
-        <c:axPos val="b"/>
-        <c:numFmt formatCode="General" sourceLinked="1"/>
-        <c:majorTickMark val="out"/>
-        <c:minorTickMark val="none"/>
-        <c:tickLblPos val="low"/>
-        <c:spPr>
-          <a:ln w="12700" cap="flat">
-            <a:solidFill>
-              <a:srgbClr val="888888"/>
-            </a:solidFill>
-            <a:prstDash val="solid"/>
-            <a:round/>
-          </a:ln>
-        </c:spPr>
-        <c:txPr>
-          <a:bodyPr/>
-          <a:lstStyle/>
-          <a:p>
-            <a:pPr>
-              <a:defRPr sz="1200" b="0" i="0" u="none" strike="noStrike">
-                <a:solidFill>
-                  <a:srgbClr val="64748B"/>
-                </a:solidFill>
-                <a:latin typeface="Arial"/>
-              </a:defRPr>
-            </a:pPr>
-            <a:endParaRPr lang="en-US"/>
-          </a:p>
-        </c:txPr>
-        <c:crossAx val="2094734552"/>
-        <c:crosses val="autoZero"/>
-        <c:auto val="1"/>
-        <c:lblAlgn val="ctr"/>
-        <c:noMultiLvlLbl val="1"/>
-      </c:catAx>
-      <c:valAx>
-        <c:axId val="2094734552"/>
-        <c:scaling>
-          <c:orientation val="minMax"/>
-        </c:scaling>
-        <c:delete val="0"/>
-        <c:axPos val="l"/>
-        <c:majorGridlines>
-          <c:spPr>
-            <a:ln w="6350" cap="flat">
-              <a:solidFill>
-                <a:srgbClr val="E2E8F0"/>
-              </a:solidFill>
-              <a:prstDash val="solid"/>
-              <a:round/>
-            </a:ln>
-          </c:spPr>
-        </c:majorGridlines>
-        <c:numFmt formatCode="General" sourceLinked="0"/>
-        <c:majorTickMark val="out"/>
-        <c:minorTickMark val="none"/>
-        <c:tickLblPos val="nextTo"/>
-        <c:spPr>
-          <a:ln w="12700" cap="flat">
-            <a:solidFill>
-              <a:srgbClr val="888888"/>
-            </a:solidFill>
-            <a:prstDash val="solid"/>
-            <a:round/>
-          </a:ln>
-        </c:spPr>
-        <c:txPr>
-          <a:bodyPr/>
-          <a:lstStyle/>
-          <a:p>
-            <a:pPr>
-              <a:defRPr sz="1200" b="0" i="0" u="none" strike="noStrike">
-                <a:solidFill>
-                  <a:srgbClr val="64748B"/>
-                </a:solidFill>
-                <a:latin typeface="Arial"/>
-              </a:defRPr>
-            </a:pPr>
-            <a:endParaRPr lang="en-US"/>
-          </a:p>
-        </c:txPr>
-        <c:crossAx val="2094734554"/>
-        <c:crosses val="autoZero"/>
-        <c:crossBetween val="between"/>
-      </c:valAx>
-      <c:spPr>
-        <a:noFill/>
-        <a:ln>
-          <a:noFill/>
-        </a:ln>
-        <a:effectLst/>
-      </c:spPr>
-    </c:plotArea>
-    <c:legend>
-      <c:legendPos val="b"/>
-      <c:overlay val="0"/>
-      <c:txPr>
-        <a:bodyPr/>
-        <a:lstStyle/>
-        <a:p>
-          <a:pPr>
-            <a:defRPr sz="900">      </a:defRPr>
-          </a:pPr>
-          <a:endParaRPr lang="en-US"/>
-        </a:p>
-      </c:txPr>
-    </c:legend>
-    <c:plotVisOnly val="1"/>
-    <c:dispBlanksAs val="span"/>
-  </c:chart>
-  <c:spPr>
-    <a:solidFill>
-      <a:srgbClr val="FFFFFF"/>
-    </a:solidFill>
-    <a:ln>
-      <a:noFill/>
-    </a:ln>
-    <a:effectLst/>
-  </c:spPr>
-  <c:externalData r:id="rId1">
-    <c:autoUpdate val="0"/>
-  </c:externalData>
-</c:chartSpace>
-</file>
-
-<file path=ppt/charts/chart3.xml><?xml version="1.0" encoding="utf-8"?>
-<c:chartSpace xmlns:c="http://schemas.openxmlformats.org/drawingml/2006/chart" xmlns:a="http://schemas.openxmlformats.org/drawingml/2006/main" xmlns:r="http://schemas.openxmlformats.org/officeDocument/2006/relationships">
-  <c:date1904 val="0"/>
-  <c:roundedCorners val="1"/>
-  <c:chart>
-    <c:autoTitleDeleted val="1"/>
-    <c:plotArea>
-      <c:layout/>
-      <c:barChart>
-        <c:barDir val="col"/>
-        <c:grouping val="clustered"/>
-        <c:varyColors val="0"/>
-        <c:ser>
-          <c:idx val="0"/>
-          <c:order val="0"/>
-          <c:tx>
-            <c:strRef>
-              <c:f>Sheet1!$B$1</c:f>
-              <c:strCache>
-                <c:ptCount val="1"/>
-                <c:pt idx="0">
-                  <c:v>Implied Price (INR)</c:v>
-                </c:pt>
-              </c:strCache>
-            </c:strRef>
-          </c:tx>
-          <c:spPr>
-            <a:solidFill>
-              <a:srgbClr val="DC2626"/>
-            </a:solidFill>
-            <a:effectLst/>
-          </c:spPr>
-          <c:invertIfNegative val="0"/>
-          <c:dLbls>
-            <c:numFmt formatCode="#,##0" sourceLinked="0"/>
-            <c:txPr>
-              <a:bodyPr/>
-              <a:lstStyle/>
-              <a:p>
-                <a:pPr>
-                  <a:defRPr b="0" i="0" strike="noStrike" sz="900" u="none">
-                    <a:solidFill>
-                      <a:srgbClr val="0F172A"/>
-                    </a:solidFill>
-                    <a:latin typeface="Arial"/>
-                  </a:defRPr>
-                </a:pPr>
-              </a:p>
-            </c:txPr>
-            <c:showLegendKey val="0"/>
-            <c:showVal val="1"/>
-            <c:showCatName val="0"/>
-            <c:showSerName val="0"/>
-            <c:showPercent val="0"/>
-            <c:showBubbleSize val="0"/>
-            <c:showLeaderLines val="0"/>
-          </c:dLbls>
-          <c:dPt>
-            <c:idx val="0"/>
-            <c:invertIfNegative val="0"/>
-            <c:bubble3D val="0"/>
-            <c:spPr>
-              <a:solidFill>
-                <a:srgbClr val="DC2626"/>
-              </a:solidFill>
-              <a:effectLst/>
-            </c:spPr>
-          </c:dPt>
-          <c:dPt>
-            <c:idx val="1"/>
-            <c:invertIfNegative val="0"/>
-            <c:bubble3D val="0"/>
-            <c:spPr>
-              <a:solidFill>
-                <a:srgbClr val="D97706"/>
-              </a:solidFill>
-              <a:effectLst/>
-            </c:spPr>
-          </c:dPt>
-          <c:dPt>
-            <c:idx val="2"/>
-            <c:invertIfNegative val="0"/>
-            <c:bubble3D val="0"/>
-            <c:spPr>
-              <a:solidFill>
-                <a:srgbClr val="059669"/>
-              </a:solidFill>
-              <a:effectLst/>
-            </c:spPr>
-          </c:dPt>
-          <c:cat>
-            <c:multiLvlStrRef>
-              <c:f>Sheet1!$A$2:$A$4</c:f>
-              <c:multiLvlStrCache>
-                <c:ptCount val="3"/>
-                <c:lvl>
-                  <c:pt idx="0">
-                    <c:v>Bear
-(-2% CAGR)</c:v>
-                  </c:pt>
-                  <c:pt idx="1">
-                    <c:v>Base
-(+5% CAGR)</c:v>
-                  </c:pt>
-                  <c:pt idx="2">
-                    <c:v>Bull
-(+10% CAGR)</c:v>
-                  </c:pt>
-                </c:lvl>
-              </c:multiLvlStrCache>
-            </c:multiLvlStrRef>
-          </c:cat>
-          <c:val>
-            <c:numRef>
-              <c:f>Sheet1!$B$2:$B$4</c:f>
-              <c:numCache>
-                <c:formatCode>General</c:formatCode>
-                <c:ptCount val="3"/>
-                <c:pt idx="0">
-                  <c:v>388</c:v>
-                </c:pt>
-                <c:pt idx="1">
-                  <c:v>685</c:v>
-                </c:pt>
-                <c:pt idx="2">
-                  <c:v>1061</c:v>
-                </c:pt>
-              </c:numCache>
-            </c:numRef>
-          </c:val>
-        </c:ser>
-        <c:dLbls>
-          <c:numFmt formatCode="#,##0" sourceLinked="0"/>
-          <c:txPr>
-            <a:bodyPr/>
-            <a:lstStyle/>
-            <a:p>
-              <a:pPr>
-                <a:defRPr b="0" i="0" strike="noStrike" sz="900" u="none">
-                  <a:solidFill>
-                    <a:srgbClr val="0F172A"/>
-                  </a:solidFill>
-                  <a:latin typeface="Arial"/>
-                </a:defRPr>
-              </a:pPr>
-            </a:p>
-          </c:txPr>
-          <c:showLegendKey val="0"/>
-          <c:showVal val="1"/>
-          <c:showCatName val="0"/>
-          <c:showSerName val="0"/>
-          <c:showPercent val="0"/>
-          <c:showBubbleSize val="0"/>
-          <c:showLeaderLines val="0"/>
-        </c:dLbls>
-        <c:gapWidth val="150"/>
-        <c:overlap val="0"/>
-        <c:axId val="2094734554"/>
-        <c:axId val="2094734552"/>
-        <c:axId val="2094734556"/>
-      </c:barChart>
-      <c:catAx>
-        <c:axId val="2094734554"/>
-        <c:scaling>
-          <c:orientation val="minMax"/>
-        </c:scaling>
-        <c:delete val="0"/>
-        <c:axPos val="b"/>
-        <c:numFmt formatCode="General" sourceLinked="1"/>
-        <c:majorTickMark val="out"/>
-        <c:minorTickMark val="none"/>
-        <c:tickLblPos val="low"/>
-        <c:spPr>
-          <a:ln w="12700" cap="flat">
-            <a:solidFill>
-              <a:srgbClr val="888888"/>
-            </a:solidFill>
-            <a:prstDash val="solid"/>
-            <a:round/>
-          </a:ln>
-        </c:spPr>
-        <c:txPr>
-          <a:bodyPr/>
-          <a:lstStyle/>
-          <a:p>
-            <a:pPr>
-              <a:defRPr sz="1200" b="0" i="0" u="none" strike="noStrike">
-                <a:solidFill>
-                  <a:srgbClr val="64748B"/>
-                </a:solidFill>
-                <a:latin typeface="Arial"/>
-              </a:defRPr>
-            </a:pPr>
-            <a:endParaRPr lang="en-US"/>
-          </a:p>
-        </c:txPr>
-        <c:crossAx val="2094734552"/>
-        <c:crosses val="autoZero"/>
-        <c:auto val="1"/>
-        <c:lblAlgn val="ctr"/>
-        <c:noMultiLvlLbl val="1"/>
-      </c:catAx>
-      <c:valAx>
-        <c:axId val="2094734552"/>
-        <c:scaling>
-          <c:orientation val="minMax"/>
-          <c:min val="0"/>
-        </c:scaling>
-        <c:delete val="0"/>
-        <c:axPos val="l"/>
-        <c:majorGridlines>
-          <c:spPr>
-            <a:ln w="6350" cap="flat">
-              <a:solidFill>
-                <a:srgbClr val="E2E8F0"/>
-              </a:solidFill>
-              <a:prstDash val="solid"/>
-              <a:round/>
-            </a:ln>
-          </c:spPr>
-        </c:majorGridlines>
-        <c:numFmt formatCode="General" sourceLinked="0"/>
-        <c:majorTickMark val="out"/>
-        <c:minorTickMark val="none"/>
-        <c:tickLblPos val="nextTo"/>
-        <c:spPr>
-          <a:ln w="12700" cap="flat">
-            <a:solidFill>
-              <a:srgbClr val="888888"/>
-            </a:solidFill>
-            <a:prstDash val="solid"/>
-            <a:round/>
-          </a:ln>
-        </c:spPr>
-        <c:txPr>
-          <a:bodyPr/>
-          <a:lstStyle/>
-          <a:p>
-            <a:pPr>
-              <a:defRPr sz="1200" b="0" i="0" u="none" strike="noStrike">
-                <a:solidFill>
-                  <a:srgbClr val="64748B"/>
-                </a:solidFill>
-                <a:latin typeface="Arial"/>
-              </a:defRPr>
-            </a:pPr>
-            <a:endParaRPr lang="en-US"/>
-          </a:p>
-        </c:txPr>
-        <c:crossAx val="2094734554"/>
-        <c:crosses val="autoZero"/>
-        <c:crossBetween val="between"/>
-      </c:valAx>
-      <c:spPr>
-        <a:noFill/>
-        <a:ln>
-          <a:noFill/>
-        </a:ln>
-        <a:effectLst/>
-      </c:spPr>
-    </c:plotArea>
-    <c:plotVisOnly val="1"/>
-    <c:dispBlanksAs val="span"/>
-  </c:chart>
-  <c:spPr>
-    <a:solidFill>
-      <a:srgbClr val="FFFFFF"/>
-    </a:solidFill>
-    <a:ln>
-      <a:noFill/>
-    </a:ln>
-    <a:effectLst/>
-  </c:spPr>
-  <c:externalData r:id="rId1">
-    <c:autoUpdate val="0"/>
-  </c:externalData>
-</c:chartSpace>
-</file>
-
-<file path=ppt/charts/chart4.xml><?xml version="1.0" encoding="utf-8"?>
-<c:chartSpace xmlns:c="http://schemas.openxmlformats.org/drawingml/2006/chart" xmlns:a="http://schemas.openxmlformats.org/drawingml/2006/main" xmlns:r="http://schemas.openxmlformats.org/officeDocument/2006/relationships">
-  <c:date1904 val="0"/>
-  <c:roundedCorners val="1"/>
-  <c:chart>
-    <c:autoTitleDeleted val="1"/>
-    <c:plotArea>
-      <c:layout/>
-      <c:doughnutChart>
-        <c:varyColors val="1"/>
-        <c:ser>
-          <c:idx val="0"/>
-          <c:order val="0"/>
-          <c:tx>
-            <c:strRef>
-              <c:f>Sheet1!$B$1</c:f>
-              <c:strCache>
-                <c:ptCount val="1"/>
-                <c:pt idx="0">
-                  <c:v>Ratings</c:v>
-                </c:pt>
-              </c:strCache>
-            </c:strRef>
-          </c:tx>
-          <c:spPr>
-            <a:solidFill>
-              <a:schemeClr val="accent1"/>
-            </a:solidFill>
-            <a:ln w="9525" cap="flat">
-              <a:solidFill>
-                <a:srgbClr val="F9F9F9"/>
-              </a:solidFill>
-              <a:prstDash val="solid"/>
-              <a:round/>
-            </a:ln>
-            <a:effectLst/>
-          </c:spPr>
-          <c:dPt>
-            <c:idx val="0"/>
-            <c:bubble3D val="0"/>
-            <c:spPr>
-              <a:solidFill>
-                <a:srgbClr val="059669"/>
-              </a:solidFill>
-              <a:effectLst/>
-            </c:spPr>
-          </c:dPt>
-          <c:dPt>
-            <c:idx val="1"/>
-            <c:bubble3D val="0"/>
-            <c:spPr>
-              <a:solidFill>
-                <a:srgbClr val="34D399"/>
-              </a:solidFill>
-              <a:effectLst/>
-            </c:spPr>
-          </c:dPt>
-          <c:dPt>
-            <c:idx val="2"/>
-            <c:bubble3D val="0"/>
-            <c:spPr>
-              <a:solidFill>
-                <a:srgbClr val="D97706"/>
-              </a:solidFill>
-              <a:effectLst/>
-            </c:spPr>
-          </c:dPt>
-          <c:dPt>
-            <c:idx val="3"/>
-            <c:bubble3D val="0"/>
-            <c:spPr>
-              <a:solidFill>
-                <a:srgbClr val="F87171"/>
-              </a:solidFill>
-              <a:effectLst/>
-            </c:spPr>
-          </c:dPt>
-          <c:dPt>
-            <c:idx val="4"/>
-            <c:bubble3D val="0"/>
-            <c:spPr>
-              <a:solidFill>
-                <a:srgbClr val="DC2626"/>
-              </a:solidFill>
-              <a:effectLst/>
-            </c:spPr>
-          </c:dPt>
-          <c:dLbls>
-            <c:dLbl>
-              <c:idx val="0"/>
-              <c:numFmt formatCode="0%" sourceLinked="0"/>
-              <c:spPr/>
-              <c:txPr>
-                <a:bodyPr/>
-                <a:lstStyle/>
-                <a:p>
-                  <a:pPr>
-                    <a:defRPr sz="1000" b="0" i="0" u="none" strike="noStrike">
-                      <a:solidFill>
-                        <a:srgbClr val="FFFFFF"/>
-                      </a:solidFill>
-                      <a:latin typeface="Arial"/>
-                    </a:defRPr>
-                  </a:pPr>
-                </a:p>
-              </c:txPr>
-              <c:showLegendKey val="0"/>
-              <c:showVal val="0"/>
-              <c:showCatName val="0"/>
-              <c:showSerName val="0"/>
-              <c:showPercent val="1"/>
-              <c:showBubbleSize val="0"/>
-            </c:dLbl>
-            <c:dLbl>
-              <c:idx val="1"/>
-              <c:numFmt formatCode="0%" sourceLinked="0"/>
-              <c:spPr/>
-              <c:txPr>
-                <a:bodyPr/>
-                <a:lstStyle/>
-                <a:p>
-                  <a:pPr>
-                    <a:defRPr sz="1000" b="0" i="0" u="none" strike="noStrike">
-                      <a:solidFill>
-                        <a:srgbClr val="FFFFFF"/>
-                      </a:solidFill>
-                      <a:latin typeface="Arial"/>
-                    </a:defRPr>
-                  </a:pPr>
-                </a:p>
-              </c:txPr>
-              <c:showLegendKey val="0"/>
-              <c:showVal val="0"/>
-              <c:showCatName val="0"/>
-              <c:showSerName val="0"/>
-              <c:showPercent val="1"/>
-              <c:showBubbleSize val="0"/>
-            </c:dLbl>
-            <c:dLbl>
-              <c:idx val="2"/>
-              <c:numFmt formatCode="0%" sourceLinked="0"/>
-              <c:spPr/>
-              <c:txPr>
-                <a:bodyPr/>
-                <a:lstStyle/>
-                <a:p>
-                  <a:pPr>
-                    <a:defRPr sz="1000" b="0" i="0" u="none" strike="noStrike">
-                      <a:solidFill>
-                        <a:srgbClr val="FFFFFF"/>
-                      </a:solidFill>
-                      <a:latin typeface="Arial"/>
-                    </a:defRPr>
-                  </a:pPr>
-                </a:p>
-              </c:txPr>
-              <c:showLegendKey val="0"/>
-              <c:showVal val="0"/>
-              <c:showCatName val="0"/>
-              <c:showSerName val="0"/>
-              <c:showPercent val="1"/>
-              <c:showBubbleSize val="0"/>
-            </c:dLbl>
-            <c:dLbl>
-              <c:idx val="3"/>
-              <c:numFmt formatCode="0%" sourceLinked="0"/>
-              <c:spPr/>
-              <c:txPr>
-                <a:bodyPr/>
-                <a:lstStyle/>
-                <a:p>
-                  <a:pPr>
-                    <a:defRPr sz="1000" b="0" i="0" u="none" strike="noStrike">
-                      <a:solidFill>
-                        <a:srgbClr val="FFFFFF"/>
-                      </a:solidFill>
-                      <a:latin typeface="Arial"/>
-                    </a:defRPr>
-                  </a:pPr>
-                </a:p>
-              </c:txPr>
-              <c:showLegendKey val="0"/>
-              <c:showVal val="0"/>
-              <c:showCatName val="0"/>
-              <c:showSerName val="0"/>
-              <c:showPercent val="1"/>
-              <c:showBubbleSize val="0"/>
-            </c:dLbl>
-            <c:dLbl>
-              <c:idx val="4"/>
-              <c:numFmt formatCode="0%" sourceLinked="0"/>
-              <c:spPr/>
-              <c:txPr>
-                <a:bodyPr/>
-                <a:lstStyle/>
-                <a:p>
-                  <a:pPr>
-                    <a:defRPr sz="1000" b="0" i="0" u="none" strike="noStrike">
-                      <a:solidFill>
-                        <a:srgbClr val="FFFFFF"/>
-                      </a:solidFill>
-                      <a:latin typeface="Arial"/>
-                    </a:defRPr>
-                  </a:pPr>
-                </a:p>
-              </c:txPr>
-              <c:showLegendKey val="0"/>
-              <c:showVal val="0"/>
-              <c:showCatName val="0"/>
-              <c:showSerName val="0"/>
-              <c:showPercent val="1"/>
-              <c:showBubbleSize val="0"/>
-            </c:dLbl>
-            <c:numFmt formatCode="0%" sourceLinked="0"/>
-            <c:txPr>
-              <a:bodyPr/>
-              <a:lstStyle/>
-              <a:p>
-                <a:pPr>
-                  <a:defRPr sz="1800" b="0" i="0" u="none" strike="noStrike">
-                    <a:solidFill>
-                      <a:srgbClr val="000000"/>
-                    </a:solidFill>
-                    <a:latin typeface="Arial"/>
-                  </a:defRPr>
-                </a:pPr>
-              </a:p>
-            </c:txPr>
-            <c:showLegendKey val="0"/>
-            <c:showVal val="0"/>
-            <c:showCatName val="1"/>
-            <c:showSerName val="0"/>
-            <c:showPercent val="1"/>
-            <c:showBubbleSize val="0"/>
-            <c:showLeaderLines val="0"/>
-          </c:dLbls>
-          <c:cat>
-            <c:strRef>
-              <c:f>Sheet1!$A$2:$A$6</c:f>
-              <c:strCache>
-                <c:ptCount val="5"/>
-                <c:pt idx="0">
-                  <c:v>Strong Buy</c:v>
-                </c:pt>
-                <c:pt idx="1">
-                  <c:v>Buy</c:v>
-                </c:pt>
-                <c:pt idx="2">
-                  <c:v>Hold</c:v>
-                </c:pt>
-                <c:pt idx="3">
-                  <c:v>Sell</c:v>
-                </c:pt>
-                <c:pt idx="4">
-                  <c:v>Strong Sell</c:v>
-                </c:pt>
-              </c:strCache>
-            </c:strRef>
-          </c:cat>
-          <c:val>
-            <c:numRef>
-              <c:f>Sheet1!$B$2:$B$6</c:f>
-              <c:numCache>
-                <c:ptCount val="5"/>
-                <c:pt idx="0">
-                  <c:v>12</c:v>
-                </c:pt>
-                <c:pt idx="1">
-                  <c:v>27</c:v>
-                </c:pt>
-                <c:pt idx="2">
-                  <c:v>35</c:v>
-                </c:pt>
-                <c:pt idx="3">
-                  <c:v>12</c:v>
-                </c:pt>
-                <c:pt idx="4">
-                  <c:v>12</c:v>
-                </c:pt>
-              </c:numCache>
-            </c:numRef>
-          </c:val>
-        </c:ser>
-        <c:firstSliceAng val="0"/>
-        <c:holeSize val="55"/>
-      </c:doughnutChart>
-      <c:spPr>
-        <a:noFill/>
-        <a:ln>
-          <a:noFill/>
-        </a:ln>
-        <a:effectLst/>
-      </c:spPr>
-    </c:plotArea>
-    <c:legend>
-      <c:legendPos val="b"/>
-      <c:overlay val="0"/>
-      <c:txPr>
-        <a:bodyPr/>
-        <a:lstStyle/>
-        <a:p>
-          <a:pPr>
-            <a:defRPr sz="900">      </a:defRPr>
-          </a:pPr>
-          <a:endParaRPr lang="en-US"/>
-        </a:p>
-      </c:txPr>
-    </c:legend>
-    <c:plotVisOnly val="1"/>
-    <c:dispBlanksAs val="span"/>
-  </c:chart>
-  <c:spPr>
-    <a:solidFill>
-      <a:srgbClr val="FFFFFF"/>
-    </a:solidFill>
-    <a:ln>
-      <a:noFill/>
-    </a:ln>
-    <a:effectLst/>
-  </c:spPr>
-  <c:externalData r:id="rId1">
-    <c:autoUpdate val="0"/>
-  </c:externalData>
-</c:chartSpace>
 </file>
 
 <file path=ppt/notesMasters/notesMaster1.xml><?xml version="1.0" encoding="utf-8"?>
@@ -2619,94 +1149,6 @@
             <a:fld id="{F7021451-1387-4CA6-816F-3879F97B5CBC}" type="slidenum">
               <a:rPr lang="en-US"/>
               <a:t>8</a:t>
-            </a:fld>
-            <a:endParaRPr lang="en-US"/>
-          </a:p>
-        </p:txBody>
-      </p:sp>
-    </p:spTree>
-    <p:extLst>
-      <p:ext uri="{BB962C8B-B14F-4D97-AF65-F5344CB8AC3E}">
-        <p14:creationId xmlns:p14="http://schemas.microsoft.com/office/powerpoint/2010/main" val="1024086991"/>
-      </p:ext>
-    </p:extLst>
-  </p:cSld>
-  <p:clrMapOvr>
-    <a:masterClrMapping/>
-  </p:clrMapOvr>
-</p:notes>
-</file>
-
-<file path=ppt/notesSlides/notesSlide9.xml><?xml version="1.0" encoding="utf-8"?>
-<p:notes xmlns:a="http://schemas.openxmlformats.org/drawingml/2006/main" xmlns:r="http://schemas.openxmlformats.org/officeDocument/2006/relationships" xmlns:p="http://schemas.openxmlformats.org/presentationml/2006/main">
-  <p:cSld>
-    <p:spTree>
-      <p:nvGrpSpPr>
-        <p:cNvPr id="1" name=""/>
-        <p:cNvGrpSpPr/>
-        <p:nvPr/>
-      </p:nvGrpSpPr>
-      <p:grpSpPr>
-        <a:xfrm>
-          <a:off x="0" y="0"/>
-          <a:ext cx="0" cy="0"/>
-          <a:chOff x="0" y="0"/>
-          <a:chExt cx="0" cy="0"/>
-        </a:xfrm>
-      </p:grpSpPr>
-      <p:sp>
-        <p:nvSpPr>
-          <p:cNvPr id="2" name="Slide Image Placeholder 1"/>
-          <p:cNvSpPr>
-            <a:spLocks noGrp="1" noRot="1" noChangeAspect="1"/>
-          </p:cNvSpPr>
-          <p:nvPr>
-            <p:ph type="sldImg"/>
-          </p:nvPr>
-        </p:nvSpPr>
-        <p:spPr/>
-      </p:sp>
-      <p:sp>
-        <p:nvSpPr>
-          <p:cNvPr id="3" name="Notes Placeholder 2"/>
-          <p:cNvSpPr>
-            <a:spLocks noGrp="1"/>
-          </p:cNvSpPr>
-          <p:nvPr>
-            <p:ph type="body" idx="1"/>
-          </p:nvPr>
-        </p:nvSpPr>
-        <p:spPr/>
-        <p:txBody>
-          <a:bodyPr/>
-          <a:lstStyle/>
-          <a:p>
-            <a:r>
-              <a:rPr lang="en-US" dirty="0"/>
-              <a:t/>
-            </a:r>
-            <a:endParaRPr lang="en-US" dirty="0"/>
-          </a:p>
-        </p:txBody>
-      </p:sp>
-      <p:sp>
-        <p:nvSpPr>
-          <p:cNvPr id="4" name="Slide Number Placeholder 3"/>
-          <p:cNvSpPr>
-            <a:spLocks noGrp="1"/>
-          </p:cNvSpPr>
-          <p:nvPr>
-            <p:ph type="sldNum" sz="quarter" idx="10"/>
-          </p:nvPr>
-        </p:nvSpPr>
-        <p:spPr/>
-        <p:txBody>
-          <a:bodyPr/>
-          <a:lstStyle/>
-          <a:p>
-            <a:fld id="{F7021451-1387-4CA6-816F-3879F97B5CBC}" type="slidenum">
-              <a:rPr lang="en-US"/>
-              <a:t>9</a:t>
             </a:fld>
             <a:endParaRPr lang="en-US"/>
           </a:p>
@@ -3084,8 +1526,8 @@
         </p:nvSpPr>
         <p:spPr>
           <a:xfrm>
-            <a:off x="502920" y="685800"/>
-            <a:ext cx="7772400" cy="914400"/>
+            <a:off x="502920" y="640080"/>
+            <a:ext cx="7772400" cy="868680"/>
           </a:xfrm>
           <a:prstGeom prst="rect">
             <a:avLst/>
@@ -3123,8 +1565,8 @@
         </p:nvSpPr>
         <p:spPr>
           <a:xfrm>
-            <a:off x="502920" y="1554480"/>
-            <a:ext cx="7772400" cy="411480"/>
+            <a:off x="502920" y="1481328"/>
+            <a:ext cx="7772400" cy="384048"/>
           </a:xfrm>
           <a:prstGeom prst="rect">
             <a:avLst/>
@@ -3162,7 +1604,7 @@
         </p:nvSpPr>
         <p:spPr>
           <a:xfrm>
-            <a:off x="502920" y="2084832"/>
+            <a:off x="502920" y="1993392"/>
             <a:ext cx="5029200" cy="27432"/>
           </a:xfrm>
           <a:prstGeom prst="rect">
@@ -3182,8 +1624,8 @@
         </p:nvSpPr>
         <p:spPr>
           <a:xfrm>
-            <a:off x="502920" y="2212848"/>
-            <a:ext cx="7772400" cy="256032"/>
+            <a:off x="502920" y="2121408"/>
+            <a:ext cx="7772400" cy="237744"/>
           </a:xfrm>
           <a:prstGeom prst="rect">
             <a:avLst/>
@@ -3221,8 +1663,8 @@
         </p:nvSpPr>
         <p:spPr>
           <a:xfrm>
-            <a:off x="502920" y="2633472"/>
-            <a:ext cx="5486400" cy="237744"/>
+            <a:off x="502920" y="2487168"/>
+            <a:ext cx="5486400" cy="228600"/>
           </a:xfrm>
           <a:prstGeom prst="rect">
             <a:avLst/>
@@ -3260,8 +1702,8 @@
         </p:nvSpPr>
         <p:spPr>
           <a:xfrm>
-            <a:off x="502920" y="2944368"/>
-            <a:ext cx="5486400" cy="219456"/>
+            <a:off x="502920" y="2779776"/>
+            <a:ext cx="5486400" cy="210312"/>
           </a:xfrm>
           <a:prstGeom prst="rect">
             <a:avLst/>
@@ -3299,7 +1741,7 @@
         </p:nvSpPr>
         <p:spPr>
           <a:xfrm>
-            <a:off x="502920" y="3337560"/>
+            <a:off x="502920" y="3127248"/>
             <a:ext cx="8229600" cy="201168"/>
           </a:xfrm>
           <a:prstGeom prst="rect">
@@ -3377,8 +1819,8 @@
         </p:nvSpPr>
         <p:spPr>
           <a:xfrm>
-            <a:off x="6858000" y="1737360"/>
-            <a:ext cx="2011680" cy="1463040"/>
+            <a:off x="6858000" y="1691640"/>
+            <a:ext cx="2011680" cy="1508760"/>
           </a:xfrm>
           <a:prstGeom prst="rect">
             <a:avLst/>
@@ -3402,7 +1844,7 @@
         </p:nvSpPr>
         <p:spPr>
           <a:xfrm>
-            <a:off x="6903720" y="1847088"/>
+            <a:off x="6903720" y="1801368"/>
             <a:ext cx="1920240" cy="182880"/>
           </a:xfrm>
           <a:prstGeom prst="rect">
@@ -3441,8 +1883,8 @@
         </p:nvSpPr>
         <p:spPr>
           <a:xfrm>
-            <a:off x="6903720" y="2029968"/>
-            <a:ext cx="1920240" cy="502920"/>
+            <a:off x="6903720" y="1984248"/>
+            <a:ext cx="1920240" cy="475488"/>
           </a:xfrm>
           <a:prstGeom prst="rect">
             <a:avLst/>
@@ -3480,7 +1922,7 @@
         </p:nvSpPr>
         <p:spPr>
           <a:xfrm>
-            <a:off x="6903720" y="2523744"/>
+            <a:off x="6903720" y="2450592"/>
             <a:ext cx="1920240" cy="201168"/>
           </a:xfrm>
           <a:prstGeom prst="rect">
@@ -3519,7 +1961,7 @@
         </p:nvSpPr>
         <p:spPr>
           <a:xfrm>
-            <a:off x="6903720" y="2724912"/>
+            <a:off x="6903720" y="2651760"/>
             <a:ext cx="1920240" cy="201168"/>
           </a:xfrm>
           <a:prstGeom prst="rect">
@@ -3610,7 +2052,7 @@
         </p:nvSpPr>
         <p:spPr>
           <a:xfrm>
-            <a:off x="502920" y="292608"/>
+            <a:off x="502920" y="274320"/>
             <a:ext cx="8229600" cy="256032"/>
           </a:xfrm>
           <a:prstGeom prst="rect">
@@ -3649,8 +2091,8 @@
         </p:nvSpPr>
         <p:spPr>
           <a:xfrm>
-            <a:off x="502920" y="594360"/>
-            <a:ext cx="4572000" cy="1188720"/>
+            <a:off x="502920" y="566928"/>
+            <a:ext cx="4572000" cy="1097280"/>
           </a:xfrm>
           <a:prstGeom prst="rect">
             <a:avLst/>
@@ -3688,8 +2130,8 @@
         </p:nvSpPr>
         <p:spPr>
           <a:xfrm>
-            <a:off x="502920" y="1920240"/>
-            <a:ext cx="8321040" cy="1508760"/>
+            <a:off x="502920" y="1828800"/>
+            <a:ext cx="8321040" cy="1536192"/>
           </a:xfrm>
           <a:prstGeom prst="rect">
             <a:avLst/>
@@ -3713,8 +2155,8 @@
         </p:nvSpPr>
         <p:spPr>
           <a:xfrm>
-            <a:off x="713232" y="2048256"/>
-            <a:ext cx="7909560" cy="1261872"/>
+            <a:off x="713232" y="1956816"/>
+            <a:ext cx="7909560" cy="1298448"/>
           </a:xfrm>
           <a:prstGeom prst="rect">
             <a:avLst/>
@@ -3738,7 +2180,7 @@
                 <a:ea typeface="Calibri" pitchFamily="34" charset="-122"/>
                 <a:cs typeface="Calibri" pitchFamily="34" charset="-120"/>
               </a:rPr>
-              <a:t>Coal India is the world's largest coal miner — a government-backed monopoly with 35% ROCE, zero debt, and a 5.7% dividend yield trading at just 9x earnings. The valuation is cheap. But the energy transition from coal to renewables in India is real and accelerating. This is an income vehicle with a 5–7 year runway, not a 15-year compounder. Buy at INR 380–430 for the income; hold with an exit plan as renewables approach 60% of India's power mix.</a:t>
+              <a:t>Coal India is the world's largest coal miner — a government monopoly with 35% ROCE, zero debt, and a 5.7% dividend yield at just 9x earnings. The valuation is cheap. But India's energy transition from coal to renewables is real and accelerating. This is an income vehicle with a 5–7 year runway, not a 15-year compounder. Buy at INR 380–430 for income; hold with a clear exit plan.</a:t>
             </a:r>
             <a:endParaRPr lang="en-US" sz="1250" dirty="0"/>
           </a:p>
@@ -3752,8 +2194,8 @@
         </p:nvSpPr>
         <p:spPr>
           <a:xfrm>
-            <a:off x="502920" y="3593592"/>
-            <a:ext cx="2029968" cy="987552"/>
+            <a:off x="502920" y="3529584"/>
+            <a:ext cx="2029968" cy="1005840"/>
           </a:xfrm>
           <a:prstGeom prst="rect">
             <a:avLst/>
@@ -3777,7 +2219,7 @@
         </p:nvSpPr>
         <p:spPr>
           <a:xfrm>
-            <a:off x="612648" y="3666744"/>
+            <a:off x="612648" y="3602736"/>
             <a:ext cx="1828800" cy="182880"/>
           </a:xfrm>
           <a:prstGeom prst="rect">
@@ -3816,7 +2258,7 @@
         </p:nvSpPr>
         <p:spPr>
           <a:xfrm>
-            <a:off x="612648" y="3858768"/>
+            <a:off x="612648" y="3794760"/>
             <a:ext cx="1828800" cy="438912"/>
           </a:xfrm>
           <a:prstGeom prst="rect">
@@ -3855,8 +2297,8 @@
         </p:nvSpPr>
         <p:spPr>
           <a:xfrm>
-            <a:off x="2697480" y="3593592"/>
-            <a:ext cx="2029968" cy="987552"/>
+            <a:off x="2697480" y="3529584"/>
+            <a:ext cx="2029968" cy="1005840"/>
           </a:xfrm>
           <a:prstGeom prst="rect">
             <a:avLst/>
@@ -3880,7 +2322,7 @@
         </p:nvSpPr>
         <p:spPr>
           <a:xfrm>
-            <a:off x="2807208" y="3666744"/>
+            <a:off x="2807208" y="3602736"/>
             <a:ext cx="1828800" cy="182880"/>
           </a:xfrm>
           <a:prstGeom prst="rect">
@@ -3919,7 +2361,7 @@
         </p:nvSpPr>
         <p:spPr>
           <a:xfrm>
-            <a:off x="2807208" y="3858768"/>
+            <a:off x="2807208" y="3794760"/>
             <a:ext cx="1828800" cy="438912"/>
           </a:xfrm>
           <a:prstGeom prst="rect">
@@ -3958,8 +2400,8 @@
         </p:nvSpPr>
         <p:spPr>
           <a:xfrm>
-            <a:off x="4892040" y="3593592"/>
-            <a:ext cx="2029968" cy="987552"/>
+            <a:off x="4892040" y="3529584"/>
+            <a:ext cx="2029968" cy="1005840"/>
           </a:xfrm>
           <a:prstGeom prst="rect">
             <a:avLst/>
@@ -3983,7 +2425,7 @@
         </p:nvSpPr>
         <p:spPr>
           <a:xfrm>
-            <a:off x="5001768" y="3666744"/>
+            <a:off x="5001768" y="3602736"/>
             <a:ext cx="1828800" cy="182880"/>
           </a:xfrm>
           <a:prstGeom prst="rect">
@@ -4022,7 +2464,7 @@
         </p:nvSpPr>
         <p:spPr>
           <a:xfrm>
-            <a:off x="5001768" y="3858768"/>
+            <a:off x="5001768" y="3794760"/>
             <a:ext cx="1828800" cy="438912"/>
           </a:xfrm>
           <a:prstGeom prst="rect">
@@ -4047,7 +2489,7 @@
                 <a:ea typeface="Calibri" pitchFamily="34" charset="-122"/>
                 <a:cs typeface="Calibri" pitchFamily="34" charset="-120"/>
               </a:rPr>
-              <a:t>INR 380 – INR 430</a:t>
+              <a:t>INR 380–430</a:t>
             </a:r>
             <a:endParaRPr lang="en-US" sz="1800" dirty="0"/>
           </a:p>
@@ -4061,8 +2503,8 @@
         </p:nvSpPr>
         <p:spPr>
           <a:xfrm>
-            <a:off x="7086600" y="3593592"/>
-            <a:ext cx="2029968" cy="987552"/>
+            <a:off x="7086600" y="3529584"/>
+            <a:ext cx="2029968" cy="1005840"/>
           </a:xfrm>
           <a:prstGeom prst="rect">
             <a:avLst/>
@@ -4086,7 +2528,7 @@
         </p:nvSpPr>
         <p:spPr>
           <a:xfrm>
-            <a:off x="7196328" y="3666744"/>
+            <a:off x="7196328" y="3602736"/>
             <a:ext cx="1828800" cy="182880"/>
           </a:xfrm>
           <a:prstGeom prst="rect">
@@ -4125,7 +2567,7 @@
         </p:nvSpPr>
         <p:spPr>
           <a:xfrm>
-            <a:off x="7196328" y="3858768"/>
+            <a:off x="7196328" y="3794760"/>
             <a:ext cx="1828800" cy="438912"/>
           </a:xfrm>
           <a:prstGeom prst="rect">
@@ -4321,7 +2763,7 @@
         </p:nvSpPr>
         <p:spPr>
           <a:xfrm>
-            <a:off x="457200" y="777240"/>
+            <a:off x="457200" y="768096"/>
             <a:ext cx="4937760" cy="219456"/>
           </a:xfrm>
           <a:prstGeom prst="rect">
@@ -4400,7 +2842,7 @@
         <p:spPr>
           <a:xfrm>
             <a:off x="274320" y="3090672"/>
-            <a:ext cx="5303520" cy="1755648"/>
+            <a:ext cx="5303520" cy="1737360"/>
           </a:xfrm>
           <a:prstGeom prst="rect">
             <a:avLst/>
@@ -4580,7 +3022,7 @@
         </p:nvSpPr>
         <p:spPr>
           <a:xfrm>
-            <a:off x="6035040" y="786384"/>
+            <a:off x="6035040" y="777240"/>
             <a:ext cx="1298448" cy="201168"/>
           </a:xfrm>
           <a:prstGeom prst="rect">
@@ -4619,7 +3061,7 @@
         </p:nvSpPr>
         <p:spPr>
           <a:xfrm>
-            <a:off x="6035040" y="987552"/>
+            <a:off x="6035040" y="969264"/>
             <a:ext cx="1298448" cy="347472"/>
           </a:xfrm>
           <a:prstGeom prst="rect">
@@ -4658,7 +3100,7 @@
         </p:nvSpPr>
         <p:spPr>
           <a:xfrm>
-            <a:off x="6035040" y="1335024"/>
+            <a:off x="6035040" y="1316736"/>
             <a:ext cx="1298448" cy="164592"/>
           </a:xfrm>
           <a:prstGeom prst="rect">
@@ -4729,7 +3171,7 @@
         </p:nvSpPr>
         <p:spPr>
           <a:xfrm>
-            <a:off x="7699248" y="786384"/>
+            <a:off x="7699248" y="777240"/>
             <a:ext cx="1298448" cy="201168"/>
           </a:xfrm>
           <a:prstGeom prst="rect">
@@ -4768,7 +3210,7 @@
         </p:nvSpPr>
         <p:spPr>
           <a:xfrm>
-            <a:off x="7699248" y="987552"/>
+            <a:off x="7699248" y="969264"/>
             <a:ext cx="1298448" cy="347472"/>
           </a:xfrm>
           <a:prstGeom prst="rect">
@@ -4807,7 +3249,7 @@
         </p:nvSpPr>
         <p:spPr>
           <a:xfrm>
-            <a:off x="7699248" y="1335024"/>
+            <a:off x="7699248" y="1316736"/>
             <a:ext cx="1298448" cy="164592"/>
           </a:xfrm>
           <a:prstGeom prst="rect">
@@ -4878,7 +3320,7 @@
         </p:nvSpPr>
         <p:spPr>
           <a:xfrm>
-            <a:off x="6035040" y="1837944"/>
+            <a:off x="6035040" y="1828800"/>
             <a:ext cx="1298448" cy="201168"/>
           </a:xfrm>
           <a:prstGeom prst="rect">
@@ -4917,7 +3359,7 @@
         </p:nvSpPr>
         <p:spPr>
           <a:xfrm>
-            <a:off x="6035040" y="2039112"/>
+            <a:off x="6035040" y="2020824"/>
             <a:ext cx="1298448" cy="347472"/>
           </a:xfrm>
           <a:prstGeom prst="rect">
@@ -4956,7 +3398,7 @@
         </p:nvSpPr>
         <p:spPr>
           <a:xfrm>
-            <a:off x="6035040" y="2386584"/>
+            <a:off x="6035040" y="2368296"/>
             <a:ext cx="1298448" cy="164592"/>
           </a:xfrm>
           <a:prstGeom prst="rect">
@@ -4981,7 +3423,7 @@
                 <a:ea typeface="Calibri" pitchFamily="34" charset="-122"/>
                 <a:cs typeface="Calibri" pitchFamily="34" charset="-120"/>
               </a:rPr>
-              <a:t>FY2026</a:t>
+              <a:t>FY2026 (down from 32.5%)</a:t>
             </a:r>
             <a:endParaRPr lang="en-US" sz="800" dirty="0"/>
           </a:p>
@@ -5027,7 +3469,7 @@
         </p:nvSpPr>
         <p:spPr>
           <a:xfrm>
-            <a:off x="7699248" y="1837944"/>
+            <a:off x="7699248" y="1828800"/>
             <a:ext cx="1298448" cy="201168"/>
           </a:xfrm>
           <a:prstGeom prst="rect">
@@ -5066,7 +3508,7 @@
         </p:nvSpPr>
         <p:spPr>
           <a:xfrm>
-            <a:off x="7699248" y="2039112"/>
+            <a:off x="7699248" y="2020824"/>
             <a:ext cx="1298448" cy="347472"/>
           </a:xfrm>
           <a:prstGeom prst="rect">
@@ -5105,7 +3547,7 @@
         </p:nvSpPr>
         <p:spPr>
           <a:xfrm>
-            <a:off x="7699248" y="2386584"/>
+            <a:off x="7699248" y="2368296"/>
             <a:ext cx="1298448" cy="164592"/>
           </a:xfrm>
           <a:prstGeom prst="rect">
@@ -5176,7 +3618,7 @@
         </p:nvSpPr>
         <p:spPr>
           <a:xfrm>
-            <a:off x="6035040" y="2889504"/>
+            <a:off x="6035040" y="2880360"/>
             <a:ext cx="1298448" cy="201168"/>
           </a:xfrm>
           <a:prstGeom prst="rect">
@@ -5215,7 +3657,7 @@
         </p:nvSpPr>
         <p:spPr>
           <a:xfrm>
-            <a:off x="6035040" y="3090672"/>
+            <a:off x="6035040" y="3072384"/>
             <a:ext cx="1298448" cy="347472"/>
           </a:xfrm>
           <a:prstGeom prst="rect">
@@ -5254,7 +3696,7 @@
         </p:nvSpPr>
         <p:spPr>
           <a:xfrm>
-            <a:off x="6035040" y="3438144"/>
+            <a:off x="6035040" y="3419856"/>
             <a:ext cx="1298448" cy="164592"/>
           </a:xfrm>
           <a:prstGeom prst="rect">
@@ -5279,7 +3721,7 @@
                 <a:ea typeface="Calibri" pitchFamily="34" charset="-122"/>
                 <a:cs typeface="Calibri" pitchFamily="34" charset="-120"/>
               </a:rPr>
-              <a:t>TTM</a:t>
+              <a:t>INR 15.5/share FY2026</a:t>
             </a:r>
             <a:endParaRPr lang="en-US" sz="800" dirty="0"/>
           </a:p>
@@ -5325,7 +3767,7 @@
         </p:nvSpPr>
         <p:spPr>
           <a:xfrm>
-            <a:off x="7699248" y="2889504"/>
+            <a:off x="7699248" y="2880360"/>
             <a:ext cx="1298448" cy="201168"/>
           </a:xfrm>
           <a:prstGeom prst="rect">
@@ -5364,7 +3806,7 @@
         </p:nvSpPr>
         <p:spPr>
           <a:xfrm>
-            <a:off x="7699248" y="3090672"/>
+            <a:off x="7699248" y="3072384"/>
             <a:ext cx="1298448" cy="347472"/>
           </a:xfrm>
           <a:prstGeom prst="rect">
@@ -5403,7 +3845,7 @@
         </p:nvSpPr>
         <p:spPr>
           <a:xfrm>
-            <a:off x="7699248" y="3438144"/>
+            <a:off x="7699248" y="3419856"/>
             <a:ext cx="1298448" cy="164592"/>
           </a:xfrm>
           <a:prstGeom prst="rect">
@@ -5428,7 +3870,7 @@
                 <a:ea typeface="Calibri" pitchFamily="34" charset="-122"/>
                 <a:cs typeface="Calibri" pitchFamily="34" charset="-120"/>
               </a:rPr>
-              <a:t>by FY2028</a:t>
+              <a:t>by FY2028 (5% CAGR)</a:t>
             </a:r>
             <a:endParaRPr lang="en-US" sz="800" dirty="0"/>
           </a:p>
@@ -5564,126 +4006,64 @@
           </a:p>
         </p:txBody>
       </p:sp>
-      <p:sp>
-        <p:nvSpPr>
-          <p:cNvPr id="4" name="Text 2"/>
-          <p:cNvSpPr/>
-          <p:nvPr/>
-        </p:nvSpPr>
-        <p:spPr>
-          <a:xfrm>
-            <a:off x="274320" y="594360"/>
-            <a:ext cx="4114800" cy="219456"/>
-          </a:xfrm>
-          <a:prstGeom prst="rect">
-            <a:avLst/>
-          </a:prstGeom>
-          <a:noFill/>
-          <a:ln/>
-        </p:spPr>
-        <p:txBody>
-          <a:bodyPr wrap="square" lIns="0" tIns="0" rIns="0" bIns="0" rtlCol="0" anchor="ctr"/>
-          <a:lstStyle/>
-          <a:p>
-            <a:pPr indent="0" marL="0">
-              <a:buNone/>
-            </a:pPr>
-            <a:r>
-              <a:rPr lang="en-US" sz="1000" b="1" dirty="0">
-                <a:solidFill>
-                  <a:srgbClr val="334155"/>
-                </a:solidFill>
-                <a:latin typeface="Calibri" pitchFamily="34" charset="0"/>
-                <a:ea typeface="Calibri" pitchFamily="34" charset="-122"/>
-                <a:cs typeface="Calibri" pitchFamily="34" charset="-120"/>
-              </a:rPr>
-              <a:t>Margin Trends (%)</a:t>
-            </a:r>
-            <a:endParaRPr lang="en-US" sz="1000" dirty="0"/>
-          </a:p>
-        </p:txBody>
-      </p:sp>
-      <p:graphicFrame>
-        <p:nvGraphicFramePr>
-          <p:cNvPr id="5" name="Chart 0" descr=""/>
-          <p:cNvGraphicFramePr/>
-          <p:nvPr/>
-        </p:nvGraphicFramePr>
-        <p:xfrm>
-          <a:off x="274320" y="822960"/>
-          <a:ext cx="4297680" cy="2286000"/>
-        </p:xfrm>
-        <a:graphic xmlns:a="http://schemas.openxmlformats.org/drawingml/2006/main">
-          <a:graphicData uri="http://schemas.openxmlformats.org/drawingml/2006/chart">
-            <c:chart xmlns:c="http://schemas.openxmlformats.org/drawingml/2006/chart" r:id="rId1"/>
-          </a:graphicData>
-        </a:graphic>
-      </p:graphicFrame>
-      <p:sp>
-        <p:nvSpPr>
-          <p:cNvPr id="6" name="Text 3"/>
-          <p:cNvSpPr/>
-          <p:nvPr/>
-        </p:nvSpPr>
-        <p:spPr>
-          <a:xfrm>
-            <a:off x="4663440" y="594360"/>
-            <a:ext cx="4297680" cy="219456"/>
-          </a:xfrm>
-          <a:prstGeom prst="rect">
-            <a:avLst/>
-          </a:prstGeom>
-          <a:noFill/>
-          <a:ln/>
-        </p:spPr>
-        <p:txBody>
-          <a:bodyPr wrap="square" lIns="0" tIns="0" rIns="0" bIns="0" rtlCol="0" anchor="ctr"/>
-          <a:lstStyle/>
-          <a:p>
-            <a:pPr indent="0" marL="0">
-              <a:buNone/>
-            </a:pPr>
-            <a:r>
-              <a:rPr lang="en-US" sz="1000" b="1" dirty="0">
-                <a:solidFill>
-                  <a:srgbClr val="334155"/>
-                </a:solidFill>
-                <a:latin typeface="Calibri" pitchFamily="34" charset="0"/>
-                <a:ea typeface="Calibri" pitchFamily="34" charset="-122"/>
-                <a:cs typeface="Calibri" pitchFamily="34" charset="-120"/>
-              </a:rPr>
-              <a:t>FCF vs. Net Income (INR B)</a:t>
-            </a:r>
-            <a:endParaRPr lang="en-US" sz="1000" dirty="0"/>
-          </a:p>
-        </p:txBody>
-      </p:sp>
-      <p:graphicFrame>
-        <p:nvGraphicFramePr>
-          <p:cNvPr id="7" name="Chart 1" descr=""/>
-          <p:cNvGraphicFramePr/>
-          <p:nvPr/>
-        </p:nvGraphicFramePr>
-        <p:xfrm>
-          <a:off x="4663440" y="822960"/>
-          <a:ext cx="4297680" cy="2286000"/>
-        </p:xfrm>
-        <a:graphic xmlns:a="http://schemas.openxmlformats.org/drawingml/2006/main">
-          <a:graphicData uri="http://schemas.openxmlformats.org/drawingml/2006/chart">
-            <c:chart xmlns:c="http://schemas.openxmlformats.org/drawingml/2006/chart" r:id="rId2"/>
-          </a:graphicData>
-        </a:graphic>
-      </p:graphicFrame>
-      <p:sp>
-        <p:nvSpPr>
-          <p:cNvPr id="8" name="Shape 4"/>
-          <p:cNvSpPr/>
-          <p:nvPr/>
-        </p:nvSpPr>
-        <p:spPr>
-          <a:xfrm>
-            <a:off x="274320" y="3246120"/>
-            <a:ext cx="2029968" cy="749808"/>
+      <p:pic>
+        <p:nvPicPr>
+          <p:cNvPr id="4" name="Image 0" descr="preencoded.png">    </p:cNvPr>
+          <p:cNvPicPr>
+            <a:picLocks noChangeAspect="1"/>
+          </p:cNvPicPr>
+          <p:nvPr/>
+        </p:nvPicPr>
+        <p:blipFill>
+          <a:blip r:embed="rId1"/>
+          <a:stretch>
+            <a:fillRect/>
+          </a:stretch>
+        </p:blipFill>
+        <p:spPr>
+          <a:xfrm>
+            <a:off x="228600" y="594360"/>
+            <a:ext cx="4297680" cy="2331720"/>
+          </a:xfrm>
+          <a:prstGeom prst="rect">
+            <a:avLst/>
+          </a:prstGeom>
+        </p:spPr>
+      </p:pic>
+      <p:pic>
+        <p:nvPicPr>
+          <p:cNvPr id="5" name="Image 1" descr="preencoded.png">    </p:cNvPr>
+          <p:cNvPicPr>
+            <a:picLocks noChangeAspect="1"/>
+          </p:cNvPicPr>
+          <p:nvPr/>
+        </p:nvPicPr>
+        <p:blipFill>
+          <a:blip r:embed="rId2"/>
+          <a:stretch>
+            <a:fillRect/>
+          </a:stretch>
+        </p:blipFill>
+        <p:spPr>
+          <a:xfrm>
+            <a:off x="4645152" y="594360"/>
+            <a:ext cx="4297680" cy="2331720"/>
+          </a:xfrm>
+          <a:prstGeom prst="rect">
+            <a:avLst/>
+          </a:prstGeom>
+        </p:spPr>
+      </p:pic>
+      <p:sp>
+        <p:nvSpPr>
+          <p:cNvPr id="6" name="Shape 2"/>
+          <p:cNvSpPr/>
+          <p:nvPr/>
+        </p:nvSpPr>
+        <p:spPr>
+          <a:xfrm>
+            <a:off x="256032" y="3035808"/>
+            <a:ext cx="2011680" cy="804672"/>
           </a:xfrm>
           <a:prstGeom prst="rect">
             <a:avLst/>
@@ -5708,13 +4088,13 @@
       </p:sp>
       <p:sp>
         <p:nvSpPr>
-          <p:cNvPr id="9" name="Text 5"/>
-          <p:cNvSpPr/>
-          <p:nvPr/>
-        </p:nvSpPr>
-        <p:spPr>
-          <a:xfrm>
-            <a:off x="347472" y="3291840"/>
+          <p:cNvPr id="7" name="Text 3"/>
+          <p:cNvSpPr/>
+          <p:nvPr/>
+        </p:nvSpPr>
+        <p:spPr>
+          <a:xfrm>
+            <a:off x="329184" y="3081528"/>
             <a:ext cx="1883664" cy="182880"/>
           </a:xfrm>
           <a:prstGeom prst="rect">
@@ -5747,13 +4127,13 @@
       </p:sp>
       <p:sp>
         <p:nvSpPr>
-          <p:cNvPr id="10" name="Text 6"/>
-          <p:cNvSpPr/>
-          <p:nvPr/>
-        </p:nvSpPr>
-        <p:spPr>
-          <a:xfrm>
-            <a:off x="347472" y="3456432"/>
+          <p:cNvPr id="8" name="Text 4"/>
+          <p:cNvSpPr/>
+          <p:nvPr/>
+        </p:nvSpPr>
+        <p:spPr>
+          <a:xfrm>
+            <a:off x="329184" y="3255264"/>
             <a:ext cx="1883664" cy="274320"/>
           </a:xfrm>
           <a:prstGeom prst="rect">
@@ -5770,7 +4150,7 @@
               <a:buNone/>
             </a:pPr>
             <a:r>
-              <a:rPr lang="en-US" sz="1800" b="1" dirty="0">
+              <a:rPr lang="en-US" sz="1500" b="1" dirty="0">
                 <a:solidFill>
                   <a:srgbClr val="D97706"/>
                 </a:solidFill>
@@ -5778,22 +4158,22 @@
                 <a:ea typeface="Calibri" pitchFamily="34" charset="-122"/>
                 <a:cs typeface="Calibri" pitchFamily="34" charset="-120"/>
               </a:rPr>
-              <a:t>0.64x</a:t>
-            </a:r>
-            <a:endParaRPr lang="en-US" sz="1800" dirty="0"/>
-          </a:p>
-        </p:txBody>
-      </p:sp>
-      <p:sp>
-        <p:nvSpPr>
-          <p:cNvPr id="11" name="Shape 7"/>
-          <p:cNvSpPr/>
-          <p:nvPr/>
-        </p:nvSpPr>
-        <p:spPr>
-          <a:xfrm>
-            <a:off x="2450592" y="3246120"/>
-            <a:ext cx="2029968" cy="749808"/>
+              <a:t>FCF/NI: 0.64x</a:t>
+            </a:r>
+            <a:endParaRPr lang="en-US" sz="1500" dirty="0"/>
+          </a:p>
+        </p:txBody>
+      </p:sp>
+      <p:sp>
+        <p:nvSpPr>
+          <p:cNvPr id="9" name="Shape 5"/>
+          <p:cNvSpPr/>
+          <p:nvPr/>
+        </p:nvSpPr>
+        <p:spPr>
+          <a:xfrm>
+            <a:off x="2432304" y="3035808"/>
+            <a:ext cx="2011680" cy="804672"/>
           </a:xfrm>
           <a:prstGeom prst="rect">
             <a:avLst/>
@@ -5818,13 +4198,13 @@
       </p:sp>
       <p:sp>
         <p:nvSpPr>
-          <p:cNvPr id="12" name="Text 8"/>
-          <p:cNvSpPr/>
-          <p:nvPr/>
-        </p:nvSpPr>
-        <p:spPr>
-          <a:xfrm>
-            <a:off x="2523744" y="3291840"/>
+          <p:cNvPr id="10" name="Text 6"/>
+          <p:cNvSpPr/>
+          <p:nvPr/>
+        </p:nvSpPr>
+        <p:spPr>
+          <a:xfrm>
+            <a:off x="2505456" y="3081528"/>
             <a:ext cx="1883664" cy="182880"/>
           </a:xfrm>
           <a:prstGeom prst="rect">
@@ -5857,13 +4237,13 @@
       </p:sp>
       <p:sp>
         <p:nvSpPr>
-          <p:cNvPr id="13" name="Text 9"/>
-          <p:cNvSpPr/>
-          <p:nvPr/>
-        </p:nvSpPr>
-        <p:spPr>
-          <a:xfrm>
-            <a:off x="2523744" y="3456432"/>
+          <p:cNvPr id="11" name="Text 7"/>
+          <p:cNvSpPr/>
+          <p:nvPr/>
+        </p:nvSpPr>
+        <p:spPr>
+          <a:xfrm>
+            <a:off x="2505456" y="3255264"/>
             <a:ext cx="1883664" cy="274320"/>
           </a:xfrm>
           <a:prstGeom prst="rect">
@@ -5880,7 +4260,7 @@
               <a:buNone/>
             </a:pPr>
             <a:r>
-              <a:rPr lang="en-US" sz="1800" b="1" dirty="0">
+              <a:rPr lang="en-US" sz="1500" b="1" dirty="0">
                 <a:solidFill>
                   <a:srgbClr val="DC2626"/>
                 </a:solidFill>
@@ -5888,22 +4268,22 @@
                 <a:ea typeface="Calibri" pitchFamily="34" charset="-122"/>
                 <a:cs typeface="Calibri" pitchFamily="34" charset="-120"/>
               </a:rPr>
-              <a:t>0.03x</a:t>
-            </a:r>
-            <a:endParaRPr lang="en-US" sz="1800" dirty="0"/>
-          </a:p>
-        </p:txBody>
-      </p:sp>
-      <p:sp>
-        <p:nvSpPr>
-          <p:cNvPr id="14" name="Shape 10"/>
-          <p:cNvSpPr/>
-          <p:nvPr/>
-        </p:nvSpPr>
-        <p:spPr>
-          <a:xfrm>
-            <a:off x="4626864" y="3246120"/>
-            <a:ext cx="2029968" cy="749808"/>
+              <a:t>FCF/NI: 0.03x</a:t>
+            </a:r>
+            <a:endParaRPr lang="en-US" sz="1500" dirty="0"/>
+          </a:p>
+        </p:txBody>
+      </p:sp>
+      <p:sp>
+        <p:nvSpPr>
+          <p:cNvPr id="12" name="Shape 8"/>
+          <p:cNvSpPr/>
+          <p:nvPr/>
+        </p:nvSpPr>
+        <p:spPr>
+          <a:xfrm>
+            <a:off x="4608576" y="3035808"/>
+            <a:ext cx="2011680" cy="804672"/>
           </a:xfrm>
           <a:prstGeom prst="rect">
             <a:avLst/>
@@ -5928,13 +4308,13 @@
       </p:sp>
       <p:sp>
         <p:nvSpPr>
-          <p:cNvPr id="15" name="Text 11"/>
-          <p:cNvSpPr/>
-          <p:nvPr/>
-        </p:nvSpPr>
-        <p:spPr>
-          <a:xfrm>
-            <a:off x="4700016" y="3291840"/>
+          <p:cNvPr id="13" name="Text 9"/>
+          <p:cNvSpPr/>
+          <p:nvPr/>
+        </p:nvSpPr>
+        <p:spPr>
+          <a:xfrm>
+            <a:off x="4681728" y="3081528"/>
             <a:ext cx="1883664" cy="182880"/>
           </a:xfrm>
           <a:prstGeom prst="rect">
@@ -5967,13 +4347,13 @@
       </p:sp>
       <p:sp>
         <p:nvSpPr>
-          <p:cNvPr id="16" name="Text 12"/>
-          <p:cNvSpPr/>
-          <p:nvPr/>
-        </p:nvSpPr>
-        <p:spPr>
-          <a:xfrm>
-            <a:off x="4700016" y="3456432"/>
+          <p:cNvPr id="14" name="Text 10"/>
+          <p:cNvSpPr/>
+          <p:nvPr/>
+        </p:nvSpPr>
+        <p:spPr>
+          <a:xfrm>
+            <a:off x="4681728" y="3255264"/>
             <a:ext cx="1883664" cy="274320"/>
           </a:xfrm>
           <a:prstGeom prst="rect">
@@ -5990,7 +4370,7 @@
               <a:buNone/>
             </a:pPr>
             <a:r>
-              <a:rPr lang="en-US" sz="1800" b="1" dirty="0">
+              <a:rPr lang="en-US" sz="1500" b="1" dirty="0">
                 <a:solidFill>
                   <a:srgbClr val="DC2626"/>
                 </a:solidFill>
@@ -5998,22 +4378,22 @@
                 <a:ea typeface="Calibri" pitchFamily="34" charset="-122"/>
                 <a:cs typeface="Calibri" pitchFamily="34" charset="-120"/>
               </a:rPr>
-              <a:t>0.45x</a:t>
-            </a:r>
-            <a:endParaRPr lang="en-US" sz="1800" dirty="0"/>
-          </a:p>
-        </p:txBody>
-      </p:sp>
-      <p:sp>
-        <p:nvSpPr>
-          <p:cNvPr id="17" name="Shape 13"/>
-          <p:cNvSpPr/>
-          <p:nvPr/>
-        </p:nvSpPr>
-        <p:spPr>
-          <a:xfrm>
-            <a:off x="6803136" y="3246120"/>
-            <a:ext cx="2029968" cy="749808"/>
+              <a:t>FCF/NI: 0.45x</a:t>
+            </a:r>
+            <a:endParaRPr lang="en-US" sz="1500" dirty="0"/>
+          </a:p>
+        </p:txBody>
+      </p:sp>
+      <p:sp>
+        <p:nvSpPr>
+          <p:cNvPr id="15" name="Shape 11"/>
+          <p:cNvSpPr/>
+          <p:nvPr/>
+        </p:nvSpPr>
+        <p:spPr>
+          <a:xfrm>
+            <a:off x="6784848" y="3035808"/>
+            <a:ext cx="2011680" cy="804672"/>
           </a:xfrm>
           <a:prstGeom prst="rect">
             <a:avLst/>
@@ -6038,30 +4418,108 @@
       </p:sp>
       <p:sp>
         <p:nvSpPr>
+          <p:cNvPr id="16" name="Text 12"/>
+          <p:cNvSpPr/>
+          <p:nvPr/>
+        </p:nvSpPr>
+        <p:spPr>
+          <a:xfrm>
+            <a:off x="6858000" y="3081528"/>
+            <a:ext cx="1883664" cy="182880"/>
+          </a:xfrm>
+          <a:prstGeom prst="rect">
+            <a:avLst/>
+          </a:prstGeom>
+          <a:noFill/>
+          <a:ln/>
+        </p:spPr>
+        <p:txBody>
+          <a:bodyPr wrap="square" lIns="0" tIns="0" rIns="0" bIns="0" rtlCol="0" anchor="ctr"/>
+          <a:lstStyle/>
+          <a:p>
+            <a:pPr algn="ctr" indent="0" marL="0">
+              <a:buNone/>
+            </a:pPr>
+            <a:r>
+              <a:rPr lang="en-US" sz="800" dirty="0">
+                <a:solidFill>
+                  <a:srgbClr val="64748B"/>
+                </a:solidFill>
+                <a:latin typeface="Calibri" pitchFamily="34" charset="0"/>
+                <a:ea typeface="Calibri" pitchFamily="34" charset="-122"/>
+                <a:cs typeface="Calibri" pitchFamily="34" charset="-120"/>
+              </a:rPr>
+              <a:t>FY2026</a:t>
+            </a:r>
+            <a:endParaRPr lang="en-US" sz="800" dirty="0"/>
+          </a:p>
+        </p:txBody>
+      </p:sp>
+      <p:sp>
+        <p:nvSpPr>
+          <p:cNvPr id="17" name="Text 13"/>
+          <p:cNvSpPr/>
+          <p:nvPr/>
+        </p:nvSpPr>
+        <p:spPr>
+          <a:xfrm>
+            <a:off x="6858000" y="3255264"/>
+            <a:ext cx="1883664" cy="274320"/>
+          </a:xfrm>
+          <a:prstGeom prst="rect">
+            <a:avLst/>
+          </a:prstGeom>
+          <a:noFill/>
+          <a:ln/>
+        </p:spPr>
+        <p:txBody>
+          <a:bodyPr wrap="square" lIns="0" tIns="0" rIns="0" bIns="0" rtlCol="0" anchor="ctr"/>
+          <a:lstStyle/>
+          <a:p>
+            <a:pPr algn="ctr" indent="0" marL="0">
+              <a:buNone/>
+            </a:pPr>
+            <a:r>
+              <a:rPr lang="en-US" sz="1500" b="1" dirty="0">
+                <a:solidFill>
+                  <a:srgbClr val="059669"/>
+                </a:solidFill>
+                <a:latin typeface="Calibri" pitchFamily="34" charset="0"/>
+                <a:ea typeface="Calibri" pitchFamily="34" charset="-122"/>
+                <a:cs typeface="Calibri" pitchFamily="34" charset="-120"/>
+              </a:rPr>
+              <a:t>FCF/NI: 0.99x</a:t>
+            </a:r>
+            <a:endParaRPr lang="en-US" sz="1500" dirty="0"/>
+          </a:p>
+        </p:txBody>
+      </p:sp>
+      <p:sp>
+        <p:nvSpPr>
           <p:cNvPr id="18" name="Text 14"/>
           <p:cNvSpPr/>
           <p:nvPr/>
         </p:nvSpPr>
         <p:spPr>
           <a:xfrm>
-            <a:off x="6876288" y="3291840"/>
-            <a:ext cx="1883664" cy="182880"/>
-          </a:xfrm>
-          <a:prstGeom prst="rect">
-            <a:avLst/>
-          </a:prstGeom>
-          <a:noFill/>
-          <a:ln/>
-        </p:spPr>
-        <p:txBody>
-          <a:bodyPr wrap="square" lIns="0" tIns="0" rIns="0" bIns="0" rtlCol="0" anchor="ctr"/>
-          <a:lstStyle/>
-          <a:p>
-            <a:pPr algn="ctr" indent="0" marL="0">
-              <a:buNone/>
-            </a:pPr>
-            <a:r>
-              <a:rPr lang="en-US" sz="800" dirty="0">
+            <a:off x="256032" y="3913632"/>
+            <a:ext cx="8595360" cy="182880"/>
+          </a:xfrm>
+          <a:prstGeom prst="rect">
+            <a:avLst/>
+          </a:prstGeom>
+          <a:noFill/>
+          <a:ln/>
+        </p:spPr>
+        <p:txBody>
+          <a:bodyPr wrap="square" lIns="0" tIns="0" rIns="0" bIns="0" rtlCol="0" anchor="ctr"/>
+          <a:lstStyle/>
+          <a:p>
+            <a:pPr indent="0" marL="0">
+              <a:buNone/>
+            </a:pPr>
+            <a:r>
+              <a:rPr lang="en-US" sz="800" i="1" dirty="0">
                 <a:solidFill>
                   <a:srgbClr val="64748B"/>
                 </a:solidFill>
@@ -6069,7 +4527,7 @@
                 <a:ea typeface="Calibri" pitchFamily="34" charset="-122"/>
                 <a:cs typeface="Calibri" pitchFamily="34" charset="-120"/>
               </a:rPr>
-              <a:t>FY2026</a:t>
+              <a:t>FCF/NI  &gt;0.9x = High Quality  ·  0.6–0.9x = Moderate  ·  &lt;0.6x = Red Flag</a:t>
             </a:r>
             <a:endParaRPr lang="en-US" sz="800" dirty="0"/>
           </a:p>
@@ -6077,92 +4535,14 @@
       </p:sp>
       <p:sp>
         <p:nvSpPr>
-          <p:cNvPr id="19" name="Text 15"/>
-          <p:cNvSpPr/>
-          <p:nvPr/>
-        </p:nvSpPr>
-        <p:spPr>
-          <a:xfrm>
-            <a:off x="6876288" y="3456432"/>
-            <a:ext cx="1883664" cy="274320"/>
-          </a:xfrm>
-          <a:prstGeom prst="rect">
-            <a:avLst/>
-          </a:prstGeom>
-          <a:noFill/>
-          <a:ln/>
-        </p:spPr>
-        <p:txBody>
-          <a:bodyPr wrap="square" lIns="0" tIns="0" rIns="0" bIns="0" rtlCol="0" anchor="ctr"/>
-          <a:lstStyle/>
-          <a:p>
-            <a:pPr algn="ctr" indent="0" marL="0">
-              <a:buNone/>
-            </a:pPr>
-            <a:r>
-              <a:rPr lang="en-US" sz="1800" b="1" dirty="0">
-                <a:solidFill>
-                  <a:srgbClr val="059669"/>
-                </a:solidFill>
-                <a:latin typeface="Calibri" pitchFamily="34" charset="0"/>
-                <a:ea typeface="Calibri" pitchFamily="34" charset="-122"/>
-                <a:cs typeface="Calibri" pitchFamily="34" charset="-120"/>
-              </a:rPr>
-              <a:t>0.99x</a:t>
-            </a:r>
-            <a:endParaRPr lang="en-US" sz="1800" dirty="0"/>
-          </a:p>
-        </p:txBody>
-      </p:sp>
-      <p:sp>
-        <p:nvSpPr>
-          <p:cNvPr id="20" name="Text 16"/>
-          <p:cNvSpPr/>
-          <p:nvPr/>
-        </p:nvSpPr>
-        <p:spPr>
-          <a:xfrm>
-            <a:off x="274320" y="4069080"/>
-            <a:ext cx="8595360" cy="201168"/>
-          </a:xfrm>
-          <a:prstGeom prst="rect">
-            <a:avLst/>
-          </a:prstGeom>
-          <a:noFill/>
-          <a:ln/>
-        </p:spPr>
-        <p:txBody>
-          <a:bodyPr wrap="square" lIns="0" tIns="0" rIns="0" bIns="0" rtlCol="0" anchor="ctr"/>
-          <a:lstStyle/>
-          <a:p>
-            <a:pPr indent="0" marL="0">
-              <a:buNone/>
-            </a:pPr>
-            <a:r>
-              <a:rPr lang="en-US" sz="800" i="1" dirty="0">
-                <a:solidFill>
-                  <a:srgbClr val="64748B"/>
-                </a:solidFill>
-                <a:latin typeface="Calibri" pitchFamily="34" charset="0"/>
-                <a:ea typeface="Calibri" pitchFamily="34" charset="-122"/>
-                <a:cs typeface="Calibri" pitchFamily="34" charset="-120"/>
-              </a:rPr>
-              <a:t>FCF / Net Income ratio  (&gt;0.9x = High Quality  |  0.6–0.9x = Moderate  |  &lt;0.6x = Red Flag  ·  FY2024–25 weak due to heavy mine capex)</a:t>
-            </a:r>
-            <a:endParaRPr lang="en-US" sz="800" dirty="0"/>
-          </a:p>
-        </p:txBody>
-      </p:sp>
-      <p:sp>
-        <p:nvSpPr>
-          <p:cNvPr id="21" name="Shape 17"/>
-          <p:cNvSpPr/>
-          <p:nvPr/>
-        </p:nvSpPr>
-        <p:spPr>
-          <a:xfrm>
-            <a:off x="274320" y="4334256"/>
-            <a:ext cx="8595360" cy="566928"/>
+          <p:cNvPr id="19" name="Shape 15"/>
+          <p:cNvSpPr/>
+          <p:nvPr/>
+        </p:nvSpPr>
+        <p:spPr>
+          <a:xfrm>
+            <a:off x="256032" y="4151376"/>
+            <a:ext cx="8631936" cy="658368"/>
           </a:xfrm>
           <a:prstGeom prst="rect">
             <a:avLst/>
@@ -6175,14 +4555,14 @@
       </p:sp>
       <p:sp>
         <p:nvSpPr>
-          <p:cNvPr id="22" name="Text 18"/>
-          <p:cNvSpPr/>
-          <p:nvPr/>
-        </p:nvSpPr>
-        <p:spPr>
-          <a:xfrm>
-            <a:off x="457200" y="4407408"/>
-            <a:ext cx="8321040" cy="384048"/>
+          <p:cNvPr id="20" name="Text 16"/>
+          <p:cNvSpPr/>
+          <p:nvPr/>
+        </p:nvSpPr>
+        <p:spPr>
+          <a:xfrm>
+            <a:off x="420624" y="4224528"/>
+            <a:ext cx="8321040" cy="512064"/>
           </a:xfrm>
           <a:prstGeom prst="rect">
             <a:avLst/>
@@ -6206,7 +4586,7 @@
                 <a:ea typeface="Calibri" pitchFamily="34" charset="-122"/>
                 <a:cs typeface="Calibri" pitchFamily="34" charset="-120"/>
               </a:rPr>
-              <a:t>⚠️  FY2026 one-time item: INR 1,458 crore court-mandated executive wage provision (arrears Aug 2023–Dec 2025). Strips out to higher underlying PAT.</a:t>
+              <a:t>⚠️  FY2026 one-time item: INR 1,458Cr court-mandated executive wage provision (arrears Aug 2023–Dec 2025) — depressed reported PAT. Underlying earnings are higher.</a:t>
             </a:r>
             <a:endParaRPr lang="en-US" sz="950" dirty="0"/>
           </a:p>
@@ -6214,7 +4594,7 @@
       </p:sp>
       <p:sp>
         <p:nvSpPr>
-          <p:cNvPr id="23" name="Text 19"/>
+          <p:cNvPr id="21" name="Text 17"/>
           <p:cNvSpPr/>
           <p:nvPr/>
         </p:nvSpPr>
@@ -6336,140 +4716,46 @@
                 <a:ea typeface="Calibri" pitchFamily="34" charset="-122"/>
                 <a:cs typeface="Calibri" pitchFamily="34" charset="-120"/>
               </a:rPr>
-              <a:t>MANAGEMENT COMMENTARY — What Coal India is telling the market</a:t>
+              <a:t>MARGINS &amp; MANAGEMENT — Profitability trend and stewardship quality</a:t>
             </a:r>
             <a:endParaRPr lang="en-US" sz="1300" dirty="0"/>
           </a:p>
         </p:txBody>
       </p:sp>
-      <p:sp>
-        <p:nvSpPr>
-          <p:cNvPr id="4" name="Shape 2"/>
-          <p:cNvSpPr/>
-          <p:nvPr/>
-        </p:nvSpPr>
-        <p:spPr>
-          <a:xfrm>
-            <a:off x="274320" y="658368"/>
-            <a:ext cx="8595360" cy="1417320"/>
-          </a:xfrm>
-          <a:prstGeom prst="rect">
-            <a:avLst/>
-          </a:prstGeom>
-          <a:solidFill>
-            <a:srgbClr val="1C2B5E"/>
-          </a:solidFill>
-          <a:ln/>
-        </p:spPr>
-      </p:sp>
-      <p:sp>
-        <p:nvSpPr>
-          <p:cNvPr id="5" name="Shape 3"/>
-          <p:cNvSpPr/>
-          <p:nvPr/>
-        </p:nvSpPr>
-        <p:spPr>
-          <a:xfrm>
-            <a:off x="274320" y="658368"/>
-            <a:ext cx="164592" cy="1417320"/>
-          </a:xfrm>
-          <a:prstGeom prst="rect">
-            <a:avLst/>
-          </a:prstGeom>
-          <a:solidFill>
-            <a:srgbClr val="D97706"/>
-          </a:solidFill>
-          <a:ln/>
-        </p:spPr>
-      </p:sp>
-      <p:sp>
-        <p:nvSpPr>
-          <p:cNvPr id="6" name="Text 4"/>
-          <p:cNvSpPr/>
-          <p:nvPr/>
-        </p:nvSpPr>
-        <p:spPr>
-          <a:xfrm>
-            <a:off x="621792" y="768096"/>
-            <a:ext cx="8092440" cy="1005840"/>
-          </a:xfrm>
-          <a:prstGeom prst="rect">
-            <a:avLst/>
-          </a:prstGeom>
-          <a:noFill/>
-          <a:ln/>
-        </p:spPr>
-        <p:txBody>
-          <a:bodyPr wrap="square" lIns="0" tIns="0" rIns="0" bIns="0" rtlCol="0" anchor="ctr"/>
-          <a:lstStyle/>
-          <a:p>
-            <a:pPr indent="0" marL="0">
-              <a:buNone/>
-            </a:pPr>
-            <a:r>
-              <a:rPr lang="en-US" sz="1200" i="1" dirty="0">
-                <a:solidFill>
-                  <a:srgbClr val="FFFFFF"/>
-                </a:solidFill>
-                <a:latin typeface="Calibri" pitchFamily="34" charset="0"/>
-                <a:ea typeface="Calibri" pitchFamily="34" charset="-122"/>
-                <a:cs typeface="Calibri" pitchFamily="34" charset="-120"/>
-              </a:rPr>
-              <a:t>"Production dispatch is expected to reach 810 million tonnes by FY2028. Q4 FY2026 PAT recovered strongly to INR 10,908 crore, and we remain committed to our dividend policy with a final dividend of INR 5.25 per share declared for FY2026."</a:t>
-            </a:r>
-            <a:endParaRPr lang="en-US" sz="1200" dirty="0"/>
-          </a:p>
-        </p:txBody>
-      </p:sp>
-      <p:sp>
-        <p:nvSpPr>
-          <p:cNvPr id="7" name="Text 5"/>
-          <p:cNvSpPr/>
-          <p:nvPr/>
-        </p:nvSpPr>
-        <p:spPr>
-          <a:xfrm>
-            <a:off x="621792" y="1719072"/>
-            <a:ext cx="8092440" cy="201168"/>
-          </a:xfrm>
-          <a:prstGeom prst="rect">
-            <a:avLst/>
-          </a:prstGeom>
-          <a:noFill/>
-          <a:ln/>
-        </p:spPr>
-        <p:txBody>
-          <a:bodyPr wrap="square" lIns="0" tIns="0" rIns="0" bIns="0" rtlCol="0" anchor="ctr"/>
-          <a:lstStyle/>
-          <a:p>
-            <a:pPr indent="0" marL="0">
-              <a:buNone/>
-            </a:pPr>
-            <a:r>
-              <a:rPr lang="en-US" sz="900" dirty="0">
-                <a:solidFill>
-                  <a:srgbClr val="D97706"/>
-                </a:solidFill>
-                <a:latin typeface="Calibri" pitchFamily="34" charset="0"/>
-                <a:ea typeface="Calibri" pitchFamily="34" charset="-122"/>
-                <a:cs typeface="Calibri" pitchFamily="34" charset="-120"/>
-              </a:rPr>
-              <a:t>— Coal India Management, FY2026 Results Commentary</a:t>
-            </a:r>
-            <a:endParaRPr lang="en-US" sz="900" dirty="0"/>
-          </a:p>
-        </p:txBody>
-      </p:sp>
-      <p:sp>
-        <p:nvSpPr>
-          <p:cNvPr id="8" name="Shape 6"/>
-          <p:cNvSpPr/>
-          <p:nvPr/>
-        </p:nvSpPr>
-        <p:spPr>
-          <a:xfrm>
-            <a:off x="274320" y="2231136"/>
-            <a:ext cx="2057400" cy="987552"/>
+      <p:pic>
+        <p:nvPicPr>
+          <p:cNvPr id="4" name="Image 0" descr="preencoded.png">    </p:cNvPr>
+          <p:cNvPicPr>
+            <a:picLocks noChangeAspect="1"/>
+          </p:cNvPicPr>
+          <p:nvPr/>
+        </p:nvPicPr>
+        <p:blipFill>
+          <a:blip r:embed="rId1"/>
+          <a:stretch>
+            <a:fillRect/>
+          </a:stretch>
+        </p:blipFill>
+        <p:spPr>
+          <a:xfrm>
+            <a:off x="256032" y="594360"/>
+            <a:ext cx="5029200" cy="2743200"/>
+          </a:xfrm>
+          <a:prstGeom prst="rect">
+            <a:avLst/>
+          </a:prstGeom>
+        </p:spPr>
+      </p:pic>
+      <p:sp>
+        <p:nvSpPr>
+          <p:cNvPr id="5" name="Shape 2"/>
+          <p:cNvSpPr/>
+          <p:nvPr/>
+        </p:nvSpPr>
+        <p:spPr>
+          <a:xfrm>
+            <a:off x="5559552" y="658368"/>
+            <a:ext cx="1572768" cy="987552"/>
           </a:xfrm>
           <a:prstGeom prst="rect">
             <a:avLst/>
@@ -6477,9 +4763,9 @@
           <a:solidFill>
             <a:srgbClr val="FFFFFF"/>
           </a:solidFill>
-          <a:ln w="19050">
+          <a:ln w="12700">
             <a:solidFill>
-              <a:srgbClr val="D97706"/>
+              <a:srgbClr val="D6E4FF"/>
             </a:solidFill>
             <a:prstDash val="solid"/>
           </a:ln>
@@ -6494,14 +4780,14 @@
       </p:sp>
       <p:sp>
         <p:nvSpPr>
-          <p:cNvPr id="9" name="Text 7"/>
-          <p:cNvSpPr/>
-          <p:nvPr/>
-        </p:nvSpPr>
-        <p:spPr>
-          <a:xfrm>
-            <a:off x="384048" y="2304288"/>
-            <a:ext cx="1874520" cy="201168"/>
+          <p:cNvPr id="6" name="Text 3"/>
+          <p:cNvSpPr/>
+          <p:nvPr/>
+        </p:nvSpPr>
+        <p:spPr>
+          <a:xfrm>
+            <a:off x="5724144" y="777240"/>
+            <a:ext cx="1298448" cy="201168"/>
           </a:xfrm>
           <a:prstGeom prst="rect">
             <a:avLst/>
@@ -6525,7 +4811,7 @@
                 <a:ea typeface="Calibri" pitchFamily="34" charset="-122"/>
                 <a:cs typeface="Calibri" pitchFamily="34" charset="-120"/>
               </a:rPr>
-              <a:t>Guidance Tone</a:t>
+              <a:t>Promoter (Govt)</a:t>
             </a:r>
             <a:endParaRPr lang="en-US" sz="850" dirty="0"/>
           </a:p>
@@ -6533,14 +4819,14 @@
       </p:sp>
       <p:sp>
         <p:nvSpPr>
-          <p:cNvPr id="10" name="Text 8"/>
-          <p:cNvSpPr/>
-          <p:nvPr/>
-        </p:nvSpPr>
-        <p:spPr>
-          <a:xfrm>
-            <a:off x="384048" y="2505456"/>
-            <a:ext cx="1874520" cy="438912"/>
+          <p:cNvPr id="7" name="Text 4"/>
+          <p:cNvSpPr/>
+          <p:nvPr/>
+        </p:nvSpPr>
+        <p:spPr>
+          <a:xfrm>
+            <a:off x="5724144" y="969264"/>
+            <a:ext cx="1298448" cy="347472"/>
           </a:xfrm>
           <a:prstGeom prst="rect">
             <a:avLst/>
@@ -6556,30 +4842,69 @@
               <a:buNone/>
             </a:pPr>
             <a:r>
-              <a:rPr lang="en-US" sz="1300" b="1" dirty="0">
-                <a:solidFill>
-                  <a:srgbClr val="D97706"/>
-                </a:solidFill>
-                <a:latin typeface="Calibri" pitchFamily="34" charset="0"/>
-                <a:ea typeface="Calibri" pitchFamily="34" charset="-122"/>
-                <a:cs typeface="Calibri" pitchFamily="34" charset="-120"/>
-              </a:rPr>
-              <a:t>Cautious</a:t>
-            </a:r>
-            <a:endParaRPr lang="en-US" sz="1300" dirty="0"/>
-          </a:p>
-        </p:txBody>
-      </p:sp>
-      <p:sp>
-        <p:nvSpPr>
-          <p:cNvPr id="11" name="Shape 9"/>
-          <p:cNvSpPr/>
-          <p:nvPr/>
-        </p:nvSpPr>
-        <p:spPr>
-          <a:xfrm>
-            <a:off x="2468880" y="2231136"/>
-            <a:ext cx="2057400" cy="987552"/>
+              <a:rPr lang="en-US" sz="1800" b="1" dirty="0">
+                <a:solidFill>
+                  <a:srgbClr val="059669"/>
+                </a:solidFill>
+                <a:latin typeface="Calibri" pitchFamily="34" charset="0"/>
+                <a:ea typeface="Calibri" pitchFamily="34" charset="-122"/>
+                <a:cs typeface="Calibri" pitchFamily="34" charset="-120"/>
+              </a:rPr>
+              <a:t>63.1%</a:t>
+            </a:r>
+            <a:endParaRPr lang="en-US" sz="1800" dirty="0"/>
+          </a:p>
+        </p:txBody>
+      </p:sp>
+      <p:sp>
+        <p:nvSpPr>
+          <p:cNvPr id="8" name="Text 5"/>
+          <p:cNvSpPr/>
+          <p:nvPr/>
+        </p:nvSpPr>
+        <p:spPr>
+          <a:xfrm>
+            <a:off x="5724144" y="1316736"/>
+            <a:ext cx="1298448" cy="164592"/>
+          </a:xfrm>
+          <a:prstGeom prst="rect">
+            <a:avLst/>
+          </a:prstGeom>
+          <a:noFill/>
+          <a:ln/>
+        </p:spPr>
+        <p:txBody>
+          <a:bodyPr wrap="square" lIns="0" tIns="0" rIns="0" bIns="0" rtlCol="0" anchor="ctr"/>
+          <a:lstStyle/>
+          <a:p>
+            <a:pPr indent="0" marL="0">
+              <a:buNone/>
+            </a:pPr>
+            <a:r>
+              <a:rPr lang="en-US" sz="800" dirty="0">
+                <a:solidFill>
+                  <a:srgbClr val="64748B"/>
+                </a:solidFill>
+                <a:latin typeface="Calibri" pitchFamily="34" charset="0"/>
+                <a:ea typeface="Calibri" pitchFamily="34" charset="-122"/>
+                <a:cs typeface="Calibri" pitchFamily="34" charset="-120"/>
+              </a:rPr>
+              <a:t>0% pledged — no stress</a:t>
+            </a:r>
+            <a:endParaRPr lang="en-US" sz="800" dirty="0"/>
+          </a:p>
+        </p:txBody>
+      </p:sp>
+      <p:sp>
+        <p:nvSpPr>
+          <p:cNvPr id="9" name="Shape 6"/>
+          <p:cNvSpPr/>
+          <p:nvPr/>
+        </p:nvSpPr>
+        <p:spPr>
+          <a:xfrm>
+            <a:off x="7251192" y="658368"/>
+            <a:ext cx="1572768" cy="987552"/>
           </a:xfrm>
           <a:prstGeom prst="rect">
             <a:avLst/>
@@ -6587,9 +4912,9 @@
           <a:solidFill>
             <a:srgbClr val="FFFFFF"/>
           </a:solidFill>
-          <a:ln w="19050">
+          <a:ln w="12700">
             <a:solidFill>
-              <a:srgbClr val="D97706"/>
+              <a:srgbClr val="D6E4FF"/>
             </a:solidFill>
             <a:prstDash val="solid"/>
           </a:ln>
@@ -6604,14 +4929,14 @@
       </p:sp>
       <p:sp>
         <p:nvSpPr>
-          <p:cNvPr id="12" name="Text 10"/>
-          <p:cNvSpPr/>
-          <p:nvPr/>
-        </p:nvSpPr>
-        <p:spPr>
-          <a:xfrm>
-            <a:off x="2578608" y="2304288"/>
-            <a:ext cx="1874520" cy="201168"/>
+          <p:cNvPr id="10" name="Text 7"/>
+          <p:cNvSpPr/>
+          <p:nvPr/>
+        </p:nvSpPr>
+        <p:spPr>
+          <a:xfrm>
+            <a:off x="7415784" y="777240"/>
+            <a:ext cx="1298448" cy="201168"/>
           </a:xfrm>
           <a:prstGeom prst="rect">
             <a:avLst/>
@@ -6635,7 +4960,7 @@
                 <a:ea typeface="Calibri" pitchFamily="34" charset="-122"/>
                 <a:cs typeface="Calibri" pitchFamily="34" charset="-120"/>
               </a:rPr>
-              <a:t>One-time Items</a:t>
+              <a:t>Dividend Payout</a:t>
             </a:r>
             <a:endParaRPr lang="en-US" sz="850" dirty="0"/>
           </a:p>
@@ -6643,14 +4968,14 @@
       </p:sp>
       <p:sp>
         <p:nvSpPr>
-          <p:cNvPr id="13" name="Text 11"/>
-          <p:cNvSpPr/>
-          <p:nvPr/>
-        </p:nvSpPr>
-        <p:spPr>
-          <a:xfrm>
-            <a:off x="2578608" y="2505456"/>
-            <a:ext cx="1874520" cy="438912"/>
+          <p:cNvPr id="11" name="Text 8"/>
+          <p:cNvSpPr/>
+          <p:nvPr/>
+        </p:nvSpPr>
+        <p:spPr>
+          <a:xfrm>
+            <a:off x="7415784" y="969264"/>
+            <a:ext cx="1298448" cy="347472"/>
           </a:xfrm>
           <a:prstGeom prst="rect">
             <a:avLst/>
@@ -6666,30 +4991,69 @@
               <a:buNone/>
             </a:pPr>
             <a:r>
-              <a:rPr lang="en-US" sz="1300" b="1" dirty="0">
-                <a:solidFill>
-                  <a:srgbClr val="D97706"/>
-                </a:solidFill>
-                <a:latin typeface="Calibri" pitchFamily="34" charset="0"/>
-                <a:ea typeface="Calibri" pitchFamily="34" charset="-122"/>
-                <a:cs typeface="Calibri" pitchFamily="34" charset="-120"/>
-              </a:rPr>
-              <a:t>INR 1,458Cr wage provision</a:t>
-            </a:r>
-            <a:endParaRPr lang="en-US" sz="1300" dirty="0"/>
-          </a:p>
-        </p:txBody>
-      </p:sp>
-      <p:sp>
-        <p:nvSpPr>
-          <p:cNvPr id="14" name="Shape 12"/>
-          <p:cNvSpPr/>
-          <p:nvPr/>
-        </p:nvSpPr>
-        <p:spPr>
-          <a:xfrm>
-            <a:off x="4663440" y="2231136"/>
-            <a:ext cx="2057400" cy="987552"/>
+              <a:rPr lang="en-US" sz="1800" b="1" dirty="0">
+                <a:solidFill>
+                  <a:srgbClr val="1C2B5E"/>
+                </a:solidFill>
+                <a:latin typeface="Calibri" pitchFamily="34" charset="0"/>
+                <a:ea typeface="Calibri" pitchFamily="34" charset="-122"/>
+                <a:cs typeface="Calibri" pitchFamily="34" charset="-120"/>
+              </a:rPr>
+              <a:t>45.1%</a:t>
+            </a:r>
+            <a:endParaRPr lang="en-US" sz="1800" dirty="0"/>
+          </a:p>
+        </p:txBody>
+      </p:sp>
+      <p:sp>
+        <p:nvSpPr>
+          <p:cNvPr id="12" name="Text 9"/>
+          <p:cNvSpPr/>
+          <p:nvPr/>
+        </p:nvSpPr>
+        <p:spPr>
+          <a:xfrm>
+            <a:off x="7415784" y="1316736"/>
+            <a:ext cx="1298448" cy="164592"/>
+          </a:xfrm>
+          <a:prstGeom prst="rect">
+            <a:avLst/>
+          </a:prstGeom>
+          <a:noFill/>
+          <a:ln/>
+        </p:spPr>
+        <p:txBody>
+          <a:bodyPr wrap="square" lIns="0" tIns="0" rIns="0" bIns="0" rtlCol="0" anchor="ctr"/>
+          <a:lstStyle/>
+          <a:p>
+            <a:pPr indent="0" marL="0">
+              <a:buNone/>
+            </a:pPr>
+            <a:r>
+              <a:rPr lang="en-US" sz="800" dirty="0">
+                <a:solidFill>
+                  <a:srgbClr val="64748B"/>
+                </a:solidFill>
+                <a:latin typeface="Calibri" pitchFamily="34" charset="0"/>
+                <a:ea typeface="Calibri" pitchFamily="34" charset="-122"/>
+                <a:cs typeface="Calibri" pitchFamily="34" charset="-120"/>
+              </a:rPr>
+              <a:t>INR 15.5/sh FY2026</a:t>
+            </a:r>
+            <a:endParaRPr lang="en-US" sz="800" dirty="0"/>
+          </a:p>
+        </p:txBody>
+      </p:sp>
+      <p:sp>
+        <p:nvSpPr>
+          <p:cNvPr id="13" name="Shape 10"/>
+          <p:cNvSpPr/>
+          <p:nvPr/>
+        </p:nvSpPr>
+        <p:spPr>
+          <a:xfrm>
+            <a:off x="5559552" y="1737360"/>
+            <a:ext cx="1572768" cy="987552"/>
           </a:xfrm>
           <a:prstGeom prst="rect">
             <a:avLst/>
@@ -6697,9 +5061,9 @@
           <a:solidFill>
             <a:srgbClr val="FFFFFF"/>
           </a:solidFill>
-          <a:ln w="19050">
+          <a:ln w="12700">
             <a:solidFill>
-              <a:srgbClr val="D97706"/>
+              <a:srgbClr val="D6E4FF"/>
             </a:solidFill>
             <a:prstDash val="solid"/>
           </a:ln>
@@ -6714,14 +5078,14 @@
       </p:sp>
       <p:sp>
         <p:nvSpPr>
-          <p:cNvPr id="15" name="Text 13"/>
-          <p:cNvSpPr/>
-          <p:nvPr/>
-        </p:nvSpPr>
-        <p:spPr>
-          <a:xfrm>
-            <a:off x="4773168" y="2304288"/>
-            <a:ext cx="1874520" cy="201168"/>
+          <p:cNvPr id="14" name="Text 11"/>
+          <p:cNvSpPr/>
+          <p:nvPr/>
+        </p:nvSpPr>
+        <p:spPr>
+          <a:xfrm>
+            <a:off x="5724144" y="1856232"/>
+            <a:ext cx="1298448" cy="201168"/>
           </a:xfrm>
           <a:prstGeom prst="rect">
             <a:avLst/>
@@ -6745,7 +5109,7 @@
                 <a:ea typeface="Calibri" pitchFamily="34" charset="-122"/>
                 <a:cs typeface="Calibri" pitchFamily="34" charset="-120"/>
               </a:rPr>
-              <a:t>Analyst Pushback</a:t>
+              <a:t>Govt Divestment</a:t>
             </a:r>
             <a:endParaRPr lang="en-US" sz="850" dirty="0"/>
           </a:p>
@@ -6753,14 +5117,14 @@
       </p:sp>
       <p:sp>
         <p:nvSpPr>
-          <p:cNvPr id="16" name="Text 14"/>
-          <p:cNvSpPr/>
-          <p:nvPr/>
-        </p:nvSpPr>
-        <p:spPr>
-          <a:xfrm>
-            <a:off x="4773168" y="2505456"/>
-            <a:ext cx="1874520" cy="438912"/>
+          <p:cNvPr id="15" name="Text 12"/>
+          <p:cNvSpPr/>
+          <p:nvPr/>
+        </p:nvSpPr>
+        <p:spPr>
+          <a:xfrm>
+            <a:off x="5724144" y="2048256"/>
+            <a:ext cx="1298448" cy="347472"/>
           </a:xfrm>
           <a:prstGeom prst="rect">
             <a:avLst/>
@@ -6776,7 +5140,7 @@
               <a:buNone/>
             </a:pPr>
             <a:r>
-              <a:rPr lang="en-US" sz="1300" b="1" dirty="0">
+              <a:rPr lang="en-US" sz="1800" b="1" dirty="0">
                 <a:solidFill>
                   <a:srgbClr val="D97706"/>
                 </a:solidFill>
@@ -6784,22 +5148,61 @@
                 <a:ea typeface="Calibri" pitchFamily="34" charset="-122"/>
                 <a:cs typeface="Calibri" pitchFamily="34" charset="-120"/>
               </a:rPr>
-              <a:t>Moderate</a:t>
-            </a:r>
-            <a:endParaRPr lang="en-US" sz="1300" dirty="0"/>
-          </a:p>
-        </p:txBody>
-      </p:sp>
-      <p:sp>
-        <p:nvSpPr>
-          <p:cNvPr id="17" name="Shape 15"/>
-          <p:cNvSpPr/>
-          <p:nvPr/>
-        </p:nvSpPr>
-        <p:spPr>
-          <a:xfrm>
-            <a:off x="6858000" y="2231136"/>
-            <a:ext cx="2057400" cy="987552"/>
+              <a:t>INR 8,800Cr</a:t>
+            </a:r>
+            <a:endParaRPr lang="en-US" sz="1800" dirty="0"/>
+          </a:p>
+        </p:txBody>
+      </p:sp>
+      <p:sp>
+        <p:nvSpPr>
+          <p:cNvPr id="16" name="Text 13"/>
+          <p:cNvSpPr/>
+          <p:nvPr/>
+        </p:nvSpPr>
+        <p:spPr>
+          <a:xfrm>
+            <a:off x="5724144" y="2395728"/>
+            <a:ext cx="1298448" cy="164592"/>
+          </a:xfrm>
+          <a:prstGeom prst="rect">
+            <a:avLst/>
+          </a:prstGeom>
+          <a:noFill/>
+          <a:ln/>
+        </p:spPr>
+        <p:txBody>
+          <a:bodyPr wrap="square" lIns="0" tIns="0" rIns="0" bIns="0" rtlCol="0" anchor="ctr"/>
+          <a:lstStyle/>
+          <a:p>
+            <a:pPr indent="0" marL="0">
+              <a:buNone/>
+            </a:pPr>
+            <a:r>
+              <a:rPr lang="en-US" sz="800" dirty="0">
+                <a:solidFill>
+                  <a:srgbClr val="64748B"/>
+                </a:solidFill>
+                <a:latin typeface="Calibri" pitchFamily="34" charset="0"/>
+                <a:ea typeface="Calibri" pitchFamily="34" charset="-122"/>
+                <a:cs typeface="Calibri" pitchFamily="34" charset="-120"/>
+              </a:rPr>
+              <a:t>Planned — supply overhang</a:t>
+            </a:r>
+            <a:endParaRPr lang="en-US" sz="800" dirty="0"/>
+          </a:p>
+        </p:txBody>
+      </p:sp>
+      <p:sp>
+        <p:nvSpPr>
+          <p:cNvPr id="17" name="Shape 14"/>
+          <p:cNvSpPr/>
+          <p:nvPr/>
+        </p:nvSpPr>
+        <p:spPr>
+          <a:xfrm>
+            <a:off x="7251192" y="1737360"/>
+            <a:ext cx="1572768" cy="987552"/>
           </a:xfrm>
           <a:prstGeom prst="rect">
             <a:avLst/>
@@ -6807,9 +5210,9 @@
           <a:solidFill>
             <a:srgbClr val="FFFFFF"/>
           </a:solidFill>
-          <a:ln w="19050">
+          <a:ln w="12700">
             <a:solidFill>
-              <a:srgbClr val="059669"/>
+              <a:srgbClr val="D6E4FF"/>
             </a:solidFill>
             <a:prstDash val="solid"/>
           </a:ln>
@@ -6824,14 +5227,14 @@
       </p:sp>
       <p:sp>
         <p:nvSpPr>
-          <p:cNvPr id="18" name="Text 16"/>
-          <p:cNvSpPr/>
-          <p:nvPr/>
-        </p:nvSpPr>
-        <p:spPr>
-          <a:xfrm>
-            <a:off x="6967728" y="2304288"/>
-            <a:ext cx="1874520" cy="201168"/>
+          <p:cNvPr id="18" name="Text 15"/>
+          <p:cNvSpPr/>
+          <p:nvPr/>
+        </p:nvSpPr>
+        <p:spPr>
+          <a:xfrm>
+            <a:off x="7415784" y="1856232"/>
+            <a:ext cx="1298448" cy="201168"/>
           </a:xfrm>
           <a:prstGeom prst="rect">
             <a:avLst/>
@@ -6855,7 +5258,7 @@
                 <a:ea typeface="Calibri" pitchFamily="34" charset="-122"/>
                 <a:cs typeface="Calibri" pitchFamily="34" charset="-120"/>
               </a:rPr>
-              <a:t>GAAP vs Adj Gap</a:t>
+              <a:t>ROCE</a:t>
             </a:r>
             <a:endParaRPr lang="en-US" sz="850" dirty="0"/>
           </a:p>
@@ -6863,14 +5266,14 @@
       </p:sp>
       <p:sp>
         <p:nvSpPr>
-          <p:cNvPr id="19" name="Text 17"/>
-          <p:cNvSpPr/>
-          <p:nvPr/>
-        </p:nvSpPr>
-        <p:spPr>
-          <a:xfrm>
-            <a:off x="6967728" y="2505456"/>
-            <a:ext cx="1874520" cy="438912"/>
+          <p:cNvPr id="19" name="Text 16"/>
+          <p:cNvSpPr/>
+          <p:nvPr/>
+        </p:nvSpPr>
+        <p:spPr>
+          <a:xfrm>
+            <a:off x="7415784" y="2048256"/>
+            <a:ext cx="1298448" cy="347472"/>
           </a:xfrm>
           <a:prstGeom prst="rect">
             <a:avLst/>
@@ -6886,7 +5289,7 @@
               <a:buNone/>
             </a:pPr>
             <a:r>
-              <a:rPr lang="en-US" sz="1300" b="1" dirty="0">
+              <a:rPr lang="en-US" sz="1800" b="1" dirty="0">
                 <a:solidFill>
                   <a:srgbClr val="059669"/>
                 </a:solidFill>
@@ -6894,22 +5297,159 @@
                 <a:ea typeface="Calibri" pitchFamily="34" charset="-122"/>
                 <a:cs typeface="Calibri" pitchFamily="34" charset="-120"/>
               </a:rPr>
-              <a:t>Clean (no adj)</a:t>
-            </a:r>
-            <a:endParaRPr lang="en-US" sz="1300" dirty="0"/>
-          </a:p>
-        </p:txBody>
-      </p:sp>
-      <p:sp>
-        <p:nvSpPr>
-          <p:cNvPr id="20" name="Shape 18"/>
-          <p:cNvSpPr/>
-          <p:nvPr/>
-        </p:nvSpPr>
-        <p:spPr>
-          <a:xfrm>
-            <a:off x="274320" y="3346704"/>
-            <a:ext cx="8595360" cy="1508760"/>
+              <a:t>35.3%</a:t>
+            </a:r>
+            <a:endParaRPr lang="en-US" sz="1800" dirty="0"/>
+          </a:p>
+        </p:txBody>
+      </p:sp>
+      <p:sp>
+        <p:nvSpPr>
+          <p:cNvPr id="20" name="Text 17"/>
+          <p:cNvSpPr/>
+          <p:nvPr/>
+        </p:nvSpPr>
+        <p:spPr>
+          <a:xfrm>
+            <a:off x="7415784" y="2395728"/>
+            <a:ext cx="1298448" cy="164592"/>
+          </a:xfrm>
+          <a:prstGeom prst="rect">
+            <a:avLst/>
+          </a:prstGeom>
+          <a:noFill/>
+          <a:ln/>
+        </p:spPr>
+        <p:txBody>
+          <a:bodyPr wrap="square" lIns="0" tIns="0" rIns="0" bIns="0" rtlCol="0" anchor="ctr"/>
+          <a:lstStyle/>
+          <a:p>
+            <a:pPr indent="0" marL="0">
+              <a:buNone/>
+            </a:pPr>
+            <a:r>
+              <a:rPr lang="en-US" sz="800" dirty="0">
+                <a:solidFill>
+                  <a:srgbClr val="64748B"/>
+                </a:solidFill>
+                <a:latin typeface="Calibri" pitchFamily="34" charset="0"/>
+                <a:ea typeface="Calibri" pitchFamily="34" charset="-122"/>
+                <a:cs typeface="Calibri" pitchFamily="34" charset="-120"/>
+              </a:rPr>
+              <a:t>Exceptional for mining</a:t>
+            </a:r>
+            <a:endParaRPr lang="en-US" sz="800" dirty="0"/>
+          </a:p>
+        </p:txBody>
+      </p:sp>
+      <p:sp>
+        <p:nvSpPr>
+          <p:cNvPr id="21" name="Shape 18"/>
+          <p:cNvSpPr/>
+          <p:nvPr/>
+        </p:nvSpPr>
+        <p:spPr>
+          <a:xfrm>
+            <a:off x="5559552" y="2816352"/>
+            <a:ext cx="3310128" cy="1078992"/>
+          </a:xfrm>
+          <a:prstGeom prst="rect">
+            <a:avLst/>
+          </a:prstGeom>
+          <a:solidFill>
+            <a:srgbClr val="1C2B5E"/>
+          </a:solidFill>
+          <a:ln/>
+        </p:spPr>
+      </p:sp>
+      <p:sp>
+        <p:nvSpPr>
+          <p:cNvPr id="22" name="Text 19"/>
+          <p:cNvSpPr/>
+          <p:nvPr/>
+        </p:nvSpPr>
+        <p:spPr>
+          <a:xfrm>
+            <a:off x="5687568" y="2907792"/>
+            <a:ext cx="3108960" cy="201168"/>
+          </a:xfrm>
+          <a:prstGeom prst="rect">
+            <a:avLst/>
+          </a:prstGeom>
+          <a:noFill/>
+          <a:ln/>
+        </p:spPr>
+        <p:txBody>
+          <a:bodyPr wrap="square" lIns="0" tIns="0" rIns="0" bIns="0" rtlCol="0" anchor="ctr"/>
+          <a:lstStyle/>
+          <a:p>
+            <a:pPr indent="0" marL="0">
+              <a:buNone/>
+            </a:pPr>
+            <a:r>
+              <a:rPr lang="en-US" sz="850" b="1" spc="100" kern="0" dirty="0">
+                <a:solidFill>
+                  <a:srgbClr val="D97706"/>
+                </a:solidFill>
+                <a:latin typeface="Calibri" pitchFamily="34" charset="0"/>
+                <a:ea typeface="Calibri" pitchFamily="34" charset="-122"/>
+                <a:cs typeface="Calibri" pitchFamily="34" charset="-120"/>
+              </a:rPr>
+              <a:t>CAPITAL ALLOCATION</a:t>
+            </a:r>
+            <a:endParaRPr lang="en-US" sz="850" dirty="0"/>
+          </a:p>
+        </p:txBody>
+      </p:sp>
+      <p:sp>
+        <p:nvSpPr>
+          <p:cNvPr id="23" name="Text 20"/>
+          <p:cNvSpPr/>
+          <p:nvPr/>
+        </p:nvSpPr>
+        <p:spPr>
+          <a:xfrm>
+            <a:off x="5687568" y="3127248"/>
+            <a:ext cx="3108960" cy="685800"/>
+          </a:xfrm>
+          <a:prstGeom prst="rect">
+            <a:avLst/>
+          </a:prstGeom>
+          <a:noFill/>
+          <a:ln/>
+        </p:spPr>
+        <p:txBody>
+          <a:bodyPr wrap="square" lIns="0" tIns="0" rIns="0" bIns="0" rtlCol="0" anchor="ctr"/>
+          <a:lstStyle/>
+          <a:p>
+            <a:pPr indent="0" marL="0">
+              <a:buNone/>
+            </a:pPr>
+            <a:r>
+              <a:rPr lang="en-US" sz="1000" dirty="0">
+                <a:solidFill>
+                  <a:srgbClr val="FFFFFF"/>
+                </a:solidFill>
+                <a:latin typeface="Calibri" pitchFamily="34" charset="0"/>
+                <a:ea typeface="Calibri" pitchFamily="34" charset="-122"/>
+                <a:cs typeface="Calibri" pitchFamily="34" charset="-120"/>
+              </a:rPr>
+              <a:t>Consistent high dividends every year. 45.1% payout. Self-funds all capex from OCF. Zero M&amp;A risk. Pure income compounder.</a:t>
+            </a:r>
+            <a:endParaRPr lang="en-US" sz="1000" dirty="0"/>
+          </a:p>
+        </p:txBody>
+      </p:sp>
+      <p:sp>
+        <p:nvSpPr>
+          <p:cNvPr id="24" name="Shape 21"/>
+          <p:cNvSpPr/>
+          <p:nvPr/>
+        </p:nvSpPr>
+        <p:spPr>
+          <a:xfrm>
+            <a:off x="256032" y="3429000"/>
+            <a:ext cx="2743200" cy="914400"/>
           </a:xfrm>
           <a:prstGeom prst="rect">
             <a:avLst/>
@@ -6917,7 +5457,12 @@
           <a:solidFill>
             <a:srgbClr val="FFFFFF"/>
           </a:solidFill>
-          <a:ln/>
+          <a:ln w="12700">
+            <a:solidFill>
+              <a:srgbClr val="D6E4FF"/>
+            </a:solidFill>
+            <a:prstDash val="solid"/>
+          </a:ln>
           <a:effectLst>
             <a:outerShdw sx="100000" sy="100000" kx="0" ky="0" algn="bl" rotWithShape="0" blurRad="101600" dist="38100" dir="8100000">
               <a:srgbClr val="000000">
@@ -6929,14 +5474,14 @@
       </p:sp>
       <p:sp>
         <p:nvSpPr>
-          <p:cNvPr id="21" name="Text 19"/>
-          <p:cNvSpPr/>
-          <p:nvPr/>
-        </p:nvSpPr>
-        <p:spPr>
-          <a:xfrm>
-            <a:off x="457200" y="3438144"/>
-            <a:ext cx="6400800" cy="201168"/>
+          <p:cNvPr id="25" name="Text 22"/>
+          <p:cNvSpPr/>
+          <p:nvPr/>
+        </p:nvSpPr>
+        <p:spPr>
+          <a:xfrm>
+            <a:off x="420624" y="3547872"/>
+            <a:ext cx="2468880" cy="201168"/>
           </a:xfrm>
           <a:prstGeom prst="rect">
             <a:avLst/>
@@ -6952,99 +5497,399 @@
               <a:buNone/>
             </a:pPr>
             <a:r>
-              <a:rPr lang="en-US" sz="900" b="1" spc="200" kern="0" dirty="0">
-                <a:solidFill>
-                  <a:srgbClr val="2D5BE3"/>
-                </a:solidFill>
-                <a:latin typeface="Calibri" pitchFamily="34" charset="0"/>
-                <a:ea typeface="Calibri" pitchFamily="34" charset="-122"/>
-                <a:cs typeface="Calibri" pitchFamily="34" charset="-120"/>
-              </a:rPr>
-              <a:t>ANALYST CONCERNS FROM FY2026 RESULTS</a:t>
-            </a:r>
-            <a:endParaRPr lang="en-US" sz="900" dirty="0"/>
-          </a:p>
-        </p:txBody>
-      </p:sp>
-      <p:sp>
-        <p:nvSpPr>
-          <p:cNvPr id="22" name="Text 20"/>
-          <p:cNvSpPr/>
-          <p:nvPr/>
-        </p:nvSpPr>
-        <p:spPr>
-          <a:xfrm>
-            <a:off x="457200" y="3675888"/>
-            <a:ext cx="8229600" cy="1078992"/>
-          </a:xfrm>
-          <a:prstGeom prst="rect">
-            <a:avLst/>
-          </a:prstGeom>
-          <a:noFill/>
-          <a:ln/>
-        </p:spPr>
-        <p:txBody>
-          <a:bodyPr wrap="square" lIns="0" tIns="0" rIns="0" bIns="0" rtlCol="0" anchor="ctr"/>
-          <a:lstStyle/>
-          <a:p>
-            <a:pPr marL="342900" indent="-342900">
-              <a:buSzPct val="100000"/>
-              <a:buChar char="•"/>
-            </a:pPr>
-            <a:r>
-              <a:rPr lang="en-US" sz="1050" dirty="0">
-                <a:solidFill>
-                  <a:srgbClr val="0F172A"/>
-                </a:solidFill>
-                <a:latin typeface="Calibri" pitchFamily="34" charset="0"/>
-                <a:ea typeface="Calibri" pitchFamily="34" charset="-122"/>
-                <a:cs typeface="Calibri" pitchFamily="34" charset="-120"/>
-              </a:rPr>
-              <a:t>Why are e-auction premiums compressing? Softer global coal prices reduce arbitrage opportunity</a:t>
-            </a:r>
-            <a:endParaRPr lang="en-US" sz="1050" dirty="0"/>
-          </a:p>
-          <a:p>
-            <a:pPr marL="342900" indent="-342900">
-              <a:buSzPct val="100000"/>
-              <a:buChar char="•"/>
-            </a:pPr>
-            <a:r>
-              <a:rPr lang="en-US" sz="1050" dirty="0">
-                <a:solidFill>
-                  <a:srgbClr val="0F172A"/>
-                </a:solidFill>
-                <a:latin typeface="Calibri" pitchFamily="34" charset="0"/>
-                <a:ea typeface="Calibri" pitchFamily="34" charset="-122"/>
-                <a:cs typeface="Calibri" pitchFamily="34" charset="-120"/>
-              </a:rPr>
-              <a:t>How does CIL protect margins as wages rise? Limited pricing flexibility under government oversight is the key constraint</a:t>
-            </a:r>
-            <a:endParaRPr lang="en-US" sz="1050" dirty="0"/>
-          </a:p>
-          <a:p>
-            <a:pPr marL="342900" indent="-342900">
-              <a:buSzPct val="100000"/>
-              <a:buChar char="•"/>
-            </a:pPr>
-            <a:r>
-              <a:rPr lang="en-US" sz="1050" dirty="0">
-                <a:solidFill>
-                  <a:srgbClr val="0F172A"/>
-                </a:solidFill>
-                <a:latin typeface="Calibri" pitchFamily="34" charset="0"/>
-                <a:ea typeface="Calibri" pitchFamily="34" charset="-122"/>
-                <a:cs typeface="Calibri" pitchFamily="34" charset="-120"/>
-              </a:rPr>
-              <a:t>What is the impact of government divestment? INR 8,800 crore planned stake sale creates supply overhang on the stock</a:t>
-            </a:r>
-            <a:endParaRPr lang="en-US" sz="1050" dirty="0"/>
-          </a:p>
-        </p:txBody>
-      </p:sp>
-      <p:sp>
-        <p:nvSpPr>
-          <p:cNvPr id="23" name="Text 21"/>
+              <a:rPr lang="en-US" sz="850" dirty="0">
+                <a:solidFill>
+                  <a:srgbClr val="64748B"/>
+                </a:solidFill>
+                <a:latin typeface="Calibri" pitchFamily="34" charset="0"/>
+                <a:ea typeface="Calibri" pitchFamily="34" charset="-122"/>
+                <a:cs typeface="Calibri" pitchFamily="34" charset="-120"/>
+              </a:rPr>
+              <a:t>Net Debt/EBITDA</a:t>
+            </a:r>
+            <a:endParaRPr lang="en-US" sz="850" dirty="0"/>
+          </a:p>
+        </p:txBody>
+      </p:sp>
+      <p:sp>
+        <p:nvSpPr>
+          <p:cNvPr id="26" name="Text 23"/>
+          <p:cNvSpPr/>
+          <p:nvPr/>
+        </p:nvSpPr>
+        <p:spPr>
+          <a:xfrm>
+            <a:off x="420624" y="3739896"/>
+            <a:ext cx="2468880" cy="347472"/>
+          </a:xfrm>
+          <a:prstGeom prst="rect">
+            <a:avLst/>
+          </a:prstGeom>
+          <a:noFill/>
+          <a:ln/>
+        </p:spPr>
+        <p:txBody>
+          <a:bodyPr wrap="square" lIns="0" tIns="0" rIns="0" bIns="0" rtlCol="0" anchor="ctr"/>
+          <a:lstStyle/>
+          <a:p>
+            <a:pPr indent="0" marL="0">
+              <a:buNone/>
+            </a:pPr>
+            <a:r>
+              <a:rPr lang="en-US" sz="1800" b="1" dirty="0">
+                <a:solidFill>
+                  <a:srgbClr val="059669"/>
+                </a:solidFill>
+                <a:latin typeface="Calibri" pitchFamily="34" charset="0"/>
+                <a:ea typeface="Calibri" pitchFamily="34" charset="-122"/>
+                <a:cs typeface="Calibri" pitchFamily="34" charset="-120"/>
+              </a:rPr>
+              <a:t>0.1x</a:t>
+            </a:r>
+            <a:endParaRPr lang="en-US" sz="1800" dirty="0"/>
+          </a:p>
+        </p:txBody>
+      </p:sp>
+      <p:sp>
+        <p:nvSpPr>
+          <p:cNvPr id="27" name="Text 24"/>
+          <p:cNvSpPr/>
+          <p:nvPr/>
+        </p:nvSpPr>
+        <p:spPr>
+          <a:xfrm>
+            <a:off x="420624" y="4087368"/>
+            <a:ext cx="2468880" cy="164592"/>
+          </a:xfrm>
+          <a:prstGeom prst="rect">
+            <a:avLst/>
+          </a:prstGeom>
+          <a:noFill/>
+          <a:ln/>
+        </p:spPr>
+        <p:txBody>
+          <a:bodyPr wrap="square" lIns="0" tIns="0" rIns="0" bIns="0" rtlCol="0" anchor="ctr"/>
+          <a:lstStyle/>
+          <a:p>
+            <a:pPr indent="0" marL="0">
+              <a:buNone/>
+            </a:pPr>
+            <a:r>
+              <a:rPr lang="en-US" sz="800" dirty="0">
+                <a:solidFill>
+                  <a:srgbClr val="64748B"/>
+                </a:solidFill>
+                <a:latin typeface="Calibri" pitchFamily="34" charset="0"/>
+                <a:ea typeface="Calibri" pitchFamily="34" charset="-122"/>
+                <a:cs typeface="Calibri" pitchFamily="34" charset="-120"/>
+              </a:rPr>
+              <a:t>Safe &lt;2x ✅</a:t>
+            </a:r>
+            <a:endParaRPr lang="en-US" sz="800" dirty="0"/>
+          </a:p>
+        </p:txBody>
+      </p:sp>
+      <p:sp>
+        <p:nvSpPr>
+          <p:cNvPr id="28" name="Shape 25"/>
+          <p:cNvSpPr/>
+          <p:nvPr/>
+        </p:nvSpPr>
+        <p:spPr>
+          <a:xfrm>
+            <a:off x="3200400" y="3429000"/>
+            <a:ext cx="2743200" cy="914400"/>
+          </a:xfrm>
+          <a:prstGeom prst="rect">
+            <a:avLst/>
+          </a:prstGeom>
+          <a:solidFill>
+            <a:srgbClr val="FFFFFF"/>
+          </a:solidFill>
+          <a:ln w="12700">
+            <a:solidFill>
+              <a:srgbClr val="D6E4FF"/>
+            </a:solidFill>
+            <a:prstDash val="solid"/>
+          </a:ln>
+          <a:effectLst>
+            <a:outerShdw sx="100000" sy="100000" kx="0" ky="0" algn="bl" rotWithShape="0" blurRad="101600" dist="38100" dir="8100000">
+              <a:srgbClr val="000000">
+                <a:alpha val="10000"/>
+              </a:srgbClr>
+            </a:outerShdw>
+          </a:effectLst>
+        </p:spPr>
+      </p:sp>
+      <p:sp>
+        <p:nvSpPr>
+          <p:cNvPr id="29" name="Text 26"/>
+          <p:cNvSpPr/>
+          <p:nvPr/>
+        </p:nvSpPr>
+        <p:spPr>
+          <a:xfrm>
+            <a:off x="3364992" y="3547872"/>
+            <a:ext cx="2468880" cy="201168"/>
+          </a:xfrm>
+          <a:prstGeom prst="rect">
+            <a:avLst/>
+          </a:prstGeom>
+          <a:noFill/>
+          <a:ln/>
+        </p:spPr>
+        <p:txBody>
+          <a:bodyPr wrap="square" lIns="0" tIns="0" rIns="0" bIns="0" rtlCol="0" anchor="ctr"/>
+          <a:lstStyle/>
+          <a:p>
+            <a:pPr indent="0" marL="0">
+              <a:buNone/>
+            </a:pPr>
+            <a:r>
+              <a:rPr lang="en-US" sz="850" dirty="0">
+                <a:solidFill>
+                  <a:srgbClr val="64748B"/>
+                </a:solidFill>
+                <a:latin typeface="Calibri" pitchFamily="34" charset="0"/>
+                <a:ea typeface="Calibri" pitchFamily="34" charset="-122"/>
+                <a:cs typeface="Calibri" pitchFamily="34" charset="-120"/>
+              </a:rPr>
+              <a:t>Interest Cover</a:t>
+            </a:r>
+            <a:endParaRPr lang="en-US" sz="850" dirty="0"/>
+          </a:p>
+        </p:txBody>
+      </p:sp>
+      <p:sp>
+        <p:nvSpPr>
+          <p:cNvPr id="30" name="Text 27"/>
+          <p:cNvSpPr/>
+          <p:nvPr/>
+        </p:nvSpPr>
+        <p:spPr>
+          <a:xfrm>
+            <a:off x="3364992" y="3739896"/>
+            <a:ext cx="2468880" cy="347472"/>
+          </a:xfrm>
+          <a:prstGeom prst="rect">
+            <a:avLst/>
+          </a:prstGeom>
+          <a:noFill/>
+          <a:ln/>
+        </p:spPr>
+        <p:txBody>
+          <a:bodyPr wrap="square" lIns="0" tIns="0" rIns="0" bIns="0" rtlCol="0" anchor="ctr"/>
+          <a:lstStyle/>
+          <a:p>
+            <a:pPr indent="0" marL="0">
+              <a:buNone/>
+            </a:pPr>
+            <a:r>
+              <a:rPr lang="en-US" sz="1800" b="1" dirty="0">
+                <a:solidFill>
+                  <a:srgbClr val="059669"/>
+                </a:solidFill>
+                <a:latin typeface="Calibri" pitchFamily="34" charset="0"/>
+                <a:ea typeface="Calibri" pitchFamily="34" charset="-122"/>
+                <a:cs typeface="Calibri" pitchFamily="34" charset="-120"/>
+              </a:rPr>
+              <a:t>35.5x</a:t>
+            </a:r>
+            <a:endParaRPr lang="en-US" sz="1800" dirty="0"/>
+          </a:p>
+        </p:txBody>
+      </p:sp>
+      <p:sp>
+        <p:nvSpPr>
+          <p:cNvPr id="31" name="Text 28"/>
+          <p:cNvSpPr/>
+          <p:nvPr/>
+        </p:nvSpPr>
+        <p:spPr>
+          <a:xfrm>
+            <a:off x="3364992" y="4087368"/>
+            <a:ext cx="2468880" cy="164592"/>
+          </a:xfrm>
+          <a:prstGeom prst="rect">
+            <a:avLst/>
+          </a:prstGeom>
+          <a:noFill/>
+          <a:ln/>
+        </p:spPr>
+        <p:txBody>
+          <a:bodyPr wrap="square" lIns="0" tIns="0" rIns="0" bIns="0" rtlCol="0" anchor="ctr"/>
+          <a:lstStyle/>
+          <a:p>
+            <a:pPr indent="0" marL="0">
+              <a:buNone/>
+            </a:pPr>
+            <a:r>
+              <a:rPr lang="en-US" sz="800" dirty="0">
+                <a:solidFill>
+                  <a:srgbClr val="64748B"/>
+                </a:solidFill>
+                <a:latin typeface="Calibri" pitchFamily="34" charset="0"/>
+                <a:ea typeface="Calibri" pitchFamily="34" charset="-122"/>
+                <a:cs typeface="Calibri" pitchFamily="34" charset="-120"/>
+              </a:rPr>
+              <a:t>Safe &gt;5x ✅</a:t>
+            </a:r>
+            <a:endParaRPr lang="en-US" sz="800" dirty="0"/>
+          </a:p>
+        </p:txBody>
+      </p:sp>
+      <p:sp>
+        <p:nvSpPr>
+          <p:cNvPr id="32" name="Shape 29"/>
+          <p:cNvSpPr/>
+          <p:nvPr/>
+        </p:nvSpPr>
+        <p:spPr>
+          <a:xfrm>
+            <a:off x="6144768" y="3429000"/>
+            <a:ext cx="2743200" cy="914400"/>
+          </a:xfrm>
+          <a:prstGeom prst="rect">
+            <a:avLst/>
+          </a:prstGeom>
+          <a:solidFill>
+            <a:srgbClr val="FFFFFF"/>
+          </a:solidFill>
+          <a:ln w="12700">
+            <a:solidFill>
+              <a:srgbClr val="D6E4FF"/>
+            </a:solidFill>
+            <a:prstDash val="solid"/>
+          </a:ln>
+          <a:effectLst>
+            <a:outerShdw sx="100000" sy="100000" kx="0" ky="0" algn="bl" rotWithShape="0" blurRad="101600" dist="38100" dir="8100000">
+              <a:srgbClr val="000000">
+                <a:alpha val="10000"/>
+              </a:srgbClr>
+            </a:outerShdw>
+          </a:effectLst>
+        </p:spPr>
+      </p:sp>
+      <p:sp>
+        <p:nvSpPr>
+          <p:cNvPr id="33" name="Text 30"/>
+          <p:cNvSpPr/>
+          <p:nvPr/>
+        </p:nvSpPr>
+        <p:spPr>
+          <a:xfrm>
+            <a:off x="6309360" y="3547872"/>
+            <a:ext cx="2468880" cy="201168"/>
+          </a:xfrm>
+          <a:prstGeom prst="rect">
+            <a:avLst/>
+          </a:prstGeom>
+          <a:noFill/>
+          <a:ln/>
+        </p:spPr>
+        <p:txBody>
+          <a:bodyPr wrap="square" lIns="0" tIns="0" rIns="0" bIns="0" rtlCol="0" anchor="ctr"/>
+          <a:lstStyle/>
+          <a:p>
+            <a:pPr indent="0" marL="0">
+              <a:buNone/>
+            </a:pPr>
+            <a:r>
+              <a:rPr lang="en-US" sz="850" dirty="0">
+                <a:solidFill>
+                  <a:srgbClr val="64748B"/>
+                </a:solidFill>
+                <a:latin typeface="Calibri" pitchFamily="34" charset="0"/>
+                <a:ea typeface="Calibri" pitchFamily="34" charset="-122"/>
+                <a:cs typeface="Calibri" pitchFamily="34" charset="-120"/>
+              </a:rPr>
+              <a:t>Goodwill/Assets</a:t>
+            </a:r>
+            <a:endParaRPr lang="en-US" sz="850" dirty="0"/>
+          </a:p>
+        </p:txBody>
+      </p:sp>
+      <p:sp>
+        <p:nvSpPr>
+          <p:cNvPr id="34" name="Text 31"/>
+          <p:cNvSpPr/>
+          <p:nvPr/>
+        </p:nvSpPr>
+        <p:spPr>
+          <a:xfrm>
+            <a:off x="6309360" y="3739896"/>
+            <a:ext cx="2468880" cy="347472"/>
+          </a:xfrm>
+          <a:prstGeom prst="rect">
+            <a:avLst/>
+          </a:prstGeom>
+          <a:noFill/>
+          <a:ln/>
+        </p:spPr>
+        <p:txBody>
+          <a:bodyPr wrap="square" lIns="0" tIns="0" rIns="0" bIns="0" rtlCol="0" anchor="ctr"/>
+          <a:lstStyle/>
+          <a:p>
+            <a:pPr indent="0" marL="0">
+              <a:buNone/>
+            </a:pPr>
+            <a:r>
+              <a:rPr lang="en-US" sz="1800" b="1" dirty="0">
+                <a:solidFill>
+                  <a:srgbClr val="059669"/>
+                </a:solidFill>
+                <a:latin typeface="Calibri" pitchFamily="34" charset="0"/>
+                <a:ea typeface="Calibri" pitchFamily="34" charset="-122"/>
+                <a:cs typeface="Calibri" pitchFamily="34" charset="-120"/>
+              </a:rPr>
+              <a:t>~0%</a:t>
+            </a:r>
+            <a:endParaRPr lang="en-US" sz="1800" dirty="0"/>
+          </a:p>
+        </p:txBody>
+      </p:sp>
+      <p:sp>
+        <p:nvSpPr>
+          <p:cNvPr id="35" name="Text 32"/>
+          <p:cNvSpPr/>
+          <p:nvPr/>
+        </p:nvSpPr>
+        <p:spPr>
+          <a:xfrm>
+            <a:off x="6309360" y="4087368"/>
+            <a:ext cx="2468880" cy="164592"/>
+          </a:xfrm>
+          <a:prstGeom prst="rect">
+            <a:avLst/>
+          </a:prstGeom>
+          <a:noFill/>
+          <a:ln/>
+        </p:spPr>
+        <p:txBody>
+          <a:bodyPr wrap="square" lIns="0" tIns="0" rIns="0" bIns="0" rtlCol="0" anchor="ctr"/>
+          <a:lstStyle/>
+          <a:p>
+            <a:pPr indent="0" marL="0">
+              <a:buNone/>
+            </a:pPr>
+            <a:r>
+              <a:rPr lang="en-US" sz="800" dirty="0">
+                <a:solidFill>
+                  <a:srgbClr val="64748B"/>
+                </a:solidFill>
+                <a:latin typeface="Calibri" pitchFamily="34" charset="0"/>
+                <a:ea typeface="Calibri" pitchFamily="34" charset="-122"/>
+                <a:cs typeface="Calibri" pitchFamily="34" charset="-120"/>
+              </a:rPr>
+              <a:t>No M&amp;A risk ✅</a:t>
+            </a:r>
+            <a:endParaRPr lang="en-US" sz="800" dirty="0"/>
+          </a:p>
+        </p:txBody>
+      </p:sp>
+      <p:sp>
+        <p:nvSpPr>
+          <p:cNvPr id="36" name="Text 33"/>
           <p:cNvSpPr/>
           <p:nvPr/>
         </p:nvSpPr>
@@ -7166,7 +6011,7 @@
                 <a:ea typeface="Calibri" pitchFamily="34" charset="-122"/>
                 <a:cs typeface="Calibri" pitchFamily="34" charset="-120"/>
               </a:rPr>
-              <a:t>MANAGEMENT &amp; BALANCE SHEET — PSU governance + pristine financials</a:t>
+              <a:t>KEY RISKS — The energy transition is the existential question</a:t>
             </a:r>
             <a:endParaRPr lang="en-US" sz="1300" dirty="0"/>
           </a:p>
@@ -7180,8 +6025,8 @@
         </p:nvSpPr>
         <p:spPr>
           <a:xfrm>
-            <a:off x="274320" y="658368"/>
-            <a:ext cx="2029968" cy="987552"/>
+            <a:off x="274320" y="621792"/>
+            <a:ext cx="8595360" cy="786384"/>
           </a:xfrm>
           <a:prstGeom prst="rect">
             <a:avLst/>
@@ -7189,12 +6034,7 @@
           <a:solidFill>
             <a:srgbClr val="FFFFFF"/>
           </a:solidFill>
-          <a:ln w="12700">
-            <a:solidFill>
-              <a:srgbClr val="D6E4FF"/>
-            </a:solidFill>
-            <a:prstDash val="solid"/>
-          </a:ln>
+          <a:ln/>
           <a:effectLst>
             <a:outerShdw sx="100000" sy="100000" kx="0" ky="0" algn="bl" rotWithShape="0" blurRad="101600" dist="38100" dir="8100000">
               <a:srgbClr val="000000">
@@ -7206,14 +6046,93 @@
       </p:sp>
       <p:sp>
         <p:nvSpPr>
-          <p:cNvPr id="5" name="Text 3"/>
-          <p:cNvSpPr/>
-          <p:nvPr/>
-        </p:nvSpPr>
-        <p:spPr>
-          <a:xfrm>
-            <a:off x="438912" y="786384"/>
-            <a:ext cx="1755648" cy="201168"/>
+          <p:cNvPr id="5" name="Shape 3"/>
+          <p:cNvSpPr/>
+          <p:nvPr/>
+        </p:nvSpPr>
+        <p:spPr>
+          <a:xfrm>
+            <a:off x="274320" y="621792"/>
+            <a:ext cx="164592" cy="786384"/>
+          </a:xfrm>
+          <a:prstGeom prst="rect">
+            <a:avLst/>
+          </a:prstGeom>
+          <a:solidFill>
+            <a:srgbClr val="DC2626"/>
+          </a:solidFill>
+          <a:ln/>
+        </p:spPr>
+      </p:sp>
+      <p:sp>
+        <p:nvSpPr>
+          <p:cNvPr id="6" name="Shape 4"/>
+          <p:cNvSpPr/>
+          <p:nvPr/>
+        </p:nvSpPr>
+        <p:spPr>
+          <a:xfrm>
+            <a:off x="8119872" y="822960"/>
+            <a:ext cx="713232" cy="256032"/>
+          </a:xfrm>
+          <a:prstGeom prst="rect">
+            <a:avLst/>
+          </a:prstGeom>
+          <a:solidFill>
+            <a:srgbClr val="DC2626"/>
+          </a:solidFill>
+          <a:ln/>
+        </p:spPr>
+      </p:sp>
+      <p:sp>
+        <p:nvSpPr>
+          <p:cNvPr id="7" name="Text 5"/>
+          <p:cNvSpPr/>
+          <p:nvPr/>
+        </p:nvSpPr>
+        <p:spPr>
+          <a:xfrm>
+            <a:off x="8119872" y="822960"/>
+            <a:ext cx="713232" cy="256032"/>
+          </a:xfrm>
+          <a:prstGeom prst="rect">
+            <a:avLst/>
+          </a:prstGeom>
+          <a:noFill/>
+          <a:ln/>
+        </p:spPr>
+        <p:txBody>
+          <a:bodyPr wrap="square" lIns="0" tIns="0" rIns="0" bIns="0" rtlCol="0" anchor="ctr"/>
+          <a:lstStyle/>
+          <a:p>
+            <a:pPr algn="ctr" indent="0" marL="0">
+              <a:buNone/>
+            </a:pPr>
+            <a:r>
+              <a:rPr lang="en-US" sz="750" b="1" dirty="0">
+                <a:solidFill>
+                  <a:srgbClr val="FFFFFF"/>
+                </a:solidFill>
+                <a:latin typeface="Calibri" pitchFamily="34" charset="0"/>
+                <a:ea typeface="Calibri" pitchFamily="34" charset="-122"/>
+                <a:cs typeface="Calibri" pitchFamily="34" charset="-120"/>
+              </a:rPr>
+              <a:t>HIGH</a:t>
+            </a:r>
+            <a:endParaRPr lang="en-US" sz="750" dirty="0"/>
+          </a:p>
+        </p:txBody>
+      </p:sp>
+      <p:sp>
+        <p:nvSpPr>
+          <p:cNvPr id="8" name="Text 6"/>
+          <p:cNvSpPr/>
+          <p:nvPr/>
+        </p:nvSpPr>
+        <p:spPr>
+          <a:xfrm>
+            <a:off x="530352" y="694944"/>
+            <a:ext cx="7406640" cy="237744"/>
           </a:xfrm>
           <a:prstGeom prst="rect">
             <a:avLst/>
@@ -7229,30 +6148,30 @@
               <a:buNone/>
             </a:pPr>
             <a:r>
-              <a:rPr lang="en-US" sz="850" dirty="0">
-                <a:solidFill>
-                  <a:srgbClr val="64748B"/>
-                </a:solidFill>
-                <a:latin typeface="Calibri" pitchFamily="34" charset="0"/>
-                <a:ea typeface="Calibri" pitchFamily="34" charset="-122"/>
-                <a:cs typeface="Calibri" pitchFamily="34" charset="-120"/>
-              </a:rPr>
-              <a:t>Promoter (Govt)</a:t>
-            </a:r>
-            <a:endParaRPr lang="en-US" sz="850" dirty="0"/>
-          </a:p>
-        </p:txBody>
-      </p:sp>
-      <p:sp>
-        <p:nvSpPr>
-          <p:cNvPr id="6" name="Text 4"/>
-          <p:cNvSpPr/>
-          <p:nvPr/>
-        </p:nvSpPr>
-        <p:spPr>
-          <a:xfrm>
-            <a:off x="438912" y="987552"/>
-            <a:ext cx="1755648" cy="347472"/>
+              <a:rPr lang="en-US" sz="1100" b="1" dirty="0">
+                <a:solidFill>
+                  <a:srgbClr val="0F172A"/>
+                </a:solidFill>
+                <a:latin typeface="Calibri" pitchFamily="34" charset="0"/>
+                <a:ea typeface="Calibri" pitchFamily="34" charset="-122"/>
+                <a:cs typeface="Calibri" pitchFamily="34" charset="-120"/>
+              </a:rPr>
+              <a:t>1. Energy Transition — Renewable Displacement</a:t>
+            </a:r>
+            <a:endParaRPr lang="en-US" sz="1100" dirty="0"/>
+          </a:p>
+        </p:txBody>
+      </p:sp>
+      <p:sp>
+        <p:nvSpPr>
+          <p:cNvPr id="9" name="Text 7"/>
+          <p:cNvSpPr/>
+          <p:nvPr/>
+        </p:nvSpPr>
+        <p:spPr>
+          <a:xfrm>
+            <a:off x="530352" y="969264"/>
+            <a:ext cx="7406640" cy="347472"/>
           </a:xfrm>
           <a:prstGeom prst="rect">
             <a:avLst/>
@@ -7268,69 +6187,30 @@
               <a:buNone/>
             </a:pPr>
             <a:r>
-              <a:rPr lang="en-US" sz="1800" b="1" dirty="0">
-                <a:solidFill>
-                  <a:srgbClr val="059669"/>
-                </a:solidFill>
-                <a:latin typeface="Calibri" pitchFamily="34" charset="0"/>
-                <a:ea typeface="Calibri" pitchFamily="34" charset="-122"/>
-                <a:cs typeface="Calibri" pitchFamily="34" charset="-120"/>
-              </a:rPr>
-              <a:t>63.1%</a:t>
-            </a:r>
-            <a:endParaRPr lang="en-US" sz="1800" dirty="0"/>
-          </a:p>
-        </p:txBody>
-      </p:sp>
-      <p:sp>
-        <p:nvSpPr>
-          <p:cNvPr id="7" name="Text 5"/>
-          <p:cNvSpPr/>
-          <p:nvPr/>
-        </p:nvSpPr>
-        <p:spPr>
-          <a:xfrm>
-            <a:off x="438912" y="1335024"/>
-            <a:ext cx="1755648" cy="164592"/>
-          </a:xfrm>
-          <a:prstGeom prst="rect">
-            <a:avLst/>
-          </a:prstGeom>
-          <a:noFill/>
-          <a:ln/>
-        </p:spPr>
-        <p:txBody>
-          <a:bodyPr wrap="square" lIns="0" tIns="0" rIns="0" bIns="0" rtlCol="0" anchor="ctr"/>
-          <a:lstStyle/>
-          <a:p>
-            <a:pPr indent="0" marL="0">
-              <a:buNone/>
-            </a:pPr>
-            <a:r>
-              <a:rPr lang="en-US" sz="800" dirty="0">
-                <a:solidFill>
-                  <a:srgbClr val="64748B"/>
-                </a:solidFill>
-                <a:latin typeface="Calibri" pitchFamily="34" charset="0"/>
-                <a:ea typeface="Calibri" pitchFamily="34" charset="-122"/>
-                <a:cs typeface="Calibri" pitchFamily="34" charset="-120"/>
-              </a:rPr>
-              <a:t>No pledging — 0%</a:t>
-            </a:r>
-            <a:endParaRPr lang="en-US" sz="800" dirty="0"/>
-          </a:p>
-        </p:txBody>
-      </p:sp>
-      <p:sp>
-        <p:nvSpPr>
-          <p:cNvPr id="8" name="Shape 6"/>
-          <p:cNvSpPr/>
-          <p:nvPr/>
-        </p:nvSpPr>
-        <p:spPr>
-          <a:xfrm>
-            <a:off x="2468880" y="658368"/>
-            <a:ext cx="2029968" cy="987552"/>
+              <a:rPr lang="en-US" sz="950" dirty="0">
+                <a:solidFill>
+                  <a:srgbClr val="334155"/>
+                </a:solidFill>
+                <a:latin typeface="Calibri" pitchFamily="34" charset="0"/>
+                <a:ea typeface="Calibri" pitchFamily="34" charset="-122"/>
+                <a:cs typeface="Calibri" pitchFamily="34" charset="-120"/>
+              </a:rPr>
+              <a:t>India's renewables scaling 15%+ annually. New coal power already costlier than firm renewables. By FY2031, coal tariffs ~25% more expensive than solar+wind. This is the 10-year existential risk.</a:t>
+            </a:r>
+            <a:endParaRPr lang="en-US" sz="950" dirty="0"/>
+          </a:p>
+        </p:txBody>
+      </p:sp>
+      <p:sp>
+        <p:nvSpPr>
+          <p:cNvPr id="10" name="Shape 8"/>
+          <p:cNvSpPr/>
+          <p:nvPr/>
+        </p:nvSpPr>
+        <p:spPr>
+          <a:xfrm>
+            <a:off x="274320" y="1490472"/>
+            <a:ext cx="8595360" cy="786384"/>
           </a:xfrm>
           <a:prstGeom prst="rect">
             <a:avLst/>
@@ -7338,12 +6218,7 @@
           <a:solidFill>
             <a:srgbClr val="FFFFFF"/>
           </a:solidFill>
-          <a:ln w="12700">
-            <a:solidFill>
-              <a:srgbClr val="D6E4FF"/>
-            </a:solidFill>
-            <a:prstDash val="solid"/>
-          </a:ln>
+          <a:ln/>
           <a:effectLst>
             <a:outerShdw sx="100000" sy="100000" kx="0" ky="0" algn="bl" rotWithShape="0" blurRad="101600" dist="38100" dir="8100000">
               <a:srgbClr val="000000">
@@ -7355,14 +6230,93 @@
       </p:sp>
       <p:sp>
         <p:nvSpPr>
-          <p:cNvPr id="9" name="Text 7"/>
-          <p:cNvSpPr/>
-          <p:nvPr/>
-        </p:nvSpPr>
-        <p:spPr>
-          <a:xfrm>
-            <a:off x="2633472" y="786384"/>
-            <a:ext cx="1755648" cy="201168"/>
+          <p:cNvPr id="11" name="Shape 9"/>
+          <p:cNvSpPr/>
+          <p:nvPr/>
+        </p:nvSpPr>
+        <p:spPr>
+          <a:xfrm>
+            <a:off x="274320" y="1490472"/>
+            <a:ext cx="164592" cy="786384"/>
+          </a:xfrm>
+          <a:prstGeom prst="rect">
+            <a:avLst/>
+          </a:prstGeom>
+          <a:solidFill>
+            <a:srgbClr val="DC2626"/>
+          </a:solidFill>
+          <a:ln/>
+        </p:spPr>
+      </p:sp>
+      <p:sp>
+        <p:nvSpPr>
+          <p:cNvPr id="12" name="Shape 10"/>
+          <p:cNvSpPr/>
+          <p:nvPr/>
+        </p:nvSpPr>
+        <p:spPr>
+          <a:xfrm>
+            <a:off x="8119872" y="1691640"/>
+            <a:ext cx="713232" cy="256032"/>
+          </a:xfrm>
+          <a:prstGeom prst="rect">
+            <a:avLst/>
+          </a:prstGeom>
+          <a:solidFill>
+            <a:srgbClr val="DC2626"/>
+          </a:solidFill>
+          <a:ln/>
+        </p:spPr>
+      </p:sp>
+      <p:sp>
+        <p:nvSpPr>
+          <p:cNvPr id="13" name="Text 11"/>
+          <p:cNvSpPr/>
+          <p:nvPr/>
+        </p:nvSpPr>
+        <p:spPr>
+          <a:xfrm>
+            <a:off x="8119872" y="1691640"/>
+            <a:ext cx="713232" cy="256032"/>
+          </a:xfrm>
+          <a:prstGeom prst="rect">
+            <a:avLst/>
+          </a:prstGeom>
+          <a:noFill/>
+          <a:ln/>
+        </p:spPr>
+        <p:txBody>
+          <a:bodyPr wrap="square" lIns="0" tIns="0" rIns="0" bIns="0" rtlCol="0" anchor="ctr"/>
+          <a:lstStyle/>
+          <a:p>
+            <a:pPr algn="ctr" indent="0" marL="0">
+              <a:buNone/>
+            </a:pPr>
+            <a:r>
+              <a:rPr lang="en-US" sz="750" b="1" dirty="0">
+                <a:solidFill>
+                  <a:srgbClr val="FFFFFF"/>
+                </a:solidFill>
+                <a:latin typeface="Calibri" pitchFamily="34" charset="0"/>
+                <a:ea typeface="Calibri" pitchFamily="34" charset="-122"/>
+                <a:cs typeface="Calibri" pitchFamily="34" charset="-120"/>
+              </a:rPr>
+              <a:t>HIGH</a:t>
+            </a:r>
+            <a:endParaRPr lang="en-US" sz="750" dirty="0"/>
+          </a:p>
+        </p:txBody>
+      </p:sp>
+      <p:sp>
+        <p:nvSpPr>
+          <p:cNvPr id="14" name="Text 12"/>
+          <p:cNvSpPr/>
+          <p:nvPr/>
+        </p:nvSpPr>
+        <p:spPr>
+          <a:xfrm>
+            <a:off x="530352" y="1563624"/>
+            <a:ext cx="7406640" cy="237744"/>
           </a:xfrm>
           <a:prstGeom prst="rect">
             <a:avLst/>
@@ -7378,30 +6332,30 @@
               <a:buNone/>
             </a:pPr>
             <a:r>
-              <a:rPr lang="en-US" sz="850" dirty="0">
-                <a:solidFill>
-                  <a:srgbClr val="64748B"/>
-                </a:solidFill>
-                <a:latin typeface="Calibri" pitchFamily="34" charset="0"/>
-                <a:ea typeface="Calibri" pitchFamily="34" charset="-122"/>
-                <a:cs typeface="Calibri" pitchFamily="34" charset="-120"/>
-              </a:rPr>
-              <a:t>Dividend Payout</a:t>
-            </a:r>
-            <a:endParaRPr lang="en-US" sz="850" dirty="0"/>
-          </a:p>
-        </p:txBody>
-      </p:sp>
-      <p:sp>
-        <p:nvSpPr>
-          <p:cNvPr id="10" name="Text 8"/>
-          <p:cNvSpPr/>
-          <p:nvPr/>
-        </p:nvSpPr>
-        <p:spPr>
-          <a:xfrm>
-            <a:off x="2633472" y="987552"/>
-            <a:ext cx="1755648" cy="347472"/>
+              <a:rPr lang="en-US" sz="1100" b="1" dirty="0">
+                <a:solidFill>
+                  <a:srgbClr val="0F172A"/>
+                </a:solidFill>
+                <a:latin typeface="Calibri" pitchFamily="34" charset="0"/>
+                <a:ea typeface="Calibri" pitchFamily="34" charset="-122"/>
+                <a:cs typeface="Calibri" pitchFamily="34" charset="-120"/>
+              </a:rPr>
+              <a:t>2. Government Divestment / PSU Discount</a:t>
+            </a:r>
+            <a:endParaRPr lang="en-US" sz="1100" dirty="0"/>
+          </a:p>
+        </p:txBody>
+      </p:sp>
+      <p:sp>
+        <p:nvSpPr>
+          <p:cNvPr id="15" name="Text 13"/>
+          <p:cNvSpPr/>
+          <p:nvPr/>
+        </p:nvSpPr>
+        <p:spPr>
+          <a:xfrm>
+            <a:off x="530352" y="1837944"/>
+            <a:ext cx="7406640" cy="347472"/>
           </a:xfrm>
           <a:prstGeom prst="rect">
             <a:avLst/>
@@ -7417,69 +6371,30 @@
               <a:buNone/>
             </a:pPr>
             <a:r>
-              <a:rPr lang="en-US" sz="1800" b="1" dirty="0">
-                <a:solidFill>
-                  <a:srgbClr val="1C2B5E"/>
-                </a:solidFill>
-                <a:latin typeface="Calibri" pitchFamily="34" charset="0"/>
-                <a:ea typeface="Calibri" pitchFamily="34" charset="-122"/>
-                <a:cs typeface="Calibri" pitchFamily="34" charset="-120"/>
-              </a:rPr>
-              <a:t>45.1%</a:t>
-            </a:r>
-            <a:endParaRPr lang="en-US" sz="1800" dirty="0"/>
-          </a:p>
-        </p:txBody>
-      </p:sp>
-      <p:sp>
-        <p:nvSpPr>
-          <p:cNvPr id="11" name="Text 9"/>
-          <p:cNvSpPr/>
-          <p:nvPr/>
-        </p:nvSpPr>
-        <p:spPr>
-          <a:xfrm>
-            <a:off x="2633472" y="1335024"/>
-            <a:ext cx="1755648" cy="164592"/>
-          </a:xfrm>
-          <a:prstGeom prst="rect">
-            <a:avLst/>
-          </a:prstGeom>
-          <a:noFill/>
-          <a:ln/>
-        </p:spPr>
-        <p:txBody>
-          <a:bodyPr wrap="square" lIns="0" tIns="0" rIns="0" bIns="0" rtlCol="0" anchor="ctr"/>
-          <a:lstStyle/>
-          <a:p>
-            <a:pPr indent="0" marL="0">
-              <a:buNone/>
-            </a:pPr>
-            <a:r>
-              <a:rPr lang="en-US" sz="800" dirty="0">
-                <a:solidFill>
-                  <a:srgbClr val="64748B"/>
-                </a:solidFill>
-                <a:latin typeface="Calibri" pitchFamily="34" charset="0"/>
-                <a:ea typeface="Calibri" pitchFamily="34" charset="-122"/>
-                <a:cs typeface="Calibri" pitchFamily="34" charset="-120"/>
-              </a:rPr>
-              <a:t>INR 15.5/share FY2026</a:t>
-            </a:r>
-            <a:endParaRPr lang="en-US" sz="800" dirty="0"/>
-          </a:p>
-        </p:txBody>
-      </p:sp>
-      <p:sp>
-        <p:nvSpPr>
-          <p:cNvPr id="12" name="Shape 10"/>
-          <p:cNvSpPr/>
-          <p:nvPr/>
-        </p:nvSpPr>
-        <p:spPr>
-          <a:xfrm>
-            <a:off x="4663440" y="658368"/>
-            <a:ext cx="2029968" cy="987552"/>
+              <a:rPr lang="en-US" sz="950" dirty="0">
+                <a:solidFill>
+                  <a:srgbClr val="334155"/>
+                </a:solidFill>
+                <a:latin typeface="Calibri" pitchFamily="34" charset="0"/>
+                <a:ea typeface="Calibri" pitchFamily="34" charset="-122"/>
+                <a:cs typeface="Calibri" pitchFamily="34" charset="-120"/>
+              </a:rPr>
+              <a:t>INR 8,800Cr planned stake sale creates supply overhang. PSU governance discount (no independent management, ministry directives) depresses valuation permanently vs. private peers.</a:t>
+            </a:r>
+            <a:endParaRPr lang="en-US" sz="950" dirty="0"/>
+          </a:p>
+        </p:txBody>
+      </p:sp>
+      <p:sp>
+        <p:nvSpPr>
+          <p:cNvPr id="16" name="Shape 14"/>
+          <p:cNvSpPr/>
+          <p:nvPr/>
+        </p:nvSpPr>
+        <p:spPr>
+          <a:xfrm>
+            <a:off x="274320" y="2359152"/>
+            <a:ext cx="8595360" cy="786384"/>
           </a:xfrm>
           <a:prstGeom prst="rect">
             <a:avLst/>
@@ -7487,12 +6402,7 @@
           <a:solidFill>
             <a:srgbClr val="FFFFFF"/>
           </a:solidFill>
-          <a:ln w="12700">
-            <a:solidFill>
-              <a:srgbClr val="D6E4FF"/>
-            </a:solidFill>
-            <a:prstDash val="solid"/>
-          </a:ln>
+          <a:ln/>
           <a:effectLst>
             <a:outerShdw sx="100000" sy="100000" kx="0" ky="0" algn="bl" rotWithShape="0" blurRad="101600" dist="38100" dir="8100000">
               <a:srgbClr val="000000">
@@ -7504,14 +6414,93 @@
       </p:sp>
       <p:sp>
         <p:nvSpPr>
-          <p:cNvPr id="13" name="Text 11"/>
-          <p:cNvSpPr/>
-          <p:nvPr/>
-        </p:nvSpPr>
-        <p:spPr>
-          <a:xfrm>
-            <a:off x="4828032" y="786384"/>
-            <a:ext cx="1755648" cy="201168"/>
+          <p:cNvPr id="17" name="Shape 15"/>
+          <p:cNvSpPr/>
+          <p:nvPr/>
+        </p:nvSpPr>
+        <p:spPr>
+          <a:xfrm>
+            <a:off x="274320" y="2359152"/>
+            <a:ext cx="164592" cy="786384"/>
+          </a:xfrm>
+          <a:prstGeom prst="rect">
+            <a:avLst/>
+          </a:prstGeom>
+          <a:solidFill>
+            <a:srgbClr val="D97706"/>
+          </a:solidFill>
+          <a:ln/>
+        </p:spPr>
+      </p:sp>
+      <p:sp>
+        <p:nvSpPr>
+          <p:cNvPr id="18" name="Shape 16"/>
+          <p:cNvSpPr/>
+          <p:nvPr/>
+        </p:nvSpPr>
+        <p:spPr>
+          <a:xfrm>
+            <a:off x="8119872" y="2560320"/>
+            <a:ext cx="713232" cy="256032"/>
+          </a:xfrm>
+          <a:prstGeom prst="rect">
+            <a:avLst/>
+          </a:prstGeom>
+          <a:solidFill>
+            <a:srgbClr val="D97706"/>
+          </a:solidFill>
+          <a:ln/>
+        </p:spPr>
+      </p:sp>
+      <p:sp>
+        <p:nvSpPr>
+          <p:cNvPr id="19" name="Text 17"/>
+          <p:cNvSpPr/>
+          <p:nvPr/>
+        </p:nvSpPr>
+        <p:spPr>
+          <a:xfrm>
+            <a:off x="8119872" y="2560320"/>
+            <a:ext cx="713232" cy="256032"/>
+          </a:xfrm>
+          <a:prstGeom prst="rect">
+            <a:avLst/>
+          </a:prstGeom>
+          <a:noFill/>
+          <a:ln/>
+        </p:spPr>
+        <p:txBody>
+          <a:bodyPr wrap="square" lIns="0" tIns="0" rIns="0" bIns="0" rtlCol="0" anchor="ctr"/>
+          <a:lstStyle/>
+          <a:p>
+            <a:pPr algn="ctr" indent="0" marL="0">
+              <a:buNone/>
+            </a:pPr>
+            <a:r>
+              <a:rPr lang="en-US" sz="750" b="1" dirty="0">
+                <a:solidFill>
+                  <a:srgbClr val="FFFFFF"/>
+                </a:solidFill>
+                <a:latin typeface="Calibri" pitchFamily="34" charset="0"/>
+                <a:ea typeface="Calibri" pitchFamily="34" charset="-122"/>
+                <a:cs typeface="Calibri" pitchFamily="34" charset="-120"/>
+              </a:rPr>
+              <a:t>MEDIUM</a:t>
+            </a:r>
+            <a:endParaRPr lang="en-US" sz="750" dirty="0"/>
+          </a:p>
+        </p:txBody>
+      </p:sp>
+      <p:sp>
+        <p:nvSpPr>
+          <p:cNvPr id="20" name="Text 18"/>
+          <p:cNvSpPr/>
+          <p:nvPr/>
+        </p:nvSpPr>
+        <p:spPr>
+          <a:xfrm>
+            <a:off x="530352" y="2432304"/>
+            <a:ext cx="7406640" cy="237744"/>
           </a:xfrm>
           <a:prstGeom prst="rect">
             <a:avLst/>
@@ -7527,30 +6516,30 @@
               <a:buNone/>
             </a:pPr>
             <a:r>
-              <a:rPr lang="en-US" sz="850" dirty="0">
-                <a:solidFill>
-                  <a:srgbClr val="64748B"/>
-                </a:solidFill>
-                <a:latin typeface="Calibri" pitchFamily="34" charset="0"/>
-                <a:ea typeface="Calibri" pitchFamily="34" charset="-122"/>
-                <a:cs typeface="Calibri" pitchFamily="34" charset="-120"/>
-              </a:rPr>
-              <a:t>Govt Divestment</a:t>
-            </a:r>
-            <a:endParaRPr lang="en-US" sz="850" dirty="0"/>
-          </a:p>
-        </p:txBody>
-      </p:sp>
-      <p:sp>
-        <p:nvSpPr>
-          <p:cNvPr id="14" name="Text 12"/>
-          <p:cNvSpPr/>
-          <p:nvPr/>
-        </p:nvSpPr>
-        <p:spPr>
-          <a:xfrm>
-            <a:off x="4828032" y="987552"/>
-            <a:ext cx="1755648" cy="347472"/>
+              <a:rPr lang="en-US" sz="1100" b="1" dirty="0">
+                <a:solidFill>
+                  <a:srgbClr val="0F172A"/>
+                </a:solidFill>
+                <a:latin typeface="Calibri" pitchFamily="34" charset="0"/>
+                <a:ea typeface="Calibri" pitchFamily="34" charset="-122"/>
+                <a:cs typeface="Calibri" pitchFamily="34" charset="-120"/>
+              </a:rPr>
+              <a:t>3. E-Auction Price Compression</a:t>
+            </a:r>
+            <a:endParaRPr lang="en-US" sz="1100" dirty="0"/>
+          </a:p>
+        </p:txBody>
+      </p:sp>
+      <p:sp>
+        <p:nvSpPr>
+          <p:cNvPr id="21" name="Text 19"/>
+          <p:cNvSpPr/>
+          <p:nvPr/>
+        </p:nvSpPr>
+        <p:spPr>
+          <a:xfrm>
+            <a:off x="530352" y="2706624"/>
+            <a:ext cx="7406640" cy="347472"/>
           </a:xfrm>
           <a:prstGeom prst="rect">
             <a:avLst/>
@@ -7566,69 +6555,30 @@
               <a:buNone/>
             </a:pPr>
             <a:r>
-              <a:rPr lang="en-US" sz="1800" b="1" dirty="0">
-                <a:solidFill>
-                  <a:srgbClr val="D97706"/>
-                </a:solidFill>
-                <a:latin typeface="Calibri" pitchFamily="34" charset="0"/>
-                <a:ea typeface="Calibri" pitchFamily="34" charset="-122"/>
-                <a:cs typeface="Calibri" pitchFamily="34" charset="-120"/>
-              </a:rPr>
-              <a:t>INR 8,800Cr</a:t>
-            </a:r>
-            <a:endParaRPr lang="en-US" sz="1800" dirty="0"/>
-          </a:p>
-        </p:txBody>
-      </p:sp>
-      <p:sp>
-        <p:nvSpPr>
-          <p:cNvPr id="15" name="Text 13"/>
-          <p:cNvSpPr/>
-          <p:nvPr/>
-        </p:nvSpPr>
-        <p:spPr>
-          <a:xfrm>
-            <a:off x="4828032" y="1335024"/>
-            <a:ext cx="1755648" cy="164592"/>
-          </a:xfrm>
-          <a:prstGeom prst="rect">
-            <a:avLst/>
-          </a:prstGeom>
-          <a:noFill/>
-          <a:ln/>
-        </p:spPr>
-        <p:txBody>
-          <a:bodyPr wrap="square" lIns="0" tIns="0" rIns="0" bIns="0" rtlCol="0" anchor="ctr"/>
-          <a:lstStyle/>
-          <a:p>
-            <a:pPr indent="0" marL="0">
-              <a:buNone/>
-            </a:pPr>
-            <a:r>
-              <a:rPr lang="en-US" sz="800" dirty="0">
-                <a:solidFill>
-                  <a:srgbClr val="64748B"/>
-                </a:solidFill>
-                <a:latin typeface="Calibri" pitchFamily="34" charset="0"/>
-                <a:ea typeface="Calibri" pitchFamily="34" charset="-122"/>
-                <a:cs typeface="Calibri" pitchFamily="34" charset="-120"/>
-              </a:rPr>
-              <a:t>Planned stake sale risk</a:t>
-            </a:r>
-            <a:endParaRPr lang="en-US" sz="800" dirty="0"/>
-          </a:p>
-        </p:txBody>
-      </p:sp>
-      <p:sp>
-        <p:nvSpPr>
-          <p:cNvPr id="16" name="Shape 14"/>
-          <p:cNvSpPr/>
-          <p:nvPr/>
-        </p:nvSpPr>
-        <p:spPr>
-          <a:xfrm>
-            <a:off x="6858000" y="658368"/>
-            <a:ext cx="2029968" cy="987552"/>
+              <a:rPr lang="en-US" sz="950" dirty="0">
+                <a:solidFill>
+                  <a:srgbClr val="334155"/>
+                </a:solidFill>
+                <a:latin typeface="Calibri" pitchFamily="34" charset="0"/>
+                <a:ea typeface="Calibri" pitchFamily="34" charset="-122"/>
+                <a:cs typeface="Calibri" pitchFamily="34" charset="-120"/>
+              </a:rPr>
+              <a:t>E-auction premiums compressing as global coal prices soften. Operating margin fell from 32.5% (FY2024) to 18.5% (FY2026) — this trend could continue if global prices stay soft.</a:t>
+            </a:r>
+            <a:endParaRPr lang="en-US" sz="950" dirty="0"/>
+          </a:p>
+        </p:txBody>
+      </p:sp>
+      <p:sp>
+        <p:nvSpPr>
+          <p:cNvPr id="22" name="Shape 20"/>
+          <p:cNvSpPr/>
+          <p:nvPr/>
+        </p:nvSpPr>
+        <p:spPr>
+          <a:xfrm>
+            <a:off x="274320" y="3227832"/>
+            <a:ext cx="8595360" cy="786384"/>
           </a:xfrm>
           <a:prstGeom prst="rect">
             <a:avLst/>
@@ -7636,12 +6586,7 @@
           <a:solidFill>
             <a:srgbClr val="FFFFFF"/>
           </a:solidFill>
-          <a:ln w="12700">
-            <a:solidFill>
-              <a:srgbClr val="D6E4FF"/>
-            </a:solidFill>
-            <a:prstDash val="solid"/>
-          </a:ln>
+          <a:ln/>
           <a:effectLst>
             <a:outerShdw sx="100000" sy="100000" kx="0" ky="0" algn="bl" rotWithShape="0" blurRad="101600" dist="38100" dir="8100000">
               <a:srgbClr val="000000">
@@ -7653,14 +6598,93 @@
       </p:sp>
       <p:sp>
         <p:nvSpPr>
-          <p:cNvPr id="17" name="Text 15"/>
-          <p:cNvSpPr/>
-          <p:nvPr/>
-        </p:nvSpPr>
-        <p:spPr>
-          <a:xfrm>
-            <a:off x="7022592" y="786384"/>
-            <a:ext cx="1755648" cy="201168"/>
+          <p:cNvPr id="23" name="Shape 21"/>
+          <p:cNvSpPr/>
+          <p:nvPr/>
+        </p:nvSpPr>
+        <p:spPr>
+          <a:xfrm>
+            <a:off x="274320" y="3227832"/>
+            <a:ext cx="164592" cy="786384"/>
+          </a:xfrm>
+          <a:prstGeom prst="rect">
+            <a:avLst/>
+          </a:prstGeom>
+          <a:solidFill>
+            <a:srgbClr val="D97706"/>
+          </a:solidFill>
+          <a:ln/>
+        </p:spPr>
+      </p:sp>
+      <p:sp>
+        <p:nvSpPr>
+          <p:cNvPr id="24" name="Shape 22"/>
+          <p:cNvSpPr/>
+          <p:nvPr/>
+        </p:nvSpPr>
+        <p:spPr>
+          <a:xfrm>
+            <a:off x="8119872" y="3429000"/>
+            <a:ext cx="713232" cy="256032"/>
+          </a:xfrm>
+          <a:prstGeom prst="rect">
+            <a:avLst/>
+          </a:prstGeom>
+          <a:solidFill>
+            <a:srgbClr val="D97706"/>
+          </a:solidFill>
+          <a:ln/>
+        </p:spPr>
+      </p:sp>
+      <p:sp>
+        <p:nvSpPr>
+          <p:cNvPr id="25" name="Text 23"/>
+          <p:cNvSpPr/>
+          <p:nvPr/>
+        </p:nvSpPr>
+        <p:spPr>
+          <a:xfrm>
+            <a:off x="8119872" y="3429000"/>
+            <a:ext cx="713232" cy="256032"/>
+          </a:xfrm>
+          <a:prstGeom prst="rect">
+            <a:avLst/>
+          </a:prstGeom>
+          <a:noFill/>
+          <a:ln/>
+        </p:spPr>
+        <p:txBody>
+          <a:bodyPr wrap="square" lIns="0" tIns="0" rIns="0" bIns="0" rtlCol="0" anchor="ctr"/>
+          <a:lstStyle/>
+          <a:p>
+            <a:pPr algn="ctr" indent="0" marL="0">
+              <a:buNone/>
+            </a:pPr>
+            <a:r>
+              <a:rPr lang="en-US" sz="750" b="1" dirty="0">
+                <a:solidFill>
+                  <a:srgbClr val="FFFFFF"/>
+                </a:solidFill>
+                <a:latin typeface="Calibri" pitchFamily="34" charset="0"/>
+                <a:ea typeface="Calibri" pitchFamily="34" charset="-122"/>
+                <a:cs typeface="Calibri" pitchFamily="34" charset="-120"/>
+              </a:rPr>
+              <a:t>MEDIUM</a:t>
+            </a:r>
+            <a:endParaRPr lang="en-US" sz="750" dirty="0"/>
+          </a:p>
+        </p:txBody>
+      </p:sp>
+      <p:sp>
+        <p:nvSpPr>
+          <p:cNvPr id="26" name="Text 24"/>
+          <p:cNvSpPr/>
+          <p:nvPr/>
+        </p:nvSpPr>
+        <p:spPr>
+          <a:xfrm>
+            <a:off x="530352" y="3300984"/>
+            <a:ext cx="7406640" cy="237744"/>
           </a:xfrm>
           <a:prstGeom prst="rect">
             <a:avLst/>
@@ -7676,30 +6700,30 @@
               <a:buNone/>
             </a:pPr>
             <a:r>
-              <a:rPr lang="en-US" sz="850" dirty="0">
-                <a:solidFill>
-                  <a:srgbClr val="64748B"/>
-                </a:solidFill>
-                <a:latin typeface="Calibri" pitchFamily="34" charset="0"/>
-                <a:ea typeface="Calibri" pitchFamily="34" charset="-122"/>
-                <a:cs typeface="Calibri" pitchFamily="34" charset="-120"/>
-              </a:rPr>
-              <a:t>ROCE</a:t>
-            </a:r>
-            <a:endParaRPr lang="en-US" sz="850" dirty="0"/>
-          </a:p>
-        </p:txBody>
-      </p:sp>
-      <p:sp>
-        <p:nvSpPr>
-          <p:cNvPr id="18" name="Text 16"/>
-          <p:cNvSpPr/>
-          <p:nvPr/>
-        </p:nvSpPr>
-        <p:spPr>
-          <a:xfrm>
-            <a:off x="7022592" y="987552"/>
-            <a:ext cx="1755648" cy="347472"/>
+              <a:rPr lang="en-US" sz="1100" b="1" dirty="0">
+                <a:solidFill>
+                  <a:srgbClr val="0F172A"/>
+                </a:solidFill>
+                <a:latin typeface="Calibri" pitchFamily="34" charset="0"/>
+                <a:ea typeface="Calibri" pitchFamily="34" charset="-122"/>
+                <a:cs typeface="Calibri" pitchFamily="34" charset="-120"/>
+              </a:rPr>
+              <a:t>4. Wage &amp; Cost Inflation</a:t>
+            </a:r>
+            <a:endParaRPr lang="en-US" sz="1100" dirty="0"/>
+          </a:p>
+        </p:txBody>
+      </p:sp>
+      <p:sp>
+        <p:nvSpPr>
+          <p:cNvPr id="27" name="Text 25"/>
+          <p:cNvSpPr/>
+          <p:nvPr/>
+        </p:nvSpPr>
+        <p:spPr>
+          <a:xfrm>
+            <a:off x="530352" y="3575304"/>
+            <a:ext cx="7406640" cy="347472"/>
           </a:xfrm>
           <a:prstGeom prst="rect">
             <a:avLst/>
@@ -7715,69 +6739,30 @@
               <a:buNone/>
             </a:pPr>
             <a:r>
-              <a:rPr lang="en-US" sz="1800" b="1" dirty="0">
-                <a:solidFill>
-                  <a:srgbClr val="059669"/>
-                </a:solidFill>
-                <a:latin typeface="Calibri" pitchFamily="34" charset="0"/>
-                <a:ea typeface="Calibri" pitchFamily="34" charset="-122"/>
-                <a:cs typeface="Calibri" pitchFamily="34" charset="-120"/>
-              </a:rPr>
-              <a:t>35.3%</a:t>
-            </a:r>
-            <a:endParaRPr lang="en-US" sz="1800" dirty="0"/>
-          </a:p>
-        </p:txBody>
-      </p:sp>
-      <p:sp>
-        <p:nvSpPr>
-          <p:cNvPr id="19" name="Text 17"/>
-          <p:cNvSpPr/>
-          <p:nvPr/>
-        </p:nvSpPr>
-        <p:spPr>
-          <a:xfrm>
-            <a:off x="7022592" y="1335024"/>
-            <a:ext cx="1755648" cy="164592"/>
-          </a:xfrm>
-          <a:prstGeom prst="rect">
-            <a:avLst/>
-          </a:prstGeom>
-          <a:noFill/>
-          <a:ln/>
-        </p:spPr>
-        <p:txBody>
-          <a:bodyPr wrap="square" lIns="0" tIns="0" rIns="0" bIns="0" rtlCol="0" anchor="ctr"/>
-          <a:lstStyle/>
-          <a:p>
-            <a:pPr indent="0" marL="0">
-              <a:buNone/>
-            </a:pPr>
-            <a:r>
-              <a:rPr lang="en-US" sz="800" dirty="0">
-                <a:solidFill>
-                  <a:srgbClr val="64748B"/>
-                </a:solidFill>
-                <a:latin typeface="Calibri" pitchFamily="34" charset="0"/>
-                <a:ea typeface="Calibri" pitchFamily="34" charset="-122"/>
-                <a:cs typeface="Calibri" pitchFamily="34" charset="-120"/>
-              </a:rPr>
-              <a:t>Exceptional for mining</a:t>
-            </a:r>
-            <a:endParaRPr lang="en-US" sz="800" dirty="0"/>
-          </a:p>
-        </p:txBody>
-      </p:sp>
-      <p:sp>
-        <p:nvSpPr>
-          <p:cNvPr id="20" name="Shape 18"/>
-          <p:cNvSpPr/>
-          <p:nvPr/>
-        </p:nvSpPr>
-        <p:spPr>
-          <a:xfrm>
-            <a:off x="274320" y="1792224"/>
-            <a:ext cx="8595360" cy="777240"/>
+              <a:rPr lang="en-US" sz="950" dirty="0">
+                <a:solidFill>
+                  <a:srgbClr val="334155"/>
+                </a:solidFill>
+                <a:latin typeface="Calibri" pitchFamily="34" charset="0"/>
+                <a:ea typeface="Calibri" pitchFamily="34" charset="-122"/>
+                <a:cs typeface="Calibri" pitchFamily="34" charset="-120"/>
+              </a:rPr>
+              <a:t>240,000+ employees. Court-mandated FY2026 pay hike added INR 1,458Cr. Structural wage inflation partially outside management control — erodes fixed-cost leverage.</a:t>
+            </a:r>
+            <a:endParaRPr lang="en-US" sz="950" dirty="0"/>
+          </a:p>
+        </p:txBody>
+      </p:sp>
+      <p:sp>
+        <p:nvSpPr>
+          <p:cNvPr id="28" name="Shape 26"/>
+          <p:cNvSpPr/>
+          <p:nvPr/>
+        </p:nvSpPr>
+        <p:spPr>
+          <a:xfrm>
+            <a:off x="274320" y="4096512"/>
+            <a:ext cx="8595360" cy="786384"/>
           </a:xfrm>
           <a:prstGeom prst="rect">
             <a:avLst/>
@@ -7797,14 +6782,93 @@
       </p:sp>
       <p:sp>
         <p:nvSpPr>
-          <p:cNvPr id="21" name="Text 19"/>
-          <p:cNvSpPr/>
-          <p:nvPr/>
-        </p:nvSpPr>
-        <p:spPr>
-          <a:xfrm>
-            <a:off x="457200" y="1883664"/>
-            <a:ext cx="3657600" cy="201168"/>
+          <p:cNvPr id="29" name="Shape 27"/>
+          <p:cNvSpPr/>
+          <p:nvPr/>
+        </p:nvSpPr>
+        <p:spPr>
+          <a:xfrm>
+            <a:off x="274320" y="4096512"/>
+            <a:ext cx="164592" cy="786384"/>
+          </a:xfrm>
+          <a:prstGeom prst="rect">
+            <a:avLst/>
+          </a:prstGeom>
+          <a:solidFill>
+            <a:srgbClr val="059669"/>
+          </a:solidFill>
+          <a:ln/>
+        </p:spPr>
+      </p:sp>
+      <p:sp>
+        <p:nvSpPr>
+          <p:cNvPr id="30" name="Shape 28"/>
+          <p:cNvSpPr/>
+          <p:nvPr/>
+        </p:nvSpPr>
+        <p:spPr>
+          <a:xfrm>
+            <a:off x="8119872" y="4297680"/>
+            <a:ext cx="713232" cy="256032"/>
+          </a:xfrm>
+          <a:prstGeom prst="rect">
+            <a:avLst/>
+          </a:prstGeom>
+          <a:solidFill>
+            <a:srgbClr val="059669"/>
+          </a:solidFill>
+          <a:ln/>
+        </p:spPr>
+      </p:sp>
+      <p:sp>
+        <p:nvSpPr>
+          <p:cNvPr id="31" name="Text 29"/>
+          <p:cNvSpPr/>
+          <p:nvPr/>
+        </p:nvSpPr>
+        <p:spPr>
+          <a:xfrm>
+            <a:off x="8119872" y="4297680"/>
+            <a:ext cx="713232" cy="256032"/>
+          </a:xfrm>
+          <a:prstGeom prst="rect">
+            <a:avLst/>
+          </a:prstGeom>
+          <a:noFill/>
+          <a:ln/>
+        </p:spPr>
+        <p:txBody>
+          <a:bodyPr wrap="square" lIns="0" tIns="0" rIns="0" bIns="0" rtlCol="0" anchor="ctr"/>
+          <a:lstStyle/>
+          <a:p>
+            <a:pPr algn="ctr" indent="0" marL="0">
+              <a:buNone/>
+            </a:pPr>
+            <a:r>
+              <a:rPr lang="en-US" sz="750" b="1" dirty="0">
+                <a:solidFill>
+                  <a:srgbClr val="FFFFFF"/>
+                </a:solidFill>
+                <a:latin typeface="Calibri" pitchFamily="34" charset="0"/>
+                <a:ea typeface="Calibri" pitchFamily="34" charset="-122"/>
+                <a:cs typeface="Calibri" pitchFamily="34" charset="-120"/>
+              </a:rPr>
+              <a:t>LOW</a:t>
+            </a:r>
+            <a:endParaRPr lang="en-US" sz="750" dirty="0"/>
+          </a:p>
+        </p:txBody>
+      </p:sp>
+      <p:sp>
+        <p:nvSpPr>
+          <p:cNvPr id="32" name="Text 30"/>
+          <p:cNvSpPr/>
+          <p:nvPr/>
+        </p:nvSpPr>
+        <p:spPr>
+          <a:xfrm>
+            <a:off x="530352" y="4169664"/>
+            <a:ext cx="7406640" cy="237744"/>
           </a:xfrm>
           <a:prstGeom prst="rect">
             <a:avLst/>
@@ -7820,30 +6884,30 @@
               <a:buNone/>
             </a:pPr>
             <a:r>
-              <a:rPr lang="en-US" sz="900" b="1" spc="200" kern="0" dirty="0">
-                <a:solidFill>
-                  <a:srgbClr val="2D5BE3"/>
-                </a:solidFill>
-                <a:latin typeface="Calibri" pitchFamily="34" charset="0"/>
-                <a:ea typeface="Calibri" pitchFamily="34" charset="-122"/>
-                <a:cs typeface="Calibri" pitchFamily="34" charset="-120"/>
-              </a:rPr>
-              <a:t>CAPITAL ALLOCATION</a:t>
-            </a:r>
-            <a:endParaRPr lang="en-US" sz="900" dirty="0"/>
-          </a:p>
-        </p:txBody>
-      </p:sp>
-      <p:sp>
-        <p:nvSpPr>
-          <p:cNvPr id="22" name="Text 20"/>
-          <p:cNvSpPr/>
-          <p:nvPr/>
-        </p:nvSpPr>
-        <p:spPr>
-          <a:xfrm>
-            <a:off x="457200" y="2103120"/>
-            <a:ext cx="8229600" cy="384048"/>
+              <a:rPr lang="en-US" sz="1100" b="1" dirty="0">
+                <a:solidFill>
+                  <a:srgbClr val="0F172A"/>
+                </a:solidFill>
+                <a:latin typeface="Calibri" pitchFamily="34" charset="0"/>
+                <a:ea typeface="Calibri" pitchFamily="34" charset="-122"/>
+                <a:cs typeface="Calibri" pitchFamily="34" charset="-120"/>
+              </a:rPr>
+              <a:t>5. Production Volume Shortfalls</a:t>
+            </a:r>
+            <a:endParaRPr lang="en-US" sz="1100" dirty="0"/>
+          </a:p>
+        </p:txBody>
+      </p:sp>
+      <p:sp>
+        <p:nvSpPr>
+          <p:cNvPr id="33" name="Text 31"/>
+          <p:cNvSpPr/>
+          <p:nvPr/>
+        </p:nvSpPr>
+        <p:spPr>
+          <a:xfrm>
+            <a:off x="530352" y="4443984"/>
+            <a:ext cx="7406640" cy="347472"/>
           </a:xfrm>
           <a:prstGeom prst="rect">
             <a:avLst/>
@@ -7859,717 +6923,23 @@
               <a:buNone/>
             </a:pPr>
             <a:r>
-              <a:rPr lang="en-US" sz="1100" dirty="0">
-                <a:solidFill>
-                  <a:srgbClr val="0F172A"/>
-                </a:solidFill>
-                <a:latin typeface="Calibri" pitchFamily="34" charset="0"/>
-                <a:ea typeface="Calibri" pitchFamily="34" charset="-122"/>
-                <a:cs typeface="Calibri" pitchFamily="34" charset="-120"/>
-              </a:rPr>
-              <a:t>Strong dividend payout — 45.1% payout ratio, INR 15.5/share total FY2026. Zero debt. Consistent capital return to shareholders across all cycles.</a:t>
-            </a:r>
-            <a:endParaRPr lang="en-US" sz="1100" dirty="0"/>
-          </a:p>
-        </p:txBody>
-      </p:sp>
-      <p:sp>
-        <p:nvSpPr>
-          <p:cNvPr id="23" name="Shape 21"/>
-          <p:cNvSpPr/>
-          <p:nvPr/>
-        </p:nvSpPr>
-        <p:spPr>
-          <a:xfrm>
-            <a:off x="274320" y="2706624"/>
-            <a:ext cx="2029968" cy="987552"/>
-          </a:xfrm>
-          <a:prstGeom prst="rect">
-            <a:avLst/>
-          </a:prstGeom>
-          <a:solidFill>
-            <a:srgbClr val="FFFFFF"/>
-          </a:solidFill>
-          <a:ln w="12700">
-            <a:solidFill>
-              <a:srgbClr val="D6E4FF"/>
-            </a:solidFill>
-            <a:prstDash val="solid"/>
-          </a:ln>
-          <a:effectLst>
-            <a:outerShdw sx="100000" sy="100000" kx="0" ky="0" algn="bl" rotWithShape="0" blurRad="101600" dist="38100" dir="8100000">
-              <a:srgbClr val="000000">
-                <a:alpha val="10000"/>
-              </a:srgbClr>
-            </a:outerShdw>
-          </a:effectLst>
-        </p:spPr>
-      </p:sp>
-      <p:sp>
-        <p:nvSpPr>
-          <p:cNvPr id="24" name="Text 22"/>
-          <p:cNvSpPr/>
-          <p:nvPr/>
-        </p:nvSpPr>
-        <p:spPr>
-          <a:xfrm>
-            <a:off x="438912" y="2834640"/>
-            <a:ext cx="1755648" cy="201168"/>
-          </a:xfrm>
-          <a:prstGeom prst="rect">
-            <a:avLst/>
-          </a:prstGeom>
-          <a:noFill/>
-          <a:ln/>
-        </p:spPr>
-        <p:txBody>
-          <a:bodyPr wrap="square" lIns="0" tIns="0" rIns="0" bIns="0" rtlCol="0" anchor="ctr"/>
-          <a:lstStyle/>
-          <a:p>
-            <a:pPr indent="0" marL="0">
-              <a:buNone/>
-            </a:pPr>
-            <a:r>
-              <a:rPr lang="en-US" sz="850" dirty="0">
-                <a:solidFill>
-                  <a:srgbClr val="64748B"/>
-                </a:solidFill>
-                <a:latin typeface="Calibri" pitchFamily="34" charset="0"/>
-                <a:ea typeface="Calibri" pitchFamily="34" charset="-122"/>
-                <a:cs typeface="Calibri" pitchFamily="34" charset="-120"/>
-              </a:rPr>
-              <a:t>Net Debt / EBITDA</a:t>
-            </a:r>
-            <a:endParaRPr lang="en-US" sz="850" dirty="0"/>
-          </a:p>
-        </p:txBody>
-      </p:sp>
-      <p:sp>
-        <p:nvSpPr>
-          <p:cNvPr id="25" name="Text 23"/>
-          <p:cNvSpPr/>
-          <p:nvPr/>
-        </p:nvSpPr>
-        <p:spPr>
-          <a:xfrm>
-            <a:off x="438912" y="3035808"/>
-            <a:ext cx="1755648" cy="347472"/>
-          </a:xfrm>
-          <a:prstGeom prst="rect">
-            <a:avLst/>
-          </a:prstGeom>
-          <a:noFill/>
-          <a:ln/>
-        </p:spPr>
-        <p:txBody>
-          <a:bodyPr wrap="square" lIns="0" tIns="0" rIns="0" bIns="0" rtlCol="0" anchor="ctr"/>
-          <a:lstStyle/>
-          <a:p>
-            <a:pPr indent="0" marL="0">
-              <a:buNone/>
-            </a:pPr>
-            <a:r>
-              <a:rPr lang="en-US" sz="1800" b="1" dirty="0">
-                <a:solidFill>
-                  <a:srgbClr val="059669"/>
-                </a:solidFill>
-                <a:latin typeface="Calibri" pitchFamily="34" charset="0"/>
-                <a:ea typeface="Calibri" pitchFamily="34" charset="-122"/>
-                <a:cs typeface="Calibri" pitchFamily="34" charset="-120"/>
-              </a:rPr>
-              <a:t>0.1x</a:t>
-            </a:r>
-            <a:endParaRPr lang="en-US" sz="1800" dirty="0"/>
-          </a:p>
-        </p:txBody>
-      </p:sp>
-      <p:sp>
-        <p:nvSpPr>
-          <p:cNvPr id="26" name="Text 24"/>
-          <p:cNvSpPr/>
-          <p:nvPr/>
-        </p:nvSpPr>
-        <p:spPr>
-          <a:xfrm>
-            <a:off x="438912" y="3383280"/>
-            <a:ext cx="1755648" cy="164592"/>
-          </a:xfrm>
-          <a:prstGeom prst="rect">
-            <a:avLst/>
-          </a:prstGeom>
-          <a:noFill/>
-          <a:ln/>
-        </p:spPr>
-        <p:txBody>
-          <a:bodyPr wrap="square" lIns="0" tIns="0" rIns="0" bIns="0" rtlCol="0" anchor="ctr"/>
-          <a:lstStyle/>
-          <a:p>
-            <a:pPr indent="0" marL="0">
-              <a:buNone/>
-            </a:pPr>
-            <a:r>
-              <a:rPr lang="en-US" sz="800" dirty="0">
-                <a:solidFill>
-                  <a:srgbClr val="64748B"/>
-                </a:solidFill>
-                <a:latin typeface="Calibri" pitchFamily="34" charset="0"/>
-                <a:ea typeface="Calibri" pitchFamily="34" charset="-122"/>
-                <a:cs typeface="Calibri" pitchFamily="34" charset="-120"/>
-              </a:rPr>
-              <a:t>Safe zone: &lt;2x</a:t>
-            </a:r>
-            <a:endParaRPr lang="en-US" sz="800" dirty="0"/>
-          </a:p>
-        </p:txBody>
-      </p:sp>
-      <p:sp>
-        <p:nvSpPr>
-          <p:cNvPr id="27" name="Shape 25"/>
-          <p:cNvSpPr/>
-          <p:nvPr/>
-        </p:nvSpPr>
-        <p:spPr>
-          <a:xfrm>
-            <a:off x="2468880" y="2706624"/>
-            <a:ext cx="2029968" cy="987552"/>
-          </a:xfrm>
-          <a:prstGeom prst="rect">
-            <a:avLst/>
-          </a:prstGeom>
-          <a:solidFill>
-            <a:srgbClr val="FFFFFF"/>
-          </a:solidFill>
-          <a:ln w="12700">
-            <a:solidFill>
-              <a:srgbClr val="D6E4FF"/>
-            </a:solidFill>
-            <a:prstDash val="solid"/>
-          </a:ln>
-          <a:effectLst>
-            <a:outerShdw sx="100000" sy="100000" kx="0" ky="0" algn="bl" rotWithShape="0" blurRad="101600" dist="38100" dir="8100000">
-              <a:srgbClr val="000000">
-                <a:alpha val="10000"/>
-              </a:srgbClr>
-            </a:outerShdw>
-          </a:effectLst>
-        </p:spPr>
-      </p:sp>
-      <p:sp>
-        <p:nvSpPr>
-          <p:cNvPr id="28" name="Text 26"/>
-          <p:cNvSpPr/>
-          <p:nvPr/>
-        </p:nvSpPr>
-        <p:spPr>
-          <a:xfrm>
-            <a:off x="2633472" y="2834640"/>
-            <a:ext cx="1755648" cy="201168"/>
-          </a:xfrm>
-          <a:prstGeom prst="rect">
-            <a:avLst/>
-          </a:prstGeom>
-          <a:noFill/>
-          <a:ln/>
-        </p:spPr>
-        <p:txBody>
-          <a:bodyPr wrap="square" lIns="0" tIns="0" rIns="0" bIns="0" rtlCol="0" anchor="ctr"/>
-          <a:lstStyle/>
-          <a:p>
-            <a:pPr indent="0" marL="0">
-              <a:buNone/>
-            </a:pPr>
-            <a:r>
-              <a:rPr lang="en-US" sz="850" dirty="0">
-                <a:solidFill>
-                  <a:srgbClr val="64748B"/>
-                </a:solidFill>
-                <a:latin typeface="Calibri" pitchFamily="34" charset="0"/>
-                <a:ea typeface="Calibri" pitchFamily="34" charset="-122"/>
-                <a:cs typeface="Calibri" pitchFamily="34" charset="-120"/>
-              </a:rPr>
-              <a:t>Interest Coverage</a:t>
-            </a:r>
-            <a:endParaRPr lang="en-US" sz="850" dirty="0"/>
-          </a:p>
-        </p:txBody>
-      </p:sp>
-      <p:sp>
-        <p:nvSpPr>
-          <p:cNvPr id="29" name="Text 27"/>
-          <p:cNvSpPr/>
-          <p:nvPr/>
-        </p:nvSpPr>
-        <p:spPr>
-          <a:xfrm>
-            <a:off x="2633472" y="3035808"/>
-            <a:ext cx="1755648" cy="347472"/>
-          </a:xfrm>
-          <a:prstGeom prst="rect">
-            <a:avLst/>
-          </a:prstGeom>
-          <a:noFill/>
-          <a:ln/>
-        </p:spPr>
-        <p:txBody>
-          <a:bodyPr wrap="square" lIns="0" tIns="0" rIns="0" bIns="0" rtlCol="0" anchor="ctr"/>
-          <a:lstStyle/>
-          <a:p>
-            <a:pPr indent="0" marL="0">
-              <a:buNone/>
-            </a:pPr>
-            <a:r>
-              <a:rPr lang="en-US" sz="1800" b="1" dirty="0">
-                <a:solidFill>
-                  <a:srgbClr val="059669"/>
-                </a:solidFill>
-                <a:latin typeface="Calibri" pitchFamily="34" charset="0"/>
-                <a:ea typeface="Calibri" pitchFamily="34" charset="-122"/>
-                <a:cs typeface="Calibri" pitchFamily="34" charset="-120"/>
-              </a:rPr>
-              <a:t>35.5x</a:t>
-            </a:r>
-            <a:endParaRPr lang="en-US" sz="1800" dirty="0"/>
-          </a:p>
-        </p:txBody>
-      </p:sp>
-      <p:sp>
-        <p:nvSpPr>
-          <p:cNvPr id="30" name="Text 28"/>
-          <p:cNvSpPr/>
-          <p:nvPr/>
-        </p:nvSpPr>
-        <p:spPr>
-          <a:xfrm>
-            <a:off x="2633472" y="3383280"/>
-            <a:ext cx="1755648" cy="164592"/>
-          </a:xfrm>
-          <a:prstGeom prst="rect">
-            <a:avLst/>
-          </a:prstGeom>
-          <a:noFill/>
-          <a:ln/>
-        </p:spPr>
-        <p:txBody>
-          <a:bodyPr wrap="square" lIns="0" tIns="0" rIns="0" bIns="0" rtlCol="0" anchor="ctr"/>
-          <a:lstStyle/>
-          <a:p>
-            <a:pPr indent="0" marL="0">
-              <a:buNone/>
-            </a:pPr>
-            <a:r>
-              <a:rPr lang="en-US" sz="800" dirty="0">
-                <a:solidFill>
-                  <a:srgbClr val="64748B"/>
-                </a:solidFill>
-                <a:latin typeface="Calibri" pitchFamily="34" charset="0"/>
-                <a:ea typeface="Calibri" pitchFamily="34" charset="-122"/>
-                <a:cs typeface="Calibri" pitchFamily="34" charset="-120"/>
-              </a:rPr>
-              <a:t>Safe zone: &gt;5x</a:t>
-            </a:r>
-            <a:endParaRPr lang="en-US" sz="800" dirty="0"/>
-          </a:p>
-        </p:txBody>
-      </p:sp>
-      <p:sp>
-        <p:nvSpPr>
-          <p:cNvPr id="31" name="Shape 29"/>
-          <p:cNvSpPr/>
-          <p:nvPr/>
-        </p:nvSpPr>
-        <p:spPr>
-          <a:xfrm>
-            <a:off x="4663440" y="2706624"/>
-            <a:ext cx="2029968" cy="987552"/>
-          </a:xfrm>
-          <a:prstGeom prst="rect">
-            <a:avLst/>
-          </a:prstGeom>
-          <a:solidFill>
-            <a:srgbClr val="FFFFFF"/>
-          </a:solidFill>
-          <a:ln w="12700">
-            <a:solidFill>
-              <a:srgbClr val="D6E4FF"/>
-            </a:solidFill>
-            <a:prstDash val="solid"/>
-          </a:ln>
-          <a:effectLst>
-            <a:outerShdw sx="100000" sy="100000" kx="0" ky="0" algn="bl" rotWithShape="0" blurRad="101600" dist="38100" dir="8100000">
-              <a:srgbClr val="000000">
-                <a:alpha val="10000"/>
-              </a:srgbClr>
-            </a:outerShdw>
-          </a:effectLst>
-        </p:spPr>
-      </p:sp>
-      <p:sp>
-        <p:nvSpPr>
-          <p:cNvPr id="32" name="Text 30"/>
-          <p:cNvSpPr/>
-          <p:nvPr/>
-        </p:nvSpPr>
-        <p:spPr>
-          <a:xfrm>
-            <a:off x="4828032" y="2834640"/>
-            <a:ext cx="1755648" cy="201168"/>
-          </a:xfrm>
-          <a:prstGeom prst="rect">
-            <a:avLst/>
-          </a:prstGeom>
-          <a:noFill/>
-          <a:ln/>
-        </p:spPr>
-        <p:txBody>
-          <a:bodyPr wrap="square" lIns="0" tIns="0" rIns="0" bIns="0" rtlCol="0" anchor="ctr"/>
-          <a:lstStyle/>
-          <a:p>
-            <a:pPr indent="0" marL="0">
-              <a:buNone/>
-            </a:pPr>
-            <a:r>
-              <a:rPr lang="en-US" sz="850" dirty="0">
-                <a:solidFill>
-                  <a:srgbClr val="64748B"/>
-                </a:solidFill>
-                <a:latin typeface="Calibri" pitchFamily="34" charset="0"/>
-                <a:ea typeface="Calibri" pitchFamily="34" charset="-122"/>
-                <a:cs typeface="Calibri" pitchFamily="34" charset="-120"/>
-              </a:rPr>
-              <a:t>Current Ratio</a:t>
-            </a:r>
-            <a:endParaRPr lang="en-US" sz="850" dirty="0"/>
-          </a:p>
-        </p:txBody>
-      </p:sp>
-      <p:sp>
-        <p:nvSpPr>
-          <p:cNvPr id="33" name="Text 31"/>
-          <p:cNvSpPr/>
-          <p:nvPr/>
-        </p:nvSpPr>
-        <p:spPr>
-          <a:xfrm>
-            <a:off x="4828032" y="3035808"/>
-            <a:ext cx="1755648" cy="347472"/>
-          </a:xfrm>
-          <a:prstGeom prst="rect">
-            <a:avLst/>
-          </a:prstGeom>
-          <a:noFill/>
-          <a:ln/>
-        </p:spPr>
-        <p:txBody>
-          <a:bodyPr wrap="square" lIns="0" tIns="0" rIns="0" bIns="0" rtlCol="0" anchor="ctr"/>
-          <a:lstStyle/>
-          <a:p>
-            <a:pPr indent="0" marL="0">
-              <a:buNone/>
-            </a:pPr>
-            <a:r>
-              <a:rPr lang="en-US" sz="1800" b="1" dirty="0">
-                <a:solidFill>
-                  <a:srgbClr val="059669"/>
-                </a:solidFill>
-                <a:latin typeface="Calibri" pitchFamily="34" charset="0"/>
-                <a:ea typeface="Calibri" pitchFamily="34" charset="-122"/>
-                <a:cs typeface="Calibri" pitchFamily="34" charset="-120"/>
-              </a:rPr>
-              <a:t>~1.8x</a:t>
-            </a:r>
-            <a:endParaRPr lang="en-US" sz="1800" dirty="0"/>
+              <a:rPr lang="en-US" sz="950" dirty="0">
+                <a:solidFill>
+                  <a:srgbClr val="334155"/>
+                </a:solidFill>
+                <a:latin typeface="Calibri" pitchFamily="34" charset="0"/>
+                <a:ea typeface="Calibri" pitchFamily="34" charset="-122"/>
+                <a:cs typeface="Calibri" pitchFamily="34" charset="-120"/>
+              </a:rPr>
+              <a:t>CIL has historically missed production targets. 810MT FY2028 guidance requires sustained 5% volume CAGR. If power demand disappoints or renewables scale faster, this risks a miss.</a:t>
+            </a:r>
+            <a:endParaRPr lang="en-US" sz="950" dirty="0"/>
           </a:p>
         </p:txBody>
       </p:sp>
       <p:sp>
         <p:nvSpPr>
           <p:cNvPr id="34" name="Text 32"/>
-          <p:cNvSpPr/>
-          <p:nvPr/>
-        </p:nvSpPr>
-        <p:spPr>
-          <a:xfrm>
-            <a:off x="4828032" y="3383280"/>
-            <a:ext cx="1755648" cy="164592"/>
-          </a:xfrm>
-          <a:prstGeom prst="rect">
-            <a:avLst/>
-          </a:prstGeom>
-          <a:noFill/>
-          <a:ln/>
-        </p:spPr>
-        <p:txBody>
-          <a:bodyPr wrap="square" lIns="0" tIns="0" rIns="0" bIns="0" rtlCol="0" anchor="ctr"/>
-          <a:lstStyle/>
-          <a:p>
-            <a:pPr indent="0" marL="0">
-              <a:buNone/>
-            </a:pPr>
-            <a:r>
-              <a:rPr lang="en-US" sz="800" dirty="0">
-                <a:solidFill>
-                  <a:srgbClr val="64748B"/>
-                </a:solidFill>
-                <a:latin typeface="Calibri" pitchFamily="34" charset="0"/>
-                <a:ea typeface="Calibri" pitchFamily="34" charset="-122"/>
-                <a:cs typeface="Calibri" pitchFamily="34" charset="-120"/>
-              </a:rPr>
-              <a:t>Safe zone: &gt;1.5x</a:t>
-            </a:r>
-            <a:endParaRPr lang="en-US" sz="800" dirty="0"/>
-          </a:p>
-        </p:txBody>
-      </p:sp>
-      <p:sp>
-        <p:nvSpPr>
-          <p:cNvPr id="35" name="Shape 33"/>
-          <p:cNvSpPr/>
-          <p:nvPr/>
-        </p:nvSpPr>
-        <p:spPr>
-          <a:xfrm>
-            <a:off x="6858000" y="2706624"/>
-            <a:ext cx="2029968" cy="987552"/>
-          </a:xfrm>
-          <a:prstGeom prst="rect">
-            <a:avLst/>
-          </a:prstGeom>
-          <a:solidFill>
-            <a:srgbClr val="FFFFFF"/>
-          </a:solidFill>
-          <a:ln w="12700">
-            <a:solidFill>
-              <a:srgbClr val="D6E4FF"/>
-            </a:solidFill>
-            <a:prstDash val="solid"/>
-          </a:ln>
-          <a:effectLst>
-            <a:outerShdw sx="100000" sy="100000" kx="0" ky="0" algn="bl" rotWithShape="0" blurRad="101600" dist="38100" dir="8100000">
-              <a:srgbClr val="000000">
-                <a:alpha val="10000"/>
-              </a:srgbClr>
-            </a:outerShdw>
-          </a:effectLst>
-        </p:spPr>
-      </p:sp>
-      <p:sp>
-        <p:nvSpPr>
-          <p:cNvPr id="36" name="Text 34"/>
-          <p:cNvSpPr/>
-          <p:nvPr/>
-        </p:nvSpPr>
-        <p:spPr>
-          <a:xfrm>
-            <a:off x="7022592" y="2834640"/>
-            <a:ext cx="1755648" cy="201168"/>
-          </a:xfrm>
-          <a:prstGeom prst="rect">
-            <a:avLst/>
-          </a:prstGeom>
-          <a:noFill/>
-          <a:ln/>
-        </p:spPr>
-        <p:txBody>
-          <a:bodyPr wrap="square" lIns="0" tIns="0" rIns="0" bIns="0" rtlCol="0" anchor="ctr"/>
-          <a:lstStyle/>
-          <a:p>
-            <a:pPr indent="0" marL="0">
-              <a:buNone/>
-            </a:pPr>
-            <a:r>
-              <a:rPr lang="en-US" sz="850" dirty="0">
-                <a:solidFill>
-                  <a:srgbClr val="64748B"/>
-                </a:solidFill>
-                <a:latin typeface="Calibri" pitchFamily="34" charset="0"/>
-                <a:ea typeface="Calibri" pitchFamily="34" charset="-122"/>
-                <a:cs typeface="Calibri" pitchFamily="34" charset="-120"/>
-              </a:rPr>
-              <a:t>Goodwill / Assets</a:t>
-            </a:r>
-            <a:endParaRPr lang="en-US" sz="850" dirty="0"/>
-          </a:p>
-        </p:txBody>
-      </p:sp>
-      <p:sp>
-        <p:nvSpPr>
-          <p:cNvPr id="37" name="Text 35"/>
-          <p:cNvSpPr/>
-          <p:nvPr/>
-        </p:nvSpPr>
-        <p:spPr>
-          <a:xfrm>
-            <a:off x="7022592" y="3035808"/>
-            <a:ext cx="1755648" cy="347472"/>
-          </a:xfrm>
-          <a:prstGeom prst="rect">
-            <a:avLst/>
-          </a:prstGeom>
-          <a:noFill/>
-          <a:ln/>
-        </p:spPr>
-        <p:txBody>
-          <a:bodyPr wrap="square" lIns="0" tIns="0" rIns="0" bIns="0" rtlCol="0" anchor="ctr"/>
-          <a:lstStyle/>
-          <a:p>
-            <a:pPr indent="0" marL="0">
-              <a:buNone/>
-            </a:pPr>
-            <a:r>
-              <a:rPr lang="en-US" sz="1800" b="1" dirty="0">
-                <a:solidFill>
-                  <a:srgbClr val="059669"/>
-                </a:solidFill>
-                <a:latin typeface="Calibri" pitchFamily="34" charset="0"/>
-                <a:ea typeface="Calibri" pitchFamily="34" charset="-122"/>
-                <a:cs typeface="Calibri" pitchFamily="34" charset="-120"/>
-              </a:rPr>
-              <a:t>~0%</a:t>
-            </a:r>
-            <a:endParaRPr lang="en-US" sz="1800" dirty="0"/>
-          </a:p>
-        </p:txBody>
-      </p:sp>
-      <p:sp>
-        <p:nvSpPr>
-          <p:cNvPr id="38" name="Text 36"/>
-          <p:cNvSpPr/>
-          <p:nvPr/>
-        </p:nvSpPr>
-        <p:spPr>
-          <a:xfrm>
-            <a:off x="7022592" y="3383280"/>
-            <a:ext cx="1755648" cy="164592"/>
-          </a:xfrm>
-          <a:prstGeom prst="rect">
-            <a:avLst/>
-          </a:prstGeom>
-          <a:noFill/>
-          <a:ln/>
-        </p:spPr>
-        <p:txBody>
-          <a:bodyPr wrap="square" lIns="0" tIns="0" rIns="0" bIns="0" rtlCol="0" anchor="ctr"/>
-          <a:lstStyle/>
-          <a:p>
-            <a:pPr indent="0" marL="0">
-              <a:buNone/>
-            </a:pPr>
-            <a:r>
-              <a:rPr lang="en-US" sz="800" dirty="0">
-                <a:solidFill>
-                  <a:srgbClr val="64748B"/>
-                </a:solidFill>
-                <a:latin typeface="Calibri" pitchFamily="34" charset="0"/>
-                <a:ea typeface="Calibri" pitchFamily="34" charset="-122"/>
-                <a:cs typeface="Calibri" pitchFamily="34" charset="-120"/>
-              </a:rPr>
-              <a:t>No acquisition risk</a:t>
-            </a:r>
-            <a:endParaRPr lang="en-US" sz="800" dirty="0"/>
-          </a:p>
-        </p:txBody>
-      </p:sp>
-      <p:sp>
-        <p:nvSpPr>
-          <p:cNvPr id="39" name="Shape 37"/>
-          <p:cNvSpPr/>
-          <p:nvPr/>
-        </p:nvSpPr>
-        <p:spPr>
-          <a:xfrm>
-            <a:off x="274320" y="3822192"/>
-            <a:ext cx="8595360" cy="1051560"/>
-          </a:xfrm>
-          <a:prstGeom prst="rect">
-            <a:avLst/>
-          </a:prstGeom>
-          <a:solidFill>
-            <a:srgbClr val="1C2B5E"/>
-          </a:solidFill>
-          <a:ln/>
-        </p:spPr>
-      </p:sp>
-      <p:sp>
-        <p:nvSpPr>
-          <p:cNvPr id="40" name="Text 38"/>
-          <p:cNvSpPr/>
-          <p:nvPr/>
-        </p:nvSpPr>
-        <p:spPr>
-          <a:xfrm>
-            <a:off x="457200" y="3913632"/>
-            <a:ext cx="8229600" cy="201168"/>
-          </a:xfrm>
-          <a:prstGeom prst="rect">
-            <a:avLst/>
-          </a:prstGeom>
-          <a:noFill/>
-          <a:ln/>
-        </p:spPr>
-        <p:txBody>
-          <a:bodyPr wrap="square" lIns="0" tIns="0" rIns="0" bIns="0" rtlCol="0" anchor="ctr"/>
-          <a:lstStyle/>
-          <a:p>
-            <a:pPr indent="0" marL="0">
-              <a:buNone/>
-            </a:pPr>
-            <a:r>
-              <a:rPr lang="en-US" sz="900" b="1" spc="200" kern="0" dirty="0">
-                <a:solidFill>
-                  <a:srgbClr val="059669"/>
-                </a:solidFill>
-                <a:latin typeface="Calibri" pitchFamily="34" charset="0"/>
-                <a:ea typeface="Calibri" pitchFamily="34" charset="-122"/>
-                <a:cs typeface="Calibri" pitchFamily="34" charset="-120"/>
-              </a:rPr>
-              <a:t>BALANCE SHEET VERDICT: PRISTINE</a:t>
-            </a:r>
-            <a:endParaRPr lang="en-US" sz="900" dirty="0"/>
-          </a:p>
-        </p:txBody>
-      </p:sp>
-      <p:sp>
-        <p:nvSpPr>
-          <p:cNvPr id="41" name="Text 39"/>
-          <p:cNvSpPr/>
-          <p:nvPr/>
-        </p:nvSpPr>
-        <p:spPr>
-          <a:xfrm>
-            <a:off x="457200" y="4133088"/>
-            <a:ext cx="8229600" cy="621792"/>
-          </a:xfrm>
-          <a:prstGeom prst="rect">
-            <a:avLst/>
-          </a:prstGeom>
-          <a:noFill/>
-          <a:ln/>
-        </p:spPr>
-        <p:txBody>
-          <a:bodyPr wrap="square" lIns="0" tIns="0" rIns="0" bIns="0" rtlCol="0" anchor="ctr"/>
-          <a:lstStyle/>
-          <a:p>
-            <a:pPr indent="0" marL="0">
-              <a:buNone/>
-            </a:pPr>
-            <a:r>
-              <a:rPr lang="en-US" sz="1050" dirty="0">
-                <a:solidFill>
-                  <a:srgbClr val="FFFFFF"/>
-                </a:solidFill>
-                <a:latin typeface="Calibri" pitchFamily="34" charset="0"/>
-                <a:ea typeface="Calibri" pitchFamily="34" charset="-122"/>
-                <a:cs typeface="Calibri" pitchFamily="34" charset="-120"/>
-              </a:rPr>
-              <a:t>No material near-term debt maturities. Balance sheet is pristine with near-zero leverage. Self-funds all capex from operating cash flows.</a:t>
-            </a:r>
-            <a:endParaRPr lang="en-US" sz="1050" dirty="0"/>
-          </a:p>
-        </p:txBody>
-      </p:sp>
-      <p:sp>
-        <p:nvSpPr>
-          <p:cNvPr id="42" name="Text 40"/>
           <p:cNvSpPr/>
           <p:nvPr/>
         </p:nvSpPr>
@@ -8691,136 +7061,46 @@
                 <a:ea typeface="Calibri" pitchFamily="34" charset="-122"/>
                 <a:cs typeface="Calibri" pitchFamily="34" charset="-120"/>
               </a:rPr>
-              <a:t>VALUATION — Cheap for a reason, but how cheap is too cheap?</a:t>
+              <a:t>VALUATION — Cheap for a reason, but asymmetric risk/reward</a:t>
             </a:r>
             <a:endParaRPr lang="en-US" sz="1300" dirty="0"/>
           </a:p>
         </p:txBody>
       </p:sp>
-      <p:sp>
-        <p:nvSpPr>
-          <p:cNvPr id="4" name="Text 2"/>
-          <p:cNvSpPr/>
-          <p:nvPr/>
-        </p:nvSpPr>
-        <p:spPr>
-          <a:xfrm>
-            <a:off x="274320" y="594360"/>
-            <a:ext cx="4572000" cy="219456"/>
-          </a:xfrm>
-          <a:prstGeom prst="rect">
-            <a:avLst/>
-          </a:prstGeom>
-          <a:noFill/>
-          <a:ln/>
-        </p:spPr>
-        <p:txBody>
-          <a:bodyPr wrap="square" lIns="0" tIns="0" rIns="0" bIns="0" rtlCol="0" anchor="ctr"/>
-          <a:lstStyle/>
-          <a:p>
-            <a:pPr indent="0" marL="0">
-              <a:buNone/>
-            </a:pPr>
-            <a:r>
-              <a:rPr lang="en-US" sz="1000" b="1" dirty="0">
-                <a:solidFill>
-                  <a:srgbClr val="334155"/>
-                </a:solidFill>
-                <a:latin typeface="Calibri" pitchFamily="34" charset="0"/>
-                <a:ea typeface="Calibri" pitchFamily="34" charset="-122"/>
-                <a:cs typeface="Calibri" pitchFamily="34" charset="-120"/>
-              </a:rPr>
-              <a:t>DCF Scenarios vs. Current Price (INR)</a:t>
-            </a:r>
-            <a:endParaRPr lang="en-US" sz="1000" dirty="0"/>
-          </a:p>
-        </p:txBody>
-      </p:sp>
-      <p:graphicFrame>
-        <p:nvGraphicFramePr>
-          <p:cNvPr id="5" name="Chart 0" descr=""/>
-          <p:cNvGraphicFramePr/>
-          <p:nvPr/>
-        </p:nvGraphicFramePr>
-        <p:xfrm>
-          <a:off x="274320" y="822960"/>
-          <a:ext cx="4389120" cy="2743200"/>
-        </p:xfrm>
-        <a:graphic xmlns:a="http://schemas.openxmlformats.org/drawingml/2006/main">
-          <a:graphicData uri="http://schemas.openxmlformats.org/drawingml/2006/chart">
-            <c:chart xmlns:c="http://schemas.openxmlformats.org/drawingml/2006/chart" r:id="rId1"/>
-          </a:graphicData>
-        </a:graphic>
-      </p:graphicFrame>
-      <p:sp>
-        <p:nvSpPr>
-          <p:cNvPr id="6" name="Shape 3"/>
-          <p:cNvSpPr/>
-          <p:nvPr/>
-        </p:nvSpPr>
-        <p:spPr>
-          <a:xfrm>
-            <a:off x="274320" y="3657600"/>
-            <a:ext cx="4389120" cy="36576"/>
-          </a:xfrm>
-          <a:prstGeom prst="rect">
-            <a:avLst/>
-          </a:prstGeom>
-          <a:solidFill>
-            <a:srgbClr val="D97706"/>
-          </a:solidFill>
-          <a:ln/>
-        </p:spPr>
-      </p:sp>
-      <p:sp>
-        <p:nvSpPr>
-          <p:cNvPr id="7" name="Text 4"/>
-          <p:cNvSpPr/>
-          <p:nvPr/>
-        </p:nvSpPr>
-        <p:spPr>
-          <a:xfrm>
-            <a:off x="274320" y="3694176"/>
-            <a:ext cx="4389120" cy="201168"/>
-          </a:xfrm>
-          <a:prstGeom prst="rect">
-            <a:avLst/>
-          </a:prstGeom>
-          <a:noFill/>
-          <a:ln/>
-        </p:spPr>
-        <p:txBody>
-          <a:bodyPr wrap="square" lIns="0" tIns="0" rIns="0" bIns="0" rtlCol="0" anchor="ctr"/>
-          <a:lstStyle/>
-          <a:p>
-            <a:pPr algn="ctr" indent="0" marL="0">
-              <a:buNone/>
-            </a:pPr>
-            <a:r>
-              <a:rPr lang="en-US" sz="850" b="1" dirty="0">
-                <a:solidFill>
-                  <a:srgbClr val="D97706"/>
-                </a:solidFill>
-                <a:latin typeface="Calibri" pitchFamily="34" charset="0"/>
-                <a:ea typeface="Calibri" pitchFamily="34" charset="-122"/>
-                <a:cs typeface="Calibri" pitchFamily="34" charset="-120"/>
-              </a:rPr>
-              <a:t>Current Price: INR 466  (above bear, below base)</a:t>
-            </a:r>
-            <a:endParaRPr lang="en-US" sz="850" dirty="0"/>
-          </a:p>
-        </p:txBody>
-      </p:sp>
-      <p:sp>
-        <p:nvSpPr>
-          <p:cNvPr id="8" name="Shape 5"/>
-          <p:cNvSpPr/>
-          <p:nvPr/>
-        </p:nvSpPr>
-        <p:spPr>
-          <a:xfrm>
-            <a:off x="4846320" y="658368"/>
-            <a:ext cx="1371600" cy="3200400"/>
+      <p:pic>
+        <p:nvPicPr>
+          <p:cNvPr id="4" name="Image 0" descr="preencoded.png">    </p:cNvPr>
+          <p:cNvPicPr>
+            <a:picLocks noChangeAspect="1"/>
+          </p:cNvPicPr>
+          <p:nvPr/>
+        </p:nvPicPr>
+        <p:blipFill>
+          <a:blip r:embed="rId1"/>
+          <a:stretch>
+            <a:fillRect/>
+          </a:stretch>
+        </p:blipFill>
+        <p:spPr>
+          <a:xfrm>
+            <a:off x="256032" y="594360"/>
+            <a:ext cx="4572000" cy="2926080"/>
+          </a:xfrm>
+          <a:prstGeom prst="rect">
+            <a:avLst/>
+          </a:prstGeom>
+        </p:spPr>
+      </p:pic>
+      <p:sp>
+        <p:nvSpPr>
+          <p:cNvPr id="5" name="Shape 2"/>
+          <p:cNvSpPr/>
+          <p:nvPr/>
+        </p:nvSpPr>
+        <p:spPr>
+          <a:xfrm>
+            <a:off x="5010912" y="658368"/>
+            <a:ext cx="1335024" cy="2907792"/>
           </a:xfrm>
           <a:prstGeom prst="rect">
             <a:avLst/>
@@ -8845,14 +7125,14 @@
       </p:sp>
       <p:sp>
         <p:nvSpPr>
-          <p:cNvPr id="9" name="Shape 6"/>
-          <p:cNvSpPr/>
-          <p:nvPr/>
-        </p:nvSpPr>
-        <p:spPr>
-          <a:xfrm>
-            <a:off x="4846320" y="658368"/>
-            <a:ext cx="1371600" cy="347472"/>
+          <p:cNvPr id="6" name="Shape 3"/>
+          <p:cNvSpPr/>
+          <p:nvPr/>
+        </p:nvSpPr>
+        <p:spPr>
+          <a:xfrm>
+            <a:off x="5010912" y="658368"/>
+            <a:ext cx="1335024" cy="329184"/>
           </a:xfrm>
           <a:prstGeom prst="rect">
             <a:avLst/>
@@ -8865,14 +7145,131 @@
       </p:sp>
       <p:sp>
         <p:nvSpPr>
+          <p:cNvPr id="7" name="Text 4"/>
+          <p:cNvSpPr/>
+          <p:nvPr/>
+        </p:nvSpPr>
+        <p:spPr>
+          <a:xfrm>
+            <a:off x="5047488" y="676656"/>
+            <a:ext cx="1261872" cy="292608"/>
+          </a:xfrm>
+          <a:prstGeom prst="rect">
+            <a:avLst/>
+          </a:prstGeom>
+          <a:noFill/>
+          <a:ln/>
+        </p:spPr>
+        <p:txBody>
+          <a:bodyPr wrap="square" lIns="0" tIns="0" rIns="0" bIns="0" rtlCol="0" anchor="ctr"/>
+          <a:lstStyle/>
+          <a:p>
+            <a:pPr algn="ctr" indent="0" marL="0">
+              <a:buNone/>
+            </a:pPr>
+            <a:r>
+              <a:rPr lang="en-US" sz="1400" b="1" dirty="0">
+                <a:solidFill>
+                  <a:srgbClr val="FFFFFF"/>
+                </a:solidFill>
+                <a:latin typeface="Calibri" pitchFamily="34" charset="0"/>
+                <a:ea typeface="Calibri" pitchFamily="34" charset="-122"/>
+                <a:cs typeface="Calibri" pitchFamily="34" charset="-120"/>
+              </a:rPr>
+              <a:t>Bear</a:t>
+            </a:r>
+            <a:endParaRPr lang="en-US" sz="1400" dirty="0"/>
+          </a:p>
+        </p:txBody>
+      </p:sp>
+      <p:sp>
+        <p:nvSpPr>
+          <p:cNvPr id="8" name="Text 5"/>
+          <p:cNvSpPr/>
+          <p:nvPr/>
+        </p:nvSpPr>
+        <p:spPr>
+          <a:xfrm>
+            <a:off x="5047488" y="1078992"/>
+            <a:ext cx="1261872" cy="182880"/>
+          </a:xfrm>
+          <a:prstGeom prst="rect">
+            <a:avLst/>
+          </a:prstGeom>
+          <a:noFill/>
+          <a:ln/>
+        </p:spPr>
+        <p:txBody>
+          <a:bodyPr wrap="square" lIns="0" tIns="0" rIns="0" bIns="0" rtlCol="0" anchor="ctr"/>
+          <a:lstStyle/>
+          <a:p>
+            <a:pPr algn="ctr" indent="0" marL="0">
+              <a:buNone/>
+            </a:pPr>
+            <a:r>
+              <a:rPr lang="en-US" sz="750" dirty="0">
+                <a:solidFill>
+                  <a:srgbClr val="64748B"/>
+                </a:solidFill>
+                <a:latin typeface="Calibri" pitchFamily="34" charset="0"/>
+                <a:ea typeface="Calibri" pitchFamily="34" charset="-122"/>
+                <a:cs typeface="Calibri" pitchFamily="34" charset="-120"/>
+              </a:rPr>
+              <a:t>FCF CAGR</a:t>
+            </a:r>
+            <a:endParaRPr lang="en-US" sz="750" dirty="0"/>
+          </a:p>
+        </p:txBody>
+      </p:sp>
+      <p:sp>
+        <p:nvSpPr>
+          <p:cNvPr id="9" name="Text 6"/>
+          <p:cNvSpPr/>
+          <p:nvPr/>
+        </p:nvSpPr>
+        <p:spPr>
+          <a:xfrm>
+            <a:off x="5047488" y="1243584"/>
+            <a:ext cx="1261872" cy="274320"/>
+          </a:xfrm>
+          <a:prstGeom prst="rect">
+            <a:avLst/>
+          </a:prstGeom>
+          <a:noFill/>
+          <a:ln/>
+        </p:spPr>
+        <p:txBody>
+          <a:bodyPr wrap="square" lIns="0" tIns="0" rIns="0" bIns="0" rtlCol="0" anchor="ctr"/>
+          <a:lstStyle/>
+          <a:p>
+            <a:pPr algn="ctr" indent="0" marL="0">
+              <a:buNone/>
+            </a:pPr>
+            <a:r>
+              <a:rPr lang="en-US" sz="1500" b="1" dirty="0">
+                <a:solidFill>
+                  <a:srgbClr val="DC2626"/>
+                </a:solidFill>
+                <a:latin typeface="Calibri" pitchFamily="34" charset="0"/>
+                <a:ea typeface="Calibri" pitchFamily="34" charset="-122"/>
+                <a:cs typeface="Calibri" pitchFamily="34" charset="-120"/>
+              </a:rPr>
+              <a:t>–2% CAGR</a:t>
+            </a:r>
+            <a:endParaRPr lang="en-US" sz="1500" dirty="0"/>
+          </a:p>
+        </p:txBody>
+      </p:sp>
+      <p:sp>
+        <p:nvSpPr>
           <p:cNvPr id="10" name="Text 7"/>
           <p:cNvSpPr/>
           <p:nvPr/>
         </p:nvSpPr>
         <p:spPr>
           <a:xfrm>
-            <a:off x="4892040" y="676656"/>
-            <a:ext cx="1280160" cy="310896"/>
+            <a:off x="5047488" y="1627632"/>
+            <a:ext cx="1261872" cy="182880"/>
           </a:xfrm>
           <a:prstGeom prst="rect">
             <a:avLst/>
@@ -8888,15 +7285,54 @@
               <a:buNone/>
             </a:pPr>
             <a:r>
+              <a:rPr lang="en-US" sz="750" dirty="0">
+                <a:solidFill>
+                  <a:srgbClr val="64748B"/>
+                </a:solidFill>
+                <a:latin typeface="Calibri" pitchFamily="34" charset="0"/>
+                <a:ea typeface="Calibri" pitchFamily="34" charset="-122"/>
+                <a:cs typeface="Calibri" pitchFamily="34" charset="-120"/>
+              </a:rPr>
+              <a:t>FAIR VALUE</a:t>
+            </a:r>
+            <a:endParaRPr lang="en-US" sz="750" dirty="0"/>
+          </a:p>
+        </p:txBody>
+      </p:sp>
+      <p:sp>
+        <p:nvSpPr>
+          <p:cNvPr id="11" name="Text 8"/>
+          <p:cNvSpPr/>
+          <p:nvPr/>
+        </p:nvSpPr>
+        <p:spPr>
+          <a:xfrm>
+            <a:off x="5047488" y="1792224"/>
+            <a:ext cx="1261872" cy="329184"/>
+          </a:xfrm>
+          <a:prstGeom prst="rect">
+            <a:avLst/>
+          </a:prstGeom>
+          <a:noFill/>
+          <a:ln/>
+        </p:spPr>
+        <p:txBody>
+          <a:bodyPr wrap="square" lIns="0" tIns="0" rIns="0" bIns="0" rtlCol="0" anchor="ctr"/>
+          <a:lstStyle/>
+          <a:p>
+            <a:pPr algn="ctr" indent="0" marL="0">
+              <a:buNone/>
+            </a:pPr>
+            <a:r>
               <a:rPr lang="en-US" sz="1400" b="1" dirty="0">
                 <a:solidFill>
-                  <a:srgbClr val="FFFFFF"/>
-                </a:solidFill>
-                <a:latin typeface="Calibri" pitchFamily="34" charset="0"/>
-                <a:ea typeface="Calibri" pitchFamily="34" charset="-122"/>
-                <a:cs typeface="Calibri" pitchFamily="34" charset="-120"/>
-              </a:rPr>
-              <a:t>Bear</a:t>
+                  <a:srgbClr val="DC2626"/>
+                </a:solidFill>
+                <a:latin typeface="Calibri" pitchFamily="34" charset="0"/>
+                <a:ea typeface="Calibri" pitchFamily="34" charset="-122"/>
+                <a:cs typeface="Calibri" pitchFamily="34" charset="-120"/>
+              </a:rPr>
+              <a:t>INR 388</a:t>
             </a:r>
             <a:endParaRPr lang="en-US" sz="1400" dirty="0"/>
           </a:p>
@@ -8904,14 +7340,14 @@
       </p:sp>
       <p:sp>
         <p:nvSpPr>
-          <p:cNvPr id="11" name="Text 8"/>
-          <p:cNvSpPr/>
-          <p:nvPr/>
-        </p:nvSpPr>
-        <p:spPr>
-          <a:xfrm>
-            <a:off x="4892040" y="1097280"/>
-            <a:ext cx="1280160" cy="182880"/>
+          <p:cNvPr id="12" name="Text 9"/>
+          <p:cNvSpPr/>
+          <p:nvPr/>
+        </p:nvSpPr>
+        <p:spPr>
+          <a:xfrm>
+            <a:off x="5047488" y="2231136"/>
+            <a:ext cx="1261872" cy="182880"/>
           </a:xfrm>
           <a:prstGeom prst="rect">
             <a:avLst/>
@@ -8927,7 +7363,7 @@
               <a:buNone/>
             </a:pPr>
             <a:r>
-              <a:rPr lang="en-US" sz="800" dirty="0">
+              <a:rPr lang="en-US" sz="750" dirty="0">
                 <a:solidFill>
                   <a:srgbClr val="64748B"/>
                 </a:solidFill>
@@ -8935,22 +7371,22 @@
                 <a:ea typeface="Calibri" pitchFamily="34" charset="-122"/>
                 <a:cs typeface="Calibri" pitchFamily="34" charset="-120"/>
               </a:rPr>
-              <a:t>FCF CAGR</a:t>
-            </a:r>
-            <a:endParaRPr lang="en-US" sz="800" dirty="0"/>
-          </a:p>
-        </p:txBody>
-      </p:sp>
-      <p:sp>
-        <p:nvSpPr>
-          <p:cNvPr id="12" name="Text 9"/>
-          <p:cNvSpPr/>
-          <p:nvPr/>
-        </p:nvSpPr>
-        <p:spPr>
-          <a:xfrm>
-            <a:off x="4892040" y="1280160"/>
-            <a:ext cx="1280160" cy="292608"/>
+              <a:t>UPSIDE</a:t>
+            </a:r>
+            <a:endParaRPr lang="en-US" sz="750" dirty="0"/>
+          </a:p>
+        </p:txBody>
+      </p:sp>
+      <p:sp>
+        <p:nvSpPr>
+          <p:cNvPr id="13" name="Text 10"/>
+          <p:cNvSpPr/>
+          <p:nvPr/>
+        </p:nvSpPr>
+        <p:spPr>
+          <a:xfrm>
+            <a:off x="5047488" y="2395728"/>
+            <a:ext cx="1261872" cy="274320"/>
           </a:xfrm>
           <a:prstGeom prst="rect">
             <a:avLst/>
@@ -8966,7 +7402,7 @@
               <a:buNone/>
             </a:pPr>
             <a:r>
-              <a:rPr lang="en-US" sz="1800" b="1" dirty="0">
+              <a:rPr lang="en-US" sz="1600" b="1" dirty="0">
                 <a:solidFill>
                   <a:srgbClr val="DC2626"/>
                 </a:solidFill>
@@ -8974,85 +7410,7 @@
                 <a:ea typeface="Calibri" pitchFamily="34" charset="-122"/>
                 <a:cs typeface="Calibri" pitchFamily="34" charset="-120"/>
               </a:rPr>
-              <a:t>-2%</a:t>
-            </a:r>
-            <a:endParaRPr lang="en-US" sz="1800" dirty="0"/>
-          </a:p>
-        </p:txBody>
-      </p:sp>
-      <p:sp>
-        <p:nvSpPr>
-          <p:cNvPr id="13" name="Text 10"/>
-          <p:cNvSpPr/>
-          <p:nvPr/>
-        </p:nvSpPr>
-        <p:spPr>
-          <a:xfrm>
-            <a:off x="4892040" y="1700784"/>
-            <a:ext cx="1280160" cy="182880"/>
-          </a:xfrm>
-          <a:prstGeom prst="rect">
-            <a:avLst/>
-          </a:prstGeom>
-          <a:noFill/>
-          <a:ln/>
-        </p:spPr>
-        <p:txBody>
-          <a:bodyPr wrap="square" lIns="0" tIns="0" rIns="0" bIns="0" rtlCol="0" anchor="ctr"/>
-          <a:lstStyle/>
-          <a:p>
-            <a:pPr algn="ctr" indent="0" marL="0">
-              <a:buNone/>
-            </a:pPr>
-            <a:r>
-              <a:rPr lang="en-US" sz="800" dirty="0">
-                <a:solidFill>
-                  <a:srgbClr val="64748B"/>
-                </a:solidFill>
-                <a:latin typeface="Calibri" pitchFamily="34" charset="0"/>
-                <a:ea typeface="Calibri" pitchFamily="34" charset="-122"/>
-                <a:cs typeface="Calibri" pitchFamily="34" charset="-120"/>
-              </a:rPr>
-              <a:t>FAIR VALUE</a:t>
-            </a:r>
-            <a:endParaRPr lang="en-US" sz="800" dirty="0"/>
-          </a:p>
-        </p:txBody>
-      </p:sp>
-      <p:sp>
-        <p:nvSpPr>
-          <p:cNvPr id="14" name="Text 11"/>
-          <p:cNvSpPr/>
-          <p:nvPr/>
-        </p:nvSpPr>
-        <p:spPr>
-          <a:xfrm>
-            <a:off x="4892040" y="1883664"/>
-            <a:ext cx="1280160" cy="347472"/>
-          </a:xfrm>
-          <a:prstGeom prst="rect">
-            <a:avLst/>
-          </a:prstGeom>
-          <a:noFill/>
-          <a:ln/>
-        </p:spPr>
-        <p:txBody>
-          <a:bodyPr wrap="square" lIns="0" tIns="0" rIns="0" bIns="0" rtlCol="0" anchor="ctr"/>
-          <a:lstStyle/>
-          <a:p>
-            <a:pPr algn="ctr" indent="0" marL="0">
-              <a:buNone/>
-            </a:pPr>
-            <a:r>
-              <a:rPr lang="en-US" sz="1600" b="1" dirty="0">
-                <a:solidFill>
-                  <a:srgbClr val="DC2626"/>
-                </a:solidFill>
-                <a:latin typeface="Calibri" pitchFamily="34" charset="0"/>
-                <a:ea typeface="Calibri" pitchFamily="34" charset="-122"/>
-                <a:cs typeface="Calibri" pitchFamily="34" charset="-120"/>
-              </a:rPr>
-              <a:t>INR 388</a:t>
+              <a:t>–17%</a:t>
             </a:r>
             <a:endParaRPr lang="en-US" sz="1600" dirty="0"/>
           </a:p>
@@ -9060,92 +7418,14 @@
       </p:sp>
       <p:sp>
         <p:nvSpPr>
-          <p:cNvPr id="15" name="Text 12"/>
-          <p:cNvSpPr/>
-          <p:nvPr/>
-        </p:nvSpPr>
-        <p:spPr>
-          <a:xfrm>
-            <a:off x="4892040" y="2359152"/>
-            <a:ext cx="1280160" cy="182880"/>
-          </a:xfrm>
-          <a:prstGeom prst="rect">
-            <a:avLst/>
-          </a:prstGeom>
-          <a:noFill/>
-          <a:ln/>
-        </p:spPr>
-        <p:txBody>
-          <a:bodyPr wrap="square" lIns="0" tIns="0" rIns="0" bIns="0" rtlCol="0" anchor="ctr"/>
-          <a:lstStyle/>
-          <a:p>
-            <a:pPr algn="ctr" indent="0" marL="0">
-              <a:buNone/>
-            </a:pPr>
-            <a:r>
-              <a:rPr lang="en-US" sz="800" dirty="0">
-                <a:solidFill>
-                  <a:srgbClr val="64748B"/>
-                </a:solidFill>
-                <a:latin typeface="Calibri" pitchFamily="34" charset="0"/>
-                <a:ea typeface="Calibri" pitchFamily="34" charset="-122"/>
-                <a:cs typeface="Calibri" pitchFamily="34" charset="-120"/>
-              </a:rPr>
-              <a:t>UPSIDE</a:t>
-            </a:r>
-            <a:endParaRPr lang="en-US" sz="800" dirty="0"/>
-          </a:p>
-        </p:txBody>
-      </p:sp>
-      <p:sp>
-        <p:nvSpPr>
-          <p:cNvPr id="16" name="Text 13"/>
-          <p:cNvSpPr/>
-          <p:nvPr/>
-        </p:nvSpPr>
-        <p:spPr>
-          <a:xfrm>
-            <a:off x="4892040" y="2542032"/>
-            <a:ext cx="1280160" cy="292608"/>
-          </a:xfrm>
-          <a:prstGeom prst="rect">
-            <a:avLst/>
-          </a:prstGeom>
-          <a:noFill/>
-          <a:ln/>
-        </p:spPr>
-        <p:txBody>
-          <a:bodyPr wrap="square" lIns="0" tIns="0" rIns="0" bIns="0" rtlCol="0" anchor="ctr"/>
-          <a:lstStyle/>
-          <a:p>
-            <a:pPr algn="ctr" indent="0" marL="0">
-              <a:buNone/>
-            </a:pPr>
-            <a:r>
-              <a:rPr lang="en-US" sz="1800" b="1" dirty="0">
-                <a:solidFill>
-                  <a:srgbClr val="DC2626"/>
-                </a:solidFill>
-                <a:latin typeface="Calibri" pitchFamily="34" charset="0"/>
-                <a:ea typeface="Calibri" pitchFamily="34" charset="-122"/>
-                <a:cs typeface="Calibri" pitchFamily="34" charset="-120"/>
-              </a:rPr>
-              <a:t>-17%</a:t>
-            </a:r>
-            <a:endParaRPr lang="en-US" sz="1800" dirty="0"/>
-          </a:p>
-        </p:txBody>
-      </p:sp>
-      <p:sp>
-        <p:nvSpPr>
-          <p:cNvPr id="17" name="Shape 14"/>
-          <p:cNvSpPr/>
-          <p:nvPr/>
-        </p:nvSpPr>
-        <p:spPr>
-          <a:xfrm>
-            <a:off x="6309360" y="658368"/>
-            <a:ext cx="1371600" cy="3200400"/>
+          <p:cNvPr id="14" name="Shape 11"/>
+          <p:cNvSpPr/>
+          <p:nvPr/>
+        </p:nvSpPr>
+        <p:spPr>
+          <a:xfrm>
+            <a:off x="6428232" y="658368"/>
+            <a:ext cx="1335024" cy="2907792"/>
           </a:xfrm>
           <a:prstGeom prst="rect">
             <a:avLst/>
@@ -9170,14 +7450,14 @@
       </p:sp>
       <p:sp>
         <p:nvSpPr>
-          <p:cNvPr id="18" name="Shape 15"/>
-          <p:cNvSpPr/>
-          <p:nvPr/>
-        </p:nvSpPr>
-        <p:spPr>
-          <a:xfrm>
-            <a:off x="6309360" y="658368"/>
-            <a:ext cx="1371600" cy="347472"/>
+          <p:cNvPr id="15" name="Shape 12"/>
+          <p:cNvSpPr/>
+          <p:nvPr/>
+        </p:nvSpPr>
+        <p:spPr>
+          <a:xfrm>
+            <a:off x="6428232" y="658368"/>
+            <a:ext cx="1335024" cy="329184"/>
           </a:xfrm>
           <a:prstGeom prst="rect">
             <a:avLst/>
@@ -9190,14 +7470,131 @@
       </p:sp>
       <p:sp>
         <p:nvSpPr>
+          <p:cNvPr id="16" name="Text 13"/>
+          <p:cNvSpPr/>
+          <p:nvPr/>
+        </p:nvSpPr>
+        <p:spPr>
+          <a:xfrm>
+            <a:off x="6464808" y="676656"/>
+            <a:ext cx="1261872" cy="292608"/>
+          </a:xfrm>
+          <a:prstGeom prst="rect">
+            <a:avLst/>
+          </a:prstGeom>
+          <a:noFill/>
+          <a:ln/>
+        </p:spPr>
+        <p:txBody>
+          <a:bodyPr wrap="square" lIns="0" tIns="0" rIns="0" bIns="0" rtlCol="0" anchor="ctr"/>
+          <a:lstStyle/>
+          <a:p>
+            <a:pPr algn="ctr" indent="0" marL="0">
+              <a:buNone/>
+            </a:pPr>
+            <a:r>
+              <a:rPr lang="en-US" sz="1400" b="1" dirty="0">
+                <a:solidFill>
+                  <a:srgbClr val="FFFFFF"/>
+                </a:solidFill>
+                <a:latin typeface="Calibri" pitchFamily="34" charset="0"/>
+                <a:ea typeface="Calibri" pitchFamily="34" charset="-122"/>
+                <a:cs typeface="Calibri" pitchFamily="34" charset="-120"/>
+              </a:rPr>
+              <a:t>Base</a:t>
+            </a:r>
+            <a:endParaRPr lang="en-US" sz="1400" dirty="0"/>
+          </a:p>
+        </p:txBody>
+      </p:sp>
+      <p:sp>
+        <p:nvSpPr>
+          <p:cNvPr id="17" name="Text 14"/>
+          <p:cNvSpPr/>
+          <p:nvPr/>
+        </p:nvSpPr>
+        <p:spPr>
+          <a:xfrm>
+            <a:off x="6464808" y="1078992"/>
+            <a:ext cx="1261872" cy="182880"/>
+          </a:xfrm>
+          <a:prstGeom prst="rect">
+            <a:avLst/>
+          </a:prstGeom>
+          <a:noFill/>
+          <a:ln/>
+        </p:spPr>
+        <p:txBody>
+          <a:bodyPr wrap="square" lIns="0" tIns="0" rIns="0" bIns="0" rtlCol="0" anchor="ctr"/>
+          <a:lstStyle/>
+          <a:p>
+            <a:pPr algn="ctr" indent="0" marL="0">
+              <a:buNone/>
+            </a:pPr>
+            <a:r>
+              <a:rPr lang="en-US" sz="750" dirty="0">
+                <a:solidFill>
+                  <a:srgbClr val="64748B"/>
+                </a:solidFill>
+                <a:latin typeface="Calibri" pitchFamily="34" charset="0"/>
+                <a:ea typeface="Calibri" pitchFamily="34" charset="-122"/>
+                <a:cs typeface="Calibri" pitchFamily="34" charset="-120"/>
+              </a:rPr>
+              <a:t>FCF CAGR</a:t>
+            </a:r>
+            <a:endParaRPr lang="en-US" sz="750" dirty="0"/>
+          </a:p>
+        </p:txBody>
+      </p:sp>
+      <p:sp>
+        <p:nvSpPr>
+          <p:cNvPr id="18" name="Text 15"/>
+          <p:cNvSpPr/>
+          <p:nvPr/>
+        </p:nvSpPr>
+        <p:spPr>
+          <a:xfrm>
+            <a:off x="6464808" y="1243584"/>
+            <a:ext cx="1261872" cy="274320"/>
+          </a:xfrm>
+          <a:prstGeom prst="rect">
+            <a:avLst/>
+          </a:prstGeom>
+          <a:noFill/>
+          <a:ln/>
+        </p:spPr>
+        <p:txBody>
+          <a:bodyPr wrap="square" lIns="0" tIns="0" rIns="0" bIns="0" rtlCol="0" anchor="ctr"/>
+          <a:lstStyle/>
+          <a:p>
+            <a:pPr algn="ctr" indent="0" marL="0">
+              <a:buNone/>
+            </a:pPr>
+            <a:r>
+              <a:rPr lang="en-US" sz="1500" b="1" dirty="0">
+                <a:solidFill>
+                  <a:srgbClr val="D97706"/>
+                </a:solidFill>
+                <a:latin typeface="Calibri" pitchFamily="34" charset="0"/>
+                <a:ea typeface="Calibri" pitchFamily="34" charset="-122"/>
+                <a:cs typeface="Calibri" pitchFamily="34" charset="-120"/>
+              </a:rPr>
+              <a:t>+5% CAGR</a:t>
+            </a:r>
+            <a:endParaRPr lang="en-US" sz="1500" dirty="0"/>
+          </a:p>
+        </p:txBody>
+      </p:sp>
+      <p:sp>
+        <p:nvSpPr>
           <p:cNvPr id="19" name="Text 16"/>
           <p:cNvSpPr/>
           <p:nvPr/>
         </p:nvSpPr>
         <p:spPr>
           <a:xfrm>
-            <a:off x="6355080" y="676656"/>
-            <a:ext cx="1280160" cy="310896"/>
+            <a:off x="6464808" y="1627632"/>
+            <a:ext cx="1261872" cy="182880"/>
           </a:xfrm>
           <a:prstGeom prst="rect">
             <a:avLst/>
@@ -9213,15 +7610,54 @@
               <a:buNone/>
             </a:pPr>
             <a:r>
+              <a:rPr lang="en-US" sz="750" dirty="0">
+                <a:solidFill>
+                  <a:srgbClr val="64748B"/>
+                </a:solidFill>
+                <a:latin typeface="Calibri" pitchFamily="34" charset="0"/>
+                <a:ea typeface="Calibri" pitchFamily="34" charset="-122"/>
+                <a:cs typeface="Calibri" pitchFamily="34" charset="-120"/>
+              </a:rPr>
+              <a:t>FAIR VALUE</a:t>
+            </a:r>
+            <a:endParaRPr lang="en-US" sz="750" dirty="0"/>
+          </a:p>
+        </p:txBody>
+      </p:sp>
+      <p:sp>
+        <p:nvSpPr>
+          <p:cNvPr id="20" name="Text 17"/>
+          <p:cNvSpPr/>
+          <p:nvPr/>
+        </p:nvSpPr>
+        <p:spPr>
+          <a:xfrm>
+            <a:off x="6464808" y="1792224"/>
+            <a:ext cx="1261872" cy="329184"/>
+          </a:xfrm>
+          <a:prstGeom prst="rect">
+            <a:avLst/>
+          </a:prstGeom>
+          <a:noFill/>
+          <a:ln/>
+        </p:spPr>
+        <p:txBody>
+          <a:bodyPr wrap="square" lIns="0" tIns="0" rIns="0" bIns="0" rtlCol="0" anchor="ctr"/>
+          <a:lstStyle/>
+          <a:p>
+            <a:pPr algn="ctr" indent="0" marL="0">
+              <a:buNone/>
+            </a:pPr>
+            <a:r>
               <a:rPr lang="en-US" sz="1400" b="1" dirty="0">
                 <a:solidFill>
-                  <a:srgbClr val="FFFFFF"/>
-                </a:solidFill>
-                <a:latin typeface="Calibri" pitchFamily="34" charset="0"/>
-                <a:ea typeface="Calibri" pitchFamily="34" charset="-122"/>
-                <a:cs typeface="Calibri" pitchFamily="34" charset="-120"/>
-              </a:rPr>
-              <a:t>Base</a:t>
+                  <a:srgbClr val="D97706"/>
+                </a:solidFill>
+                <a:latin typeface="Calibri" pitchFamily="34" charset="0"/>
+                <a:ea typeface="Calibri" pitchFamily="34" charset="-122"/>
+                <a:cs typeface="Calibri" pitchFamily="34" charset="-120"/>
+              </a:rPr>
+              <a:t>INR 685</a:t>
             </a:r>
             <a:endParaRPr lang="en-US" sz="1400" dirty="0"/>
           </a:p>
@@ -9229,14 +7665,14 @@
       </p:sp>
       <p:sp>
         <p:nvSpPr>
-          <p:cNvPr id="20" name="Text 17"/>
-          <p:cNvSpPr/>
-          <p:nvPr/>
-        </p:nvSpPr>
-        <p:spPr>
-          <a:xfrm>
-            <a:off x="6355080" y="1097280"/>
-            <a:ext cx="1280160" cy="182880"/>
+          <p:cNvPr id="21" name="Text 18"/>
+          <p:cNvSpPr/>
+          <p:nvPr/>
+        </p:nvSpPr>
+        <p:spPr>
+          <a:xfrm>
+            <a:off x="6464808" y="2231136"/>
+            <a:ext cx="1261872" cy="182880"/>
           </a:xfrm>
           <a:prstGeom prst="rect">
             <a:avLst/>
@@ -9252,7 +7688,7 @@
               <a:buNone/>
             </a:pPr>
             <a:r>
-              <a:rPr lang="en-US" sz="800" dirty="0">
+              <a:rPr lang="en-US" sz="750" dirty="0">
                 <a:solidFill>
                   <a:srgbClr val="64748B"/>
                 </a:solidFill>
@@ -9260,22 +7696,22 @@
                 <a:ea typeface="Calibri" pitchFamily="34" charset="-122"/>
                 <a:cs typeface="Calibri" pitchFamily="34" charset="-120"/>
               </a:rPr>
-              <a:t>FCF CAGR</a:t>
-            </a:r>
-            <a:endParaRPr lang="en-US" sz="800" dirty="0"/>
-          </a:p>
-        </p:txBody>
-      </p:sp>
-      <p:sp>
-        <p:nvSpPr>
-          <p:cNvPr id="21" name="Text 18"/>
-          <p:cNvSpPr/>
-          <p:nvPr/>
-        </p:nvSpPr>
-        <p:spPr>
-          <a:xfrm>
-            <a:off x="6355080" y="1280160"/>
-            <a:ext cx="1280160" cy="292608"/>
+              <a:t>UPSIDE</a:t>
+            </a:r>
+            <a:endParaRPr lang="en-US" sz="750" dirty="0"/>
+          </a:p>
+        </p:txBody>
+      </p:sp>
+      <p:sp>
+        <p:nvSpPr>
+          <p:cNvPr id="22" name="Text 19"/>
+          <p:cNvSpPr/>
+          <p:nvPr/>
+        </p:nvSpPr>
+        <p:spPr>
+          <a:xfrm>
+            <a:off x="6464808" y="2395728"/>
+            <a:ext cx="1261872" cy="274320"/>
           </a:xfrm>
           <a:prstGeom prst="rect">
             <a:avLst/>
@@ -9291,7 +7727,7 @@
               <a:buNone/>
             </a:pPr>
             <a:r>
-              <a:rPr lang="en-US" sz="1800" b="1" dirty="0">
+              <a:rPr lang="en-US" sz="1600" b="1" dirty="0">
                 <a:solidFill>
                   <a:srgbClr val="D97706"/>
                 </a:solidFill>
@@ -9299,85 +7735,7 @@
                 <a:ea typeface="Calibri" pitchFamily="34" charset="-122"/>
                 <a:cs typeface="Calibri" pitchFamily="34" charset="-120"/>
               </a:rPr>
-              <a:t>+5%</a:t>
-            </a:r>
-            <a:endParaRPr lang="en-US" sz="1800" dirty="0"/>
-          </a:p>
-        </p:txBody>
-      </p:sp>
-      <p:sp>
-        <p:nvSpPr>
-          <p:cNvPr id="22" name="Text 19"/>
-          <p:cNvSpPr/>
-          <p:nvPr/>
-        </p:nvSpPr>
-        <p:spPr>
-          <a:xfrm>
-            <a:off x="6355080" y="1700784"/>
-            <a:ext cx="1280160" cy="182880"/>
-          </a:xfrm>
-          <a:prstGeom prst="rect">
-            <a:avLst/>
-          </a:prstGeom>
-          <a:noFill/>
-          <a:ln/>
-        </p:spPr>
-        <p:txBody>
-          <a:bodyPr wrap="square" lIns="0" tIns="0" rIns="0" bIns="0" rtlCol="0" anchor="ctr"/>
-          <a:lstStyle/>
-          <a:p>
-            <a:pPr algn="ctr" indent="0" marL="0">
-              <a:buNone/>
-            </a:pPr>
-            <a:r>
-              <a:rPr lang="en-US" sz="800" dirty="0">
-                <a:solidFill>
-                  <a:srgbClr val="64748B"/>
-                </a:solidFill>
-                <a:latin typeface="Calibri" pitchFamily="34" charset="0"/>
-                <a:ea typeface="Calibri" pitchFamily="34" charset="-122"/>
-                <a:cs typeface="Calibri" pitchFamily="34" charset="-120"/>
-              </a:rPr>
-              <a:t>FAIR VALUE</a:t>
-            </a:r>
-            <a:endParaRPr lang="en-US" sz="800" dirty="0"/>
-          </a:p>
-        </p:txBody>
-      </p:sp>
-      <p:sp>
-        <p:nvSpPr>
-          <p:cNvPr id="23" name="Text 20"/>
-          <p:cNvSpPr/>
-          <p:nvPr/>
-        </p:nvSpPr>
-        <p:spPr>
-          <a:xfrm>
-            <a:off x="6355080" y="1883664"/>
-            <a:ext cx="1280160" cy="347472"/>
-          </a:xfrm>
-          <a:prstGeom prst="rect">
-            <a:avLst/>
-          </a:prstGeom>
-          <a:noFill/>
-          <a:ln/>
-        </p:spPr>
-        <p:txBody>
-          <a:bodyPr wrap="square" lIns="0" tIns="0" rIns="0" bIns="0" rtlCol="0" anchor="ctr"/>
-          <a:lstStyle/>
-          <a:p>
-            <a:pPr algn="ctr" indent="0" marL="0">
-              <a:buNone/>
-            </a:pPr>
-            <a:r>
-              <a:rPr lang="en-US" sz="1600" b="1" dirty="0">
-                <a:solidFill>
-                  <a:srgbClr val="D97706"/>
-                </a:solidFill>
-                <a:latin typeface="Calibri" pitchFamily="34" charset="0"/>
-                <a:ea typeface="Calibri" pitchFamily="34" charset="-122"/>
-                <a:cs typeface="Calibri" pitchFamily="34" charset="-120"/>
-              </a:rPr>
-              <a:t>INR 685</a:t>
+              <a:t>+47%</a:t>
             </a:r>
             <a:endParaRPr lang="en-US" sz="1600" dirty="0"/>
           </a:p>
@@ -9385,92 +7743,14 @@
       </p:sp>
       <p:sp>
         <p:nvSpPr>
-          <p:cNvPr id="24" name="Text 21"/>
-          <p:cNvSpPr/>
-          <p:nvPr/>
-        </p:nvSpPr>
-        <p:spPr>
-          <a:xfrm>
-            <a:off x="6355080" y="2359152"/>
-            <a:ext cx="1280160" cy="182880"/>
-          </a:xfrm>
-          <a:prstGeom prst="rect">
-            <a:avLst/>
-          </a:prstGeom>
-          <a:noFill/>
-          <a:ln/>
-        </p:spPr>
-        <p:txBody>
-          <a:bodyPr wrap="square" lIns="0" tIns="0" rIns="0" bIns="0" rtlCol="0" anchor="ctr"/>
-          <a:lstStyle/>
-          <a:p>
-            <a:pPr algn="ctr" indent="0" marL="0">
-              <a:buNone/>
-            </a:pPr>
-            <a:r>
-              <a:rPr lang="en-US" sz="800" dirty="0">
-                <a:solidFill>
-                  <a:srgbClr val="64748B"/>
-                </a:solidFill>
-                <a:latin typeface="Calibri" pitchFamily="34" charset="0"/>
-                <a:ea typeface="Calibri" pitchFamily="34" charset="-122"/>
-                <a:cs typeface="Calibri" pitchFamily="34" charset="-120"/>
-              </a:rPr>
-              <a:t>UPSIDE</a:t>
-            </a:r>
-            <a:endParaRPr lang="en-US" sz="800" dirty="0"/>
-          </a:p>
-        </p:txBody>
-      </p:sp>
-      <p:sp>
-        <p:nvSpPr>
-          <p:cNvPr id="25" name="Text 22"/>
-          <p:cNvSpPr/>
-          <p:nvPr/>
-        </p:nvSpPr>
-        <p:spPr>
-          <a:xfrm>
-            <a:off x="6355080" y="2542032"/>
-            <a:ext cx="1280160" cy="292608"/>
-          </a:xfrm>
-          <a:prstGeom prst="rect">
-            <a:avLst/>
-          </a:prstGeom>
-          <a:noFill/>
-          <a:ln/>
-        </p:spPr>
-        <p:txBody>
-          <a:bodyPr wrap="square" lIns="0" tIns="0" rIns="0" bIns="0" rtlCol="0" anchor="ctr"/>
-          <a:lstStyle/>
-          <a:p>
-            <a:pPr algn="ctr" indent="0" marL="0">
-              <a:buNone/>
-            </a:pPr>
-            <a:r>
-              <a:rPr lang="en-US" sz="1800" b="1" dirty="0">
-                <a:solidFill>
-                  <a:srgbClr val="D97706"/>
-                </a:solidFill>
-                <a:latin typeface="Calibri" pitchFamily="34" charset="0"/>
-                <a:ea typeface="Calibri" pitchFamily="34" charset="-122"/>
-                <a:cs typeface="Calibri" pitchFamily="34" charset="-120"/>
-              </a:rPr>
-              <a:t>+47%</a:t>
-            </a:r>
-            <a:endParaRPr lang="en-US" sz="1800" dirty="0"/>
-          </a:p>
-        </p:txBody>
-      </p:sp>
-      <p:sp>
-        <p:nvSpPr>
-          <p:cNvPr id="26" name="Shape 23"/>
-          <p:cNvSpPr/>
-          <p:nvPr/>
-        </p:nvSpPr>
-        <p:spPr>
-          <a:xfrm>
-            <a:off x="7772400" y="658368"/>
-            <a:ext cx="1371600" cy="3200400"/>
+          <p:cNvPr id="23" name="Shape 20"/>
+          <p:cNvSpPr/>
+          <p:nvPr/>
+        </p:nvSpPr>
+        <p:spPr>
+          <a:xfrm>
+            <a:off x="7845552" y="658368"/>
+            <a:ext cx="1335024" cy="2907792"/>
           </a:xfrm>
           <a:prstGeom prst="rect">
             <a:avLst/>
@@ -9495,14 +7775,14 @@
       </p:sp>
       <p:sp>
         <p:nvSpPr>
-          <p:cNvPr id="27" name="Shape 24"/>
-          <p:cNvSpPr/>
-          <p:nvPr/>
-        </p:nvSpPr>
-        <p:spPr>
-          <a:xfrm>
-            <a:off x="7772400" y="658368"/>
-            <a:ext cx="1371600" cy="347472"/>
+          <p:cNvPr id="24" name="Shape 21"/>
+          <p:cNvSpPr/>
+          <p:nvPr/>
+        </p:nvSpPr>
+        <p:spPr>
+          <a:xfrm>
+            <a:off x="7845552" y="658368"/>
+            <a:ext cx="1335024" cy="329184"/>
           </a:xfrm>
           <a:prstGeom prst="rect">
             <a:avLst/>
@@ -9515,14 +7795,131 @@
       </p:sp>
       <p:sp>
         <p:nvSpPr>
+          <p:cNvPr id="25" name="Text 22"/>
+          <p:cNvSpPr/>
+          <p:nvPr/>
+        </p:nvSpPr>
+        <p:spPr>
+          <a:xfrm>
+            <a:off x="7882128" y="676656"/>
+            <a:ext cx="1261872" cy="292608"/>
+          </a:xfrm>
+          <a:prstGeom prst="rect">
+            <a:avLst/>
+          </a:prstGeom>
+          <a:noFill/>
+          <a:ln/>
+        </p:spPr>
+        <p:txBody>
+          <a:bodyPr wrap="square" lIns="0" tIns="0" rIns="0" bIns="0" rtlCol="0" anchor="ctr"/>
+          <a:lstStyle/>
+          <a:p>
+            <a:pPr algn="ctr" indent="0" marL="0">
+              <a:buNone/>
+            </a:pPr>
+            <a:r>
+              <a:rPr lang="en-US" sz="1400" b="1" dirty="0">
+                <a:solidFill>
+                  <a:srgbClr val="FFFFFF"/>
+                </a:solidFill>
+                <a:latin typeface="Calibri" pitchFamily="34" charset="0"/>
+                <a:ea typeface="Calibri" pitchFamily="34" charset="-122"/>
+                <a:cs typeface="Calibri" pitchFamily="34" charset="-120"/>
+              </a:rPr>
+              <a:t>Bull</a:t>
+            </a:r>
+            <a:endParaRPr lang="en-US" sz="1400" dirty="0"/>
+          </a:p>
+        </p:txBody>
+      </p:sp>
+      <p:sp>
+        <p:nvSpPr>
+          <p:cNvPr id="26" name="Text 23"/>
+          <p:cNvSpPr/>
+          <p:nvPr/>
+        </p:nvSpPr>
+        <p:spPr>
+          <a:xfrm>
+            <a:off x="7882128" y="1078992"/>
+            <a:ext cx="1261872" cy="182880"/>
+          </a:xfrm>
+          <a:prstGeom prst="rect">
+            <a:avLst/>
+          </a:prstGeom>
+          <a:noFill/>
+          <a:ln/>
+        </p:spPr>
+        <p:txBody>
+          <a:bodyPr wrap="square" lIns="0" tIns="0" rIns="0" bIns="0" rtlCol="0" anchor="ctr"/>
+          <a:lstStyle/>
+          <a:p>
+            <a:pPr algn="ctr" indent="0" marL="0">
+              <a:buNone/>
+            </a:pPr>
+            <a:r>
+              <a:rPr lang="en-US" sz="750" dirty="0">
+                <a:solidFill>
+                  <a:srgbClr val="64748B"/>
+                </a:solidFill>
+                <a:latin typeface="Calibri" pitchFamily="34" charset="0"/>
+                <a:ea typeface="Calibri" pitchFamily="34" charset="-122"/>
+                <a:cs typeface="Calibri" pitchFamily="34" charset="-120"/>
+              </a:rPr>
+              <a:t>FCF CAGR</a:t>
+            </a:r>
+            <a:endParaRPr lang="en-US" sz="750" dirty="0"/>
+          </a:p>
+        </p:txBody>
+      </p:sp>
+      <p:sp>
+        <p:nvSpPr>
+          <p:cNvPr id="27" name="Text 24"/>
+          <p:cNvSpPr/>
+          <p:nvPr/>
+        </p:nvSpPr>
+        <p:spPr>
+          <a:xfrm>
+            <a:off x="7882128" y="1243584"/>
+            <a:ext cx="1261872" cy="274320"/>
+          </a:xfrm>
+          <a:prstGeom prst="rect">
+            <a:avLst/>
+          </a:prstGeom>
+          <a:noFill/>
+          <a:ln/>
+        </p:spPr>
+        <p:txBody>
+          <a:bodyPr wrap="square" lIns="0" tIns="0" rIns="0" bIns="0" rtlCol="0" anchor="ctr"/>
+          <a:lstStyle/>
+          <a:p>
+            <a:pPr algn="ctr" indent="0" marL="0">
+              <a:buNone/>
+            </a:pPr>
+            <a:r>
+              <a:rPr lang="en-US" sz="1500" b="1" dirty="0">
+                <a:solidFill>
+                  <a:srgbClr val="059669"/>
+                </a:solidFill>
+                <a:latin typeface="Calibri" pitchFamily="34" charset="0"/>
+                <a:ea typeface="Calibri" pitchFamily="34" charset="-122"/>
+                <a:cs typeface="Calibri" pitchFamily="34" charset="-120"/>
+              </a:rPr>
+              <a:t>+10% CAGR</a:t>
+            </a:r>
+            <a:endParaRPr lang="en-US" sz="1500" dirty="0"/>
+          </a:p>
+        </p:txBody>
+      </p:sp>
+      <p:sp>
+        <p:nvSpPr>
           <p:cNvPr id="28" name="Text 25"/>
           <p:cNvSpPr/>
           <p:nvPr/>
         </p:nvSpPr>
         <p:spPr>
           <a:xfrm>
-            <a:off x="7818120" y="676656"/>
-            <a:ext cx="1280160" cy="310896"/>
+            <a:off x="7882128" y="1627632"/>
+            <a:ext cx="1261872" cy="182880"/>
           </a:xfrm>
           <a:prstGeom prst="rect">
             <a:avLst/>
@@ -9538,15 +7935,54 @@
               <a:buNone/>
             </a:pPr>
             <a:r>
+              <a:rPr lang="en-US" sz="750" dirty="0">
+                <a:solidFill>
+                  <a:srgbClr val="64748B"/>
+                </a:solidFill>
+                <a:latin typeface="Calibri" pitchFamily="34" charset="0"/>
+                <a:ea typeface="Calibri" pitchFamily="34" charset="-122"/>
+                <a:cs typeface="Calibri" pitchFamily="34" charset="-120"/>
+              </a:rPr>
+              <a:t>FAIR VALUE</a:t>
+            </a:r>
+            <a:endParaRPr lang="en-US" sz="750" dirty="0"/>
+          </a:p>
+        </p:txBody>
+      </p:sp>
+      <p:sp>
+        <p:nvSpPr>
+          <p:cNvPr id="29" name="Text 26"/>
+          <p:cNvSpPr/>
+          <p:nvPr/>
+        </p:nvSpPr>
+        <p:spPr>
+          <a:xfrm>
+            <a:off x="7882128" y="1792224"/>
+            <a:ext cx="1261872" cy="329184"/>
+          </a:xfrm>
+          <a:prstGeom prst="rect">
+            <a:avLst/>
+          </a:prstGeom>
+          <a:noFill/>
+          <a:ln/>
+        </p:spPr>
+        <p:txBody>
+          <a:bodyPr wrap="square" lIns="0" tIns="0" rIns="0" bIns="0" rtlCol="0" anchor="ctr"/>
+          <a:lstStyle/>
+          <a:p>
+            <a:pPr algn="ctr" indent="0" marL="0">
+              <a:buNone/>
+            </a:pPr>
+            <a:r>
               <a:rPr lang="en-US" sz="1400" b="1" dirty="0">
                 <a:solidFill>
-                  <a:srgbClr val="FFFFFF"/>
-                </a:solidFill>
-                <a:latin typeface="Calibri" pitchFamily="34" charset="0"/>
-                <a:ea typeface="Calibri" pitchFamily="34" charset="-122"/>
-                <a:cs typeface="Calibri" pitchFamily="34" charset="-120"/>
-              </a:rPr>
-              <a:t>Bull</a:t>
+                  <a:srgbClr val="059669"/>
+                </a:solidFill>
+                <a:latin typeface="Calibri" pitchFamily="34" charset="0"/>
+                <a:ea typeface="Calibri" pitchFamily="34" charset="-122"/>
+                <a:cs typeface="Calibri" pitchFamily="34" charset="-120"/>
+              </a:rPr>
+              <a:t>INR 1,061</a:t>
             </a:r>
             <a:endParaRPr lang="en-US" sz="1400" dirty="0"/>
           </a:p>
@@ -9554,14 +7990,14 @@
       </p:sp>
       <p:sp>
         <p:nvSpPr>
-          <p:cNvPr id="29" name="Text 26"/>
-          <p:cNvSpPr/>
-          <p:nvPr/>
-        </p:nvSpPr>
-        <p:spPr>
-          <a:xfrm>
-            <a:off x="7818120" y="1097280"/>
-            <a:ext cx="1280160" cy="182880"/>
+          <p:cNvPr id="30" name="Text 27"/>
+          <p:cNvSpPr/>
+          <p:nvPr/>
+        </p:nvSpPr>
+        <p:spPr>
+          <a:xfrm>
+            <a:off x="7882128" y="2231136"/>
+            <a:ext cx="1261872" cy="182880"/>
           </a:xfrm>
           <a:prstGeom prst="rect">
             <a:avLst/>
@@ -9577,7 +8013,7 @@
               <a:buNone/>
             </a:pPr>
             <a:r>
-              <a:rPr lang="en-US" sz="800" dirty="0">
+              <a:rPr lang="en-US" sz="750" dirty="0">
                 <a:solidFill>
                   <a:srgbClr val="64748B"/>
                 </a:solidFill>
@@ -9585,22 +8021,22 @@
                 <a:ea typeface="Calibri" pitchFamily="34" charset="-122"/>
                 <a:cs typeface="Calibri" pitchFamily="34" charset="-120"/>
               </a:rPr>
-              <a:t>FCF CAGR</a:t>
-            </a:r>
-            <a:endParaRPr lang="en-US" sz="800" dirty="0"/>
-          </a:p>
-        </p:txBody>
-      </p:sp>
-      <p:sp>
-        <p:nvSpPr>
-          <p:cNvPr id="30" name="Text 27"/>
-          <p:cNvSpPr/>
-          <p:nvPr/>
-        </p:nvSpPr>
-        <p:spPr>
-          <a:xfrm>
-            <a:off x="7818120" y="1280160"/>
-            <a:ext cx="1280160" cy="292608"/>
+              <a:t>UPSIDE</a:t>
+            </a:r>
+            <a:endParaRPr lang="en-US" sz="750" dirty="0"/>
+          </a:p>
+        </p:txBody>
+      </p:sp>
+      <p:sp>
+        <p:nvSpPr>
+          <p:cNvPr id="31" name="Text 28"/>
+          <p:cNvSpPr/>
+          <p:nvPr/>
+        </p:nvSpPr>
+        <p:spPr>
+          <a:xfrm>
+            <a:off x="7882128" y="2395728"/>
+            <a:ext cx="1261872" cy="274320"/>
           </a:xfrm>
           <a:prstGeom prst="rect">
             <a:avLst/>
@@ -9616,7 +8052,7 @@
               <a:buNone/>
             </a:pPr>
             <a:r>
-              <a:rPr lang="en-US" sz="1800" b="1" dirty="0">
+              <a:rPr lang="en-US" sz="1600" b="1" dirty="0">
                 <a:solidFill>
                   <a:srgbClr val="059669"/>
                 </a:solidFill>
@@ -9624,165 +8060,9 @@
                 <a:ea typeface="Calibri" pitchFamily="34" charset="-122"/>
                 <a:cs typeface="Calibri" pitchFamily="34" charset="-120"/>
               </a:rPr>
-              <a:t>+10%</a:t>
-            </a:r>
-            <a:endParaRPr lang="en-US" sz="1800" dirty="0"/>
-          </a:p>
-        </p:txBody>
-      </p:sp>
-      <p:sp>
-        <p:nvSpPr>
-          <p:cNvPr id="31" name="Text 28"/>
-          <p:cNvSpPr/>
-          <p:nvPr/>
-        </p:nvSpPr>
-        <p:spPr>
-          <a:xfrm>
-            <a:off x="7818120" y="1700784"/>
-            <a:ext cx="1280160" cy="182880"/>
-          </a:xfrm>
-          <a:prstGeom prst="rect">
-            <a:avLst/>
-          </a:prstGeom>
-          <a:noFill/>
-          <a:ln/>
-        </p:spPr>
-        <p:txBody>
-          <a:bodyPr wrap="square" lIns="0" tIns="0" rIns="0" bIns="0" rtlCol="0" anchor="ctr"/>
-          <a:lstStyle/>
-          <a:p>
-            <a:pPr algn="ctr" indent="0" marL="0">
-              <a:buNone/>
-            </a:pPr>
-            <a:r>
-              <a:rPr lang="en-US" sz="800" dirty="0">
-                <a:solidFill>
-                  <a:srgbClr val="64748B"/>
-                </a:solidFill>
-                <a:latin typeface="Calibri" pitchFamily="34" charset="0"/>
-                <a:ea typeface="Calibri" pitchFamily="34" charset="-122"/>
-                <a:cs typeface="Calibri" pitchFamily="34" charset="-120"/>
-              </a:rPr>
-              <a:t>FAIR VALUE</a:t>
-            </a:r>
-            <a:endParaRPr lang="en-US" sz="800" dirty="0"/>
-          </a:p>
-        </p:txBody>
-      </p:sp>
-      <p:sp>
-        <p:nvSpPr>
-          <p:cNvPr id="32" name="Text 29"/>
-          <p:cNvSpPr/>
-          <p:nvPr/>
-        </p:nvSpPr>
-        <p:spPr>
-          <a:xfrm>
-            <a:off x="7818120" y="1883664"/>
-            <a:ext cx="1280160" cy="347472"/>
-          </a:xfrm>
-          <a:prstGeom prst="rect">
-            <a:avLst/>
-          </a:prstGeom>
-          <a:noFill/>
-          <a:ln/>
-        </p:spPr>
-        <p:txBody>
-          <a:bodyPr wrap="square" lIns="0" tIns="0" rIns="0" bIns="0" rtlCol="0" anchor="ctr"/>
-          <a:lstStyle/>
-          <a:p>
-            <a:pPr algn="ctr" indent="0" marL="0">
-              <a:buNone/>
-            </a:pPr>
-            <a:r>
-              <a:rPr lang="en-US" sz="1600" b="1" dirty="0">
-                <a:solidFill>
-                  <a:srgbClr val="059669"/>
-                </a:solidFill>
-                <a:latin typeface="Calibri" pitchFamily="34" charset="0"/>
-                <a:ea typeface="Calibri" pitchFamily="34" charset="-122"/>
-                <a:cs typeface="Calibri" pitchFamily="34" charset="-120"/>
-              </a:rPr>
-              <a:t>INR 1,061</a:t>
+              <a:t>+127%</a:t>
             </a:r>
             <a:endParaRPr lang="en-US" sz="1600" dirty="0"/>
-          </a:p>
-        </p:txBody>
-      </p:sp>
-      <p:sp>
-        <p:nvSpPr>
-          <p:cNvPr id="33" name="Text 30"/>
-          <p:cNvSpPr/>
-          <p:nvPr/>
-        </p:nvSpPr>
-        <p:spPr>
-          <a:xfrm>
-            <a:off x="7818120" y="2359152"/>
-            <a:ext cx="1280160" cy="182880"/>
-          </a:xfrm>
-          <a:prstGeom prst="rect">
-            <a:avLst/>
-          </a:prstGeom>
-          <a:noFill/>
-          <a:ln/>
-        </p:spPr>
-        <p:txBody>
-          <a:bodyPr wrap="square" lIns="0" tIns="0" rIns="0" bIns="0" rtlCol="0" anchor="ctr"/>
-          <a:lstStyle/>
-          <a:p>
-            <a:pPr algn="ctr" indent="0" marL="0">
-              <a:buNone/>
-            </a:pPr>
-            <a:r>
-              <a:rPr lang="en-US" sz="800" dirty="0">
-                <a:solidFill>
-                  <a:srgbClr val="64748B"/>
-                </a:solidFill>
-                <a:latin typeface="Calibri" pitchFamily="34" charset="0"/>
-                <a:ea typeface="Calibri" pitchFamily="34" charset="-122"/>
-                <a:cs typeface="Calibri" pitchFamily="34" charset="-120"/>
-              </a:rPr>
-              <a:t>UPSIDE</a:t>
-            </a:r>
-            <a:endParaRPr lang="en-US" sz="800" dirty="0"/>
-          </a:p>
-        </p:txBody>
-      </p:sp>
-      <p:sp>
-        <p:nvSpPr>
-          <p:cNvPr id="34" name="Text 31"/>
-          <p:cNvSpPr/>
-          <p:nvPr/>
-        </p:nvSpPr>
-        <p:spPr>
-          <a:xfrm>
-            <a:off x="7818120" y="2542032"/>
-            <a:ext cx="1280160" cy="292608"/>
-          </a:xfrm>
-          <a:prstGeom prst="rect">
-            <a:avLst/>
-          </a:prstGeom>
-          <a:noFill/>
-          <a:ln/>
-        </p:spPr>
-        <p:txBody>
-          <a:bodyPr wrap="square" lIns="0" tIns="0" rIns="0" bIns="0" rtlCol="0" anchor="ctr"/>
-          <a:lstStyle/>
-          <a:p>
-            <a:pPr algn="ctr" indent="0" marL="0">
-              <a:buNone/>
-            </a:pPr>
-            <a:r>
-              <a:rPr lang="en-US" sz="1800" b="1" dirty="0">
-                <a:solidFill>
-                  <a:srgbClr val="059669"/>
-                </a:solidFill>
-                <a:latin typeface="Calibri" pitchFamily="34" charset="0"/>
-                <a:ea typeface="Calibri" pitchFamily="34" charset="-122"/>
-                <a:cs typeface="Calibri" pitchFamily="34" charset="-120"/>
-              </a:rPr>
-              <a:t>+127%</a:t>
-            </a:r>
-            <a:endParaRPr lang="en-US" sz="1800" dirty="0"/>
           </a:p>
         </p:txBody>
       </p:sp>
@@ -9801,20 +8081,20 @@
           </p:nvPr>
         </p:nvGraphicFramePr>
         <p:xfrm>
-          <a:off x="274320" y="3977640"/>
-          <a:ext cx="8595360" cy="1005840"/>
+          <a:off x="256032" y="3694176"/>
+          <a:ext cx="8650224" cy="1188720"/>
         </p:xfrm>
         <a:graphic>
           <a:graphicData uri="http://schemas.openxmlformats.org/drawingml/2006/table">
             <a:tbl>
               <a:tblPr/>
               <a:tblGrid>
-                <a:gridCol w="2148840"/>
-                <a:gridCol w="2148840"/>
-                <a:gridCol w="2148840"/>
-                <a:gridCol w="2148840"/>
+                <a:gridCol w="2162556"/>
+                <a:gridCol w="2162556"/>
+                <a:gridCol w="2162556"/>
+                <a:gridCol w="2162556"/>
               </a:tblGrid>
-              <a:tr h="143691">
+              <a:tr h="198120">
                 <a:tc>
                   <a:txBody>
                     <a:bodyPr/>
@@ -10012,7 +8292,7 @@
                             <a:srgbClr val="FFFFFF"/>
                           </a:solidFill>
                         </a:rPr>
-                        <a:t>PSU Sector Avg</a:t>
+                        <a:t>PSU Avg</a:t>
                       </a:r>
                       <a:endParaRPr lang="en-US" sz="850" dirty="0"/>
                     </a:p>
@@ -10060,7 +8340,7 @@
                   </a:tcPr>
                 </a:tc>
               </a:tr>
-              <a:tr h="143691">
+              <a:tr h="198120">
                 <a:tc>
                   <a:txBody>
                     <a:bodyPr/>
@@ -10306,7 +8586,7 @@
                   </a:tcPr>
                 </a:tc>
               </a:tr>
-              <a:tr h="143691">
+              <a:tr h="198120">
                 <a:tc>
                   <a:txBody>
                     <a:bodyPr/>
@@ -10552,7 +8832,7 @@
                   </a:tcPr>
                 </a:tc>
               </a:tr>
-              <a:tr h="143691">
+              <a:tr h="198120">
                 <a:tc>
                   <a:txBody>
                     <a:bodyPr/>
@@ -10798,7 +9078,7 @@
                   </a:tcPr>
                 </a:tc>
               </a:tr>
-              <a:tr h="143691">
+              <a:tr h="198120">
                 <a:tc>
                   <a:txBody>
                     <a:bodyPr/>
@@ -11044,7 +9324,7 @@
                   </a:tcPr>
                 </a:tc>
               </a:tr>
-              <a:tr h="143691">
+              <a:tr h="198120">
                 <a:tc>
                   <a:txBody>
                     <a:bodyPr/>
@@ -11290,259 +9570,13 @@
                   </a:tcPr>
                 </a:tc>
               </a:tr>
-              <a:tr h="143691">
-                <a:tc>
-                  <a:txBody>
-                    <a:bodyPr/>
-                    <a:lstStyle/>
-                    <a:p>
-                      <a:pPr algn="l" indent="0" marL="0">
-                        <a:buNone/>
-                      </a:pPr>
-                      <a:r>
-                        <a:rPr lang="en-US" sz="1000" b="1" dirty="0">
-                          <a:solidFill>
-                            <a:srgbClr val="334155"/>
-                          </a:solidFill>
-                        </a:rPr>
-                        <a:t>ROCE</a:t>
-                      </a:r>
-                      <a:endParaRPr lang="en-US" sz="1000" dirty="0"/>
-                    </a:p>
-                  </a:txBody>
-                  <a:tcPr marL="91440" marR="91440" marT="45720" marB="45720">
-                    <a:lnL w="6350" cap="flat" cmpd="sng" algn="ctr">
-                      <a:solidFill>
-                        <a:srgbClr val="D6E4FF"/>
-                      </a:solidFill>
-                      <a:prstDash val="solid"/>
-                      <a:round/>
-                      <a:headEnd type="none" w="med" len="med"/>
-                      <a:tailEnd type="none" w="med" len="med"/>
-                    </a:lnL>
-                    <a:lnR w="6350" cap="flat" cmpd="sng" algn="ctr">
-                      <a:solidFill>
-                        <a:srgbClr val="D6E4FF"/>
-                      </a:solidFill>
-                      <a:prstDash val="solid"/>
-                      <a:round/>
-                      <a:headEnd type="none" w="med" len="med"/>
-                      <a:tailEnd type="none" w="med" len="med"/>
-                    </a:lnR>
-                    <a:lnT w="6350" cap="flat" cmpd="sng" algn="ctr">
-                      <a:solidFill>
-                        <a:srgbClr val="D6E4FF"/>
-                      </a:solidFill>
-                      <a:prstDash val="solid"/>
-                      <a:round/>
-                      <a:headEnd type="none" w="med" len="med"/>
-                      <a:tailEnd type="none" w="med" len="med"/>
-                    </a:lnT>
-                    <a:lnB w="6350" cap="flat" cmpd="sng" algn="ctr">
-                      <a:solidFill>
-                        <a:srgbClr val="D6E4FF"/>
-                      </a:solidFill>
-                      <a:prstDash val="solid"/>
-                      <a:round/>
-                      <a:headEnd type="none" w="med" len="med"/>
-                      <a:tailEnd type="none" w="med" len="med"/>
-                    </a:lnB>
-                    <a:solidFill>
-                      <a:srgbClr val="F8FAFF"/>
-                    </a:solidFill>
-                  </a:tcPr>
-                </a:tc>
-                <a:tc>
-                  <a:txBody>
-                    <a:bodyPr/>
-                    <a:lstStyle/>
-                    <a:p>
-                      <a:pPr algn="ctr" indent="0" marL="0">
-                        <a:buNone/>
-                      </a:pPr>
-                      <a:r>
-                        <a:rPr lang="en-US" sz="1000" dirty="0">
-                          <a:solidFill>
-                            <a:srgbClr val="0F172A"/>
-                          </a:solidFill>
-                        </a:rPr>
-                        <a:t>35.3%</a:t>
-                      </a:r>
-                      <a:endParaRPr lang="en-US" sz="1000" dirty="0"/>
-                    </a:p>
-                  </a:txBody>
-                  <a:tcPr marL="91440" marR="91440" marT="45720" marB="45720">
-                    <a:lnL w="6350" cap="flat" cmpd="sng" algn="ctr">
-                      <a:solidFill>
-                        <a:srgbClr val="D6E4FF"/>
-                      </a:solidFill>
-                      <a:prstDash val="solid"/>
-                      <a:round/>
-                      <a:headEnd type="none" w="med" len="med"/>
-                      <a:tailEnd type="none" w="med" len="med"/>
-                    </a:lnL>
-                    <a:lnR w="6350" cap="flat" cmpd="sng" algn="ctr">
-                      <a:solidFill>
-                        <a:srgbClr val="D6E4FF"/>
-                      </a:solidFill>
-                      <a:prstDash val="solid"/>
-                      <a:round/>
-                      <a:headEnd type="none" w="med" len="med"/>
-                      <a:tailEnd type="none" w="med" len="med"/>
-                    </a:lnR>
-                    <a:lnT w="6350" cap="flat" cmpd="sng" algn="ctr">
-                      <a:solidFill>
-                        <a:srgbClr val="D6E4FF"/>
-                      </a:solidFill>
-                      <a:prstDash val="solid"/>
-                      <a:round/>
-                      <a:headEnd type="none" w="med" len="med"/>
-                      <a:tailEnd type="none" w="med" len="med"/>
-                    </a:lnT>
-                    <a:lnB w="6350" cap="flat" cmpd="sng" algn="ctr">
-                      <a:solidFill>
-                        <a:srgbClr val="D6E4FF"/>
-                      </a:solidFill>
-                      <a:prstDash val="solid"/>
-                      <a:round/>
-                      <a:headEnd type="none" w="med" len="med"/>
-                      <a:tailEnd type="none" w="med" len="med"/>
-                    </a:lnB>
-                    <a:solidFill>
-                      <a:srgbClr val="F8FAFF"/>
-                    </a:solidFill>
-                  </a:tcPr>
-                </a:tc>
-                <a:tc>
-                  <a:txBody>
-                    <a:bodyPr/>
-                    <a:lstStyle/>
-                    <a:p>
-                      <a:pPr algn="ctr" indent="0" marL="0">
-                        <a:buNone/>
-                      </a:pPr>
-                      <a:r>
-                        <a:rPr lang="en-US" sz="1000" dirty="0">
-                          <a:solidFill>
-                            <a:srgbClr val="0F172A"/>
-                          </a:solidFill>
-                        </a:rPr>
-                        <a:t>~30%</a:t>
-                      </a:r>
-                      <a:endParaRPr lang="en-US" sz="1000" dirty="0"/>
-                    </a:p>
-                  </a:txBody>
-                  <a:tcPr marL="91440" marR="91440" marT="45720" marB="45720">
-                    <a:lnL w="6350" cap="flat" cmpd="sng" algn="ctr">
-                      <a:solidFill>
-                        <a:srgbClr val="D6E4FF"/>
-                      </a:solidFill>
-                      <a:prstDash val="solid"/>
-                      <a:round/>
-                      <a:headEnd type="none" w="med" len="med"/>
-                      <a:tailEnd type="none" w="med" len="med"/>
-                    </a:lnL>
-                    <a:lnR w="6350" cap="flat" cmpd="sng" algn="ctr">
-                      <a:solidFill>
-                        <a:srgbClr val="D6E4FF"/>
-                      </a:solidFill>
-                      <a:prstDash val="solid"/>
-                      <a:round/>
-                      <a:headEnd type="none" w="med" len="med"/>
-                      <a:tailEnd type="none" w="med" len="med"/>
-                    </a:lnR>
-                    <a:lnT w="6350" cap="flat" cmpd="sng" algn="ctr">
-                      <a:solidFill>
-                        <a:srgbClr val="D6E4FF"/>
-                      </a:solidFill>
-                      <a:prstDash val="solid"/>
-                      <a:round/>
-                      <a:headEnd type="none" w="med" len="med"/>
-                      <a:tailEnd type="none" w="med" len="med"/>
-                    </a:lnT>
-                    <a:lnB w="6350" cap="flat" cmpd="sng" algn="ctr">
-                      <a:solidFill>
-                        <a:srgbClr val="D6E4FF"/>
-                      </a:solidFill>
-                      <a:prstDash val="solid"/>
-                      <a:round/>
-                      <a:headEnd type="none" w="med" len="med"/>
-                      <a:tailEnd type="none" w="med" len="med"/>
-                    </a:lnB>
-                    <a:solidFill>
-                      <a:srgbClr val="F8FAFF"/>
-                    </a:solidFill>
-                  </a:tcPr>
-                </a:tc>
-                <a:tc>
-                  <a:txBody>
-                    <a:bodyPr/>
-                    <a:lstStyle/>
-                    <a:p>
-                      <a:pPr algn="ctr" indent="0" marL="0">
-                        <a:buNone/>
-                      </a:pPr>
-                      <a:r>
-                        <a:rPr lang="en-US" sz="1000" dirty="0">
-                          <a:solidFill>
-                            <a:srgbClr val="0F172A"/>
-                          </a:solidFill>
-                        </a:rPr>
-                        <a:t>~20%</a:t>
-                      </a:r>
-                      <a:endParaRPr lang="en-US" sz="1000" dirty="0"/>
-                    </a:p>
-                  </a:txBody>
-                  <a:tcPr marL="91440" marR="91440" marT="45720" marB="45720">
-                    <a:lnL w="6350" cap="flat" cmpd="sng" algn="ctr">
-                      <a:solidFill>
-                        <a:srgbClr val="D6E4FF"/>
-                      </a:solidFill>
-                      <a:prstDash val="solid"/>
-                      <a:round/>
-                      <a:headEnd type="none" w="med" len="med"/>
-                      <a:tailEnd type="none" w="med" len="med"/>
-                    </a:lnL>
-                    <a:lnR w="6350" cap="flat" cmpd="sng" algn="ctr">
-                      <a:solidFill>
-                        <a:srgbClr val="D6E4FF"/>
-                      </a:solidFill>
-                      <a:prstDash val="solid"/>
-                      <a:round/>
-                      <a:headEnd type="none" w="med" len="med"/>
-                      <a:tailEnd type="none" w="med" len="med"/>
-                    </a:lnR>
-                    <a:lnT w="6350" cap="flat" cmpd="sng" algn="ctr">
-                      <a:solidFill>
-                        <a:srgbClr val="D6E4FF"/>
-                      </a:solidFill>
-                      <a:prstDash val="solid"/>
-                      <a:round/>
-                      <a:headEnd type="none" w="med" len="med"/>
-                      <a:tailEnd type="none" w="med" len="med"/>
-                    </a:lnT>
-                    <a:lnB w="6350" cap="flat" cmpd="sng" algn="ctr">
-                      <a:solidFill>
-                        <a:srgbClr val="D6E4FF"/>
-                      </a:solidFill>
-                      <a:prstDash val="solid"/>
-                      <a:round/>
-                      <a:headEnd type="none" w="med" len="med"/>
-                      <a:tailEnd type="none" w="med" len="med"/>
-                    </a:lnB>
-                    <a:solidFill>
-                      <a:srgbClr val="F8FAFF"/>
-                    </a:solidFill>
-                  </a:tcPr>
-                </a:tc>
-              </a:tr>
             </a:tbl>
           </a:graphicData>
         </a:graphic>
       </p:graphicFrame>
       <p:sp>
         <p:nvSpPr>
-          <p:cNvPr id="36" name="Text 32"/>
+          <p:cNvPr id="33" name="Text 29"/>
           <p:cNvSpPr/>
           <p:nvPr/>
         </p:nvSpPr>
@@ -11664,22 +9698,183 @@
                 <a:ea typeface="Calibri" pitchFamily="34" charset="-122"/>
                 <a:cs typeface="Calibri" pitchFamily="34" charset="-120"/>
               </a:rPr>
-              <a:t>KEY RISKS — The energy transition is the existential question</a:t>
+              <a:t>ANALYST CONSENSUS &amp; FINAL VERDICT</a:t>
             </a:r>
             <a:endParaRPr lang="en-US" sz="1300" dirty="0"/>
           </a:p>
         </p:txBody>
       </p:sp>
-      <p:sp>
-        <p:nvSpPr>
-          <p:cNvPr id="4" name="Shape 2"/>
-          <p:cNvSpPr/>
-          <p:nvPr/>
-        </p:nvSpPr>
-        <p:spPr>
-          <a:xfrm>
-            <a:off x="274320" y="621792"/>
-            <a:ext cx="8595360" cy="786384"/>
+      <p:pic>
+        <p:nvPicPr>
+          <p:cNvPr id="4" name="Image 0" descr="preencoded.png">    </p:cNvPr>
+          <p:cNvPicPr>
+            <a:picLocks noChangeAspect="1"/>
+          </p:cNvPicPr>
+          <p:nvPr/>
+        </p:nvPicPr>
+        <p:blipFill>
+          <a:blip r:embed="rId1"/>
+          <a:stretch>
+            <a:fillRect/>
+          </a:stretch>
+        </p:blipFill>
+        <p:spPr>
+          <a:xfrm>
+            <a:off x="256032" y="594360"/>
+            <a:ext cx="4114800" cy="3291840"/>
+          </a:xfrm>
+          <a:prstGeom prst="rect">
+            <a:avLst/>
+          </a:prstGeom>
+        </p:spPr>
+      </p:pic>
+      <p:sp>
+        <p:nvSpPr>
+          <p:cNvPr id="5" name="Shape 2"/>
+          <p:cNvSpPr/>
+          <p:nvPr/>
+        </p:nvSpPr>
+        <p:spPr>
+          <a:xfrm>
+            <a:off x="4526280" y="658368"/>
+            <a:ext cx="4343400" cy="1170432"/>
+          </a:xfrm>
+          <a:prstGeom prst="rect">
+            <a:avLst/>
+          </a:prstGeom>
+          <a:solidFill>
+            <a:srgbClr val="1C2B5E"/>
+          </a:solidFill>
+          <a:ln/>
+        </p:spPr>
+      </p:sp>
+      <p:sp>
+        <p:nvSpPr>
+          <p:cNvPr id="6" name="Text 3"/>
+          <p:cNvSpPr/>
+          <p:nvPr/>
+        </p:nvSpPr>
+        <p:spPr>
+          <a:xfrm>
+            <a:off x="4663440" y="749808"/>
+            <a:ext cx="4114800" cy="219456"/>
+          </a:xfrm>
+          <a:prstGeom prst="rect">
+            <a:avLst/>
+          </a:prstGeom>
+          <a:noFill/>
+          <a:ln/>
+        </p:spPr>
+        <p:txBody>
+          <a:bodyPr wrap="square" lIns="0" tIns="0" rIns="0" bIns="0" rtlCol="0" anchor="ctr"/>
+          <a:lstStyle/>
+          <a:p>
+            <a:pPr indent="0" marL="0">
+              <a:buNone/>
+            </a:pPr>
+            <a:r>
+              <a:rPr lang="en-US" sz="950" b="1" spc="200" kern="0" dirty="0">
+                <a:solidFill>
+                  <a:srgbClr val="D97706"/>
+                </a:solidFill>
+                <a:latin typeface="Calibri" pitchFamily="34" charset="0"/>
+                <a:ea typeface="Calibri" pitchFamily="34" charset="-122"/>
+                <a:cs typeface="Calibri" pitchFamily="34" charset="-120"/>
+              </a:rPr>
+              <a:t>CONSENSUS: HOLD</a:t>
+            </a:r>
+            <a:endParaRPr lang="en-US" sz="950" dirty="0"/>
+          </a:p>
+        </p:txBody>
+      </p:sp>
+      <p:sp>
+        <p:nvSpPr>
+          <p:cNvPr id="7" name="Text 4"/>
+          <p:cNvSpPr/>
+          <p:nvPr/>
+        </p:nvSpPr>
+        <p:spPr>
+          <a:xfrm>
+            <a:off x="4663440" y="987552"/>
+            <a:ext cx="4114800" cy="201168"/>
+          </a:xfrm>
+          <a:prstGeom prst="rect">
+            <a:avLst/>
+          </a:prstGeom>
+          <a:noFill/>
+          <a:ln/>
+        </p:spPr>
+        <p:txBody>
+          <a:bodyPr wrap="square" lIns="0" tIns="0" rIns="0" bIns="0" rtlCol="0" anchor="ctr"/>
+          <a:lstStyle/>
+          <a:p>
+            <a:pPr indent="0" marL="0">
+              <a:buNone/>
+            </a:pPr>
+            <a:r>
+              <a:rPr lang="en-US" sz="1000" dirty="0">
+                <a:solidFill>
+                  <a:srgbClr val="FFFFFF"/>
+                </a:solidFill>
+                <a:latin typeface="Calibri" pitchFamily="34" charset="0"/>
+                <a:ea typeface="Calibri" pitchFamily="34" charset="-122"/>
+                <a:cs typeface="Calibri" pitchFamily="34" charset="-120"/>
+              </a:rPr>
+              <a:t>26 analysts  ·  39% Bullish  ·  35% Hold  ·  24% Bearish</a:t>
+            </a:r>
+            <a:endParaRPr lang="en-US" sz="1000" dirty="0"/>
+          </a:p>
+        </p:txBody>
+      </p:sp>
+      <p:sp>
+        <p:nvSpPr>
+          <p:cNvPr id="8" name="Text 5"/>
+          <p:cNvSpPr/>
+          <p:nvPr/>
+        </p:nvSpPr>
+        <p:spPr>
+          <a:xfrm>
+            <a:off x="4663440" y="1188720"/>
+            <a:ext cx="4114800" cy="201168"/>
+          </a:xfrm>
+          <a:prstGeom prst="rect">
+            <a:avLst/>
+          </a:prstGeom>
+          <a:noFill/>
+          <a:ln/>
+        </p:spPr>
+        <p:txBody>
+          <a:bodyPr wrap="square" lIns="0" tIns="0" rIns="0" bIns="0" rtlCol="0" anchor="ctr"/>
+          <a:lstStyle/>
+          <a:p>
+            <a:pPr indent="0" marL="0">
+              <a:buNone/>
+            </a:pPr>
+            <a:r>
+              <a:rPr lang="en-US" sz="1000" dirty="0">
+                <a:solidFill>
+                  <a:srgbClr val="D6E4FF"/>
+                </a:solidFill>
+                <a:latin typeface="Calibri" pitchFamily="34" charset="0"/>
+                <a:ea typeface="Calibri" pitchFamily="34" charset="-122"/>
+                <a:cs typeface="Calibri" pitchFamily="34" charset="-120"/>
+              </a:rPr>
+              <a:t>Mean target: INR 452  ·  Range: INR 290 – INR 550</a:t>
+            </a:r>
+            <a:endParaRPr lang="en-US" sz="1000" dirty="0"/>
+          </a:p>
+        </p:txBody>
+      </p:sp>
+      <p:sp>
+        <p:nvSpPr>
+          <p:cNvPr id="9" name="Shape 6"/>
+          <p:cNvSpPr/>
+          <p:nvPr/>
+        </p:nvSpPr>
+        <p:spPr>
+          <a:xfrm>
+            <a:off x="4526280" y="1938528"/>
+            <a:ext cx="4343400" cy="1920240"/>
           </a:xfrm>
           <a:prstGeom prst="rect">
             <a:avLst/>
@@ -11699,93 +9894,14 @@
       </p:sp>
       <p:sp>
         <p:nvSpPr>
-          <p:cNvPr id="5" name="Shape 3"/>
-          <p:cNvSpPr/>
-          <p:nvPr/>
-        </p:nvSpPr>
-        <p:spPr>
-          <a:xfrm>
-            <a:off x="274320" y="621792"/>
-            <a:ext cx="164592" cy="786384"/>
-          </a:xfrm>
-          <a:prstGeom prst="rect">
-            <a:avLst/>
-          </a:prstGeom>
-          <a:solidFill>
-            <a:srgbClr val="DC2626"/>
-          </a:solidFill>
-          <a:ln/>
-        </p:spPr>
-      </p:sp>
-      <p:sp>
-        <p:nvSpPr>
-          <p:cNvPr id="6" name="Shape 4"/>
-          <p:cNvSpPr/>
-          <p:nvPr/>
-        </p:nvSpPr>
-        <p:spPr>
-          <a:xfrm>
-            <a:off x="8119872" y="822960"/>
-            <a:ext cx="713232" cy="256032"/>
-          </a:xfrm>
-          <a:prstGeom prst="rect">
-            <a:avLst/>
-          </a:prstGeom>
-          <a:solidFill>
-            <a:srgbClr val="DC2626"/>
-          </a:solidFill>
-          <a:ln/>
-        </p:spPr>
-      </p:sp>
-      <p:sp>
-        <p:nvSpPr>
-          <p:cNvPr id="7" name="Text 5"/>
-          <p:cNvSpPr/>
-          <p:nvPr/>
-        </p:nvSpPr>
-        <p:spPr>
-          <a:xfrm>
-            <a:off x="8119872" y="822960"/>
-            <a:ext cx="713232" cy="256032"/>
-          </a:xfrm>
-          <a:prstGeom prst="rect">
-            <a:avLst/>
-          </a:prstGeom>
-          <a:noFill/>
-          <a:ln/>
-        </p:spPr>
-        <p:txBody>
-          <a:bodyPr wrap="square" lIns="0" tIns="0" rIns="0" bIns="0" rtlCol="0" anchor="ctr"/>
-          <a:lstStyle/>
-          <a:p>
-            <a:pPr algn="ctr" indent="0" marL="0">
-              <a:buNone/>
-            </a:pPr>
-            <a:r>
-              <a:rPr lang="en-US" sz="750" b="1" dirty="0">
-                <a:solidFill>
-                  <a:srgbClr val="FFFFFF"/>
-                </a:solidFill>
-                <a:latin typeface="Calibri" pitchFamily="34" charset="0"/>
-                <a:ea typeface="Calibri" pitchFamily="34" charset="-122"/>
-                <a:cs typeface="Calibri" pitchFamily="34" charset="-120"/>
-              </a:rPr>
-              <a:t>HIGH</a:t>
-            </a:r>
-            <a:endParaRPr lang="en-US" sz="750" dirty="0"/>
-          </a:p>
-        </p:txBody>
-      </p:sp>
-      <p:sp>
-        <p:nvSpPr>
-          <p:cNvPr id="8" name="Text 6"/>
-          <p:cNvSpPr/>
-          <p:nvPr/>
-        </p:nvSpPr>
-        <p:spPr>
-          <a:xfrm>
-            <a:off x="530352" y="694944"/>
-            <a:ext cx="7406640" cy="237744"/>
+          <p:cNvPr id="10" name="Text 7"/>
+          <p:cNvSpPr/>
+          <p:nvPr/>
+        </p:nvSpPr>
+        <p:spPr>
+          <a:xfrm>
+            <a:off x="4663440" y="2029968"/>
+            <a:ext cx="4114800" cy="219456"/>
           </a:xfrm>
           <a:prstGeom prst="rect">
             <a:avLst/>
@@ -11801,30 +9917,30 @@
               <a:buNone/>
             </a:pPr>
             <a:r>
-              <a:rPr lang="en-US" sz="1100" b="1" dirty="0">
-                <a:solidFill>
-                  <a:srgbClr val="0F172A"/>
-                </a:solidFill>
-                <a:latin typeface="Calibri" pitchFamily="34" charset="0"/>
-                <a:ea typeface="Calibri" pitchFamily="34" charset="-122"/>
-                <a:cs typeface="Calibri" pitchFamily="34" charset="-120"/>
-              </a:rPr>
-              <a:t>1. Energy Transition — Renewable Displacement</a:t>
-            </a:r>
-            <a:endParaRPr lang="en-US" sz="1100" dirty="0"/>
-          </a:p>
-        </p:txBody>
-      </p:sp>
-      <p:sp>
-        <p:nvSpPr>
-          <p:cNvPr id="9" name="Text 7"/>
-          <p:cNvSpPr/>
-          <p:nvPr/>
-        </p:nvSpPr>
-        <p:spPr>
-          <a:xfrm>
-            <a:off x="530352" y="969264"/>
-            <a:ext cx="7406640" cy="347472"/>
+              <a:rPr lang="en-US" sz="1000" b="1" dirty="0">
+                <a:solidFill>
+                  <a:srgbClr val="D97706"/>
+                </a:solidFill>
+                <a:latin typeface="Calibri" pitchFamily="34" charset="0"/>
+                <a:ea typeface="Calibri" pitchFamily="34" charset="-122"/>
+                <a:cs typeface="Calibri" pitchFamily="34" charset="-120"/>
+              </a:rPr>
+              <a:t>FINAL VERDICT — WATCH ⚠️</a:t>
+            </a:r>
+            <a:endParaRPr lang="en-US" sz="1000" dirty="0"/>
+          </a:p>
+        </p:txBody>
+      </p:sp>
+      <p:sp>
+        <p:nvSpPr>
+          <p:cNvPr id="11" name="Text 8"/>
+          <p:cNvSpPr/>
+          <p:nvPr/>
+        </p:nvSpPr>
+        <p:spPr>
+          <a:xfrm>
+            <a:off x="4663440" y="2286000"/>
+            <a:ext cx="4114800" cy="1463040"/>
           </a:xfrm>
           <a:prstGeom prst="rect">
             <a:avLst/>
@@ -11840,837 +9956,98 @@
               <a:buNone/>
             </a:pPr>
             <a:r>
-              <a:rPr lang="en-US" sz="950" dirty="0">
-                <a:solidFill>
-                  <a:srgbClr val="334155"/>
-                </a:solidFill>
-                <a:latin typeface="Calibri" pitchFamily="34" charset="0"/>
-                <a:ea typeface="Calibri" pitchFamily="34" charset="-122"/>
-                <a:cs typeface="Calibri" pitchFamily="34" charset="-120"/>
-              </a:rPr>
-              <a:t>India's renewable capacity is growing 15%+ annually. By FY2031, coal tariffs will be ~25% costlier than firm renewables. This is the existential 10-year risk for Coal India's volume outlook.</a:t>
-            </a:r>
-            <a:endParaRPr lang="en-US" sz="950" dirty="0"/>
-          </a:p>
-        </p:txBody>
-      </p:sp>
-      <p:sp>
-        <p:nvSpPr>
-          <p:cNvPr id="10" name="Shape 8"/>
-          <p:cNvSpPr/>
-          <p:nvPr/>
-        </p:nvSpPr>
-        <p:spPr>
-          <a:xfrm>
-            <a:off x="274320" y="1490472"/>
-            <a:ext cx="8595360" cy="786384"/>
-          </a:xfrm>
-          <a:prstGeom prst="rect">
-            <a:avLst/>
-          </a:prstGeom>
-          <a:solidFill>
-            <a:srgbClr val="FFFFFF"/>
-          </a:solidFill>
-          <a:ln/>
-          <a:effectLst>
-            <a:outerShdw sx="100000" sy="100000" kx="0" ky="0" algn="bl" rotWithShape="0" blurRad="101600" dist="38100" dir="8100000">
-              <a:srgbClr val="000000">
-                <a:alpha val="10000"/>
-              </a:srgbClr>
-            </a:outerShdw>
-          </a:effectLst>
-        </p:spPr>
-      </p:sp>
-      <p:sp>
-        <p:nvSpPr>
-          <p:cNvPr id="11" name="Shape 9"/>
-          <p:cNvSpPr/>
-          <p:nvPr/>
-        </p:nvSpPr>
-        <p:spPr>
-          <a:xfrm>
-            <a:off x="274320" y="1490472"/>
-            <a:ext cx="164592" cy="786384"/>
-          </a:xfrm>
-          <a:prstGeom prst="rect">
-            <a:avLst/>
-          </a:prstGeom>
-          <a:solidFill>
-            <a:srgbClr val="DC2626"/>
-          </a:solidFill>
-          <a:ln/>
-        </p:spPr>
-      </p:sp>
-      <p:sp>
-        <p:nvSpPr>
-          <p:cNvPr id="12" name="Shape 10"/>
-          <p:cNvSpPr/>
-          <p:nvPr/>
-        </p:nvSpPr>
-        <p:spPr>
-          <a:xfrm>
-            <a:off x="8119872" y="1691640"/>
-            <a:ext cx="713232" cy="256032"/>
-          </a:xfrm>
-          <a:prstGeom prst="rect">
-            <a:avLst/>
-          </a:prstGeom>
-          <a:solidFill>
-            <a:srgbClr val="DC2626"/>
-          </a:solidFill>
-          <a:ln/>
-        </p:spPr>
-      </p:sp>
-      <p:sp>
-        <p:nvSpPr>
-          <p:cNvPr id="13" name="Text 11"/>
-          <p:cNvSpPr/>
-          <p:nvPr/>
-        </p:nvSpPr>
-        <p:spPr>
-          <a:xfrm>
-            <a:off x="8119872" y="1691640"/>
-            <a:ext cx="713232" cy="256032"/>
-          </a:xfrm>
-          <a:prstGeom prst="rect">
-            <a:avLst/>
-          </a:prstGeom>
-          <a:noFill/>
-          <a:ln/>
-        </p:spPr>
-        <p:txBody>
-          <a:bodyPr wrap="square" lIns="0" tIns="0" rIns="0" bIns="0" rtlCol="0" anchor="ctr"/>
-          <a:lstStyle/>
-          <a:p>
-            <a:pPr algn="ctr" indent="0" marL="0">
-              <a:buNone/>
-            </a:pPr>
-            <a:r>
-              <a:rPr lang="en-US" sz="750" b="1" dirty="0">
-                <a:solidFill>
-                  <a:srgbClr val="FFFFFF"/>
-                </a:solidFill>
-                <a:latin typeface="Calibri" pitchFamily="34" charset="0"/>
-                <a:ea typeface="Calibri" pitchFamily="34" charset="-122"/>
-                <a:cs typeface="Calibri" pitchFamily="34" charset="-120"/>
-              </a:rPr>
-              <a:t>HIGH</a:t>
-            </a:r>
-            <a:endParaRPr lang="en-US" sz="750" dirty="0"/>
-          </a:p>
-        </p:txBody>
-      </p:sp>
-      <p:sp>
-        <p:nvSpPr>
-          <p:cNvPr id="14" name="Text 12"/>
-          <p:cNvSpPr/>
-          <p:nvPr/>
-        </p:nvSpPr>
-        <p:spPr>
-          <a:xfrm>
-            <a:off x="530352" y="1563624"/>
-            <a:ext cx="7406640" cy="237744"/>
-          </a:xfrm>
-          <a:prstGeom prst="rect">
-            <a:avLst/>
-          </a:prstGeom>
-          <a:noFill/>
-          <a:ln/>
-        </p:spPr>
-        <p:txBody>
-          <a:bodyPr wrap="square" lIns="0" tIns="0" rIns="0" bIns="0" rtlCol="0" anchor="ctr"/>
-          <a:lstStyle/>
+              <a:rPr lang="en-US" sz="1050" dirty="0">
+                <a:solidFill>
+                  <a:srgbClr val="059669"/>
+                </a:solidFill>
+                <a:latin typeface="Calibri" pitchFamily="34" charset="0"/>
+                <a:ea typeface="Calibri" pitchFamily="34" charset="-122"/>
+                <a:cs typeface="Calibri" pitchFamily="34" charset="-120"/>
+              </a:rPr>
+              <a:t>✅  0.1x ND/EBITDA — pristine balance sheet, no financial risk</a:t>
+            </a:r>
+            <a:endParaRPr lang="en-US" sz="1050" dirty="0"/>
+          </a:p>
           <a:p>
             <a:pPr indent="0" marL="0">
               <a:buNone/>
             </a:pPr>
             <a:r>
-              <a:rPr lang="en-US" sz="1100" b="1" dirty="0">
-                <a:solidFill>
-                  <a:srgbClr val="0F172A"/>
-                </a:solidFill>
-                <a:latin typeface="Calibri" pitchFamily="34" charset="0"/>
-                <a:ea typeface="Calibri" pitchFamily="34" charset="-122"/>
-                <a:cs typeface="Calibri" pitchFamily="34" charset="-120"/>
-              </a:rPr>
-              <a:t>2. Government Divestment / PSU Discount</a:t>
-            </a:r>
-            <a:endParaRPr lang="en-US" sz="1100" dirty="0"/>
-          </a:p>
-        </p:txBody>
-      </p:sp>
-      <p:sp>
-        <p:nvSpPr>
-          <p:cNvPr id="15" name="Text 13"/>
-          <p:cNvSpPr/>
-          <p:nvPr/>
-        </p:nvSpPr>
-        <p:spPr>
-          <a:xfrm>
-            <a:off x="530352" y="1837944"/>
-            <a:ext cx="7406640" cy="347472"/>
-          </a:xfrm>
-          <a:prstGeom prst="rect">
-            <a:avLst/>
-          </a:prstGeom>
-          <a:noFill/>
-          <a:ln/>
-        </p:spPr>
-        <p:txBody>
-          <a:bodyPr wrap="square" lIns="0" tIns="0" rIns="0" bIns="0" rtlCol="0" anchor="ctr"/>
-          <a:lstStyle/>
+              <a:rPr lang="en-US" sz="1050" dirty="0">
+                <a:solidFill>
+                  <a:srgbClr val="059669"/>
+                </a:solidFill>
+                <a:latin typeface="Calibri" pitchFamily="34" charset="0"/>
+                <a:ea typeface="Calibri" pitchFamily="34" charset="-122"/>
+                <a:cs typeface="Calibri" pitchFamily="34" charset="-120"/>
+              </a:rPr>
+              <a:t>✅  35.3% ROCE + 5.7% dividend yield — exceptional income asset</a:t>
+            </a:r>
+            <a:endParaRPr lang="en-US" sz="1050" dirty="0"/>
+          </a:p>
           <a:p>
             <a:pPr indent="0" marL="0">
               <a:buNone/>
             </a:pPr>
             <a:r>
-              <a:rPr lang="en-US" sz="950" dirty="0">
-                <a:solidFill>
-                  <a:srgbClr val="334155"/>
-                </a:solidFill>
-                <a:latin typeface="Calibri" pitchFamily="34" charset="0"/>
-                <a:ea typeface="Calibri" pitchFamily="34" charset="-122"/>
-                <a:cs typeface="Calibri" pitchFamily="34" charset="-120"/>
-              </a:rPr>
-              <a:t>India plans to divest ~INR 8,800 crore of CIL stake (supply overhang). As a PSU, CIL trades at a structural governance discount vs. private peers regardless of fundamentals.</a:t>
-            </a:r>
-            <a:endParaRPr lang="en-US" sz="950" dirty="0"/>
-          </a:p>
-        </p:txBody>
-      </p:sp>
-      <p:sp>
-        <p:nvSpPr>
-          <p:cNvPr id="16" name="Shape 14"/>
-          <p:cNvSpPr/>
-          <p:nvPr/>
-        </p:nvSpPr>
-        <p:spPr>
-          <a:xfrm>
-            <a:off x="274320" y="2359152"/>
-            <a:ext cx="8595360" cy="786384"/>
-          </a:xfrm>
-          <a:prstGeom prst="rect">
-            <a:avLst/>
-          </a:prstGeom>
-          <a:solidFill>
-            <a:srgbClr val="FFFFFF"/>
-          </a:solidFill>
-          <a:ln/>
-          <a:effectLst>
-            <a:outerShdw sx="100000" sy="100000" kx="0" ky="0" algn="bl" rotWithShape="0" blurRad="101600" dist="38100" dir="8100000">
-              <a:srgbClr val="000000">
-                <a:alpha val="10000"/>
-              </a:srgbClr>
-            </a:outerShdw>
-          </a:effectLst>
-        </p:spPr>
-      </p:sp>
-      <p:sp>
-        <p:nvSpPr>
-          <p:cNvPr id="17" name="Shape 15"/>
-          <p:cNvSpPr/>
-          <p:nvPr/>
-        </p:nvSpPr>
-        <p:spPr>
-          <a:xfrm>
-            <a:off x="274320" y="2359152"/>
-            <a:ext cx="164592" cy="786384"/>
-          </a:xfrm>
-          <a:prstGeom prst="rect">
-            <a:avLst/>
-          </a:prstGeom>
-          <a:solidFill>
-            <a:srgbClr val="D97706"/>
-          </a:solidFill>
-          <a:ln/>
-        </p:spPr>
-      </p:sp>
-      <p:sp>
-        <p:nvSpPr>
-          <p:cNvPr id="18" name="Shape 16"/>
-          <p:cNvSpPr/>
-          <p:nvPr/>
-        </p:nvSpPr>
-        <p:spPr>
-          <a:xfrm>
-            <a:off x="8119872" y="2560320"/>
-            <a:ext cx="713232" cy="256032"/>
-          </a:xfrm>
-          <a:prstGeom prst="rect">
-            <a:avLst/>
-          </a:prstGeom>
-          <a:solidFill>
-            <a:srgbClr val="D97706"/>
-          </a:solidFill>
-          <a:ln/>
-        </p:spPr>
-      </p:sp>
-      <p:sp>
-        <p:nvSpPr>
-          <p:cNvPr id="19" name="Text 17"/>
-          <p:cNvSpPr/>
-          <p:nvPr/>
-        </p:nvSpPr>
-        <p:spPr>
-          <a:xfrm>
-            <a:off x="8119872" y="2560320"/>
-            <a:ext cx="713232" cy="256032"/>
-          </a:xfrm>
-          <a:prstGeom prst="rect">
-            <a:avLst/>
-          </a:prstGeom>
-          <a:noFill/>
-          <a:ln/>
-        </p:spPr>
-        <p:txBody>
-          <a:bodyPr wrap="square" lIns="0" tIns="0" rIns="0" bIns="0" rtlCol="0" anchor="ctr"/>
-          <a:lstStyle/>
-          <a:p>
-            <a:pPr algn="ctr" indent="0" marL="0">
-              <a:buNone/>
-            </a:pPr>
-            <a:r>
-              <a:rPr lang="en-US" sz="750" b="1" dirty="0">
-                <a:solidFill>
-                  <a:srgbClr val="FFFFFF"/>
-                </a:solidFill>
-                <a:latin typeface="Calibri" pitchFamily="34" charset="0"/>
-                <a:ea typeface="Calibri" pitchFamily="34" charset="-122"/>
-                <a:cs typeface="Calibri" pitchFamily="34" charset="-120"/>
-              </a:rPr>
-              <a:t>MEDIUM</a:t>
-            </a:r>
-            <a:endParaRPr lang="en-US" sz="750" dirty="0"/>
-          </a:p>
-        </p:txBody>
-      </p:sp>
-      <p:sp>
-        <p:nvSpPr>
-          <p:cNvPr id="20" name="Text 18"/>
-          <p:cNvSpPr/>
-          <p:nvPr/>
-        </p:nvSpPr>
-        <p:spPr>
-          <a:xfrm>
-            <a:off x="530352" y="2432304"/>
-            <a:ext cx="7406640" cy="237744"/>
-          </a:xfrm>
-          <a:prstGeom prst="rect">
-            <a:avLst/>
-          </a:prstGeom>
-          <a:noFill/>
-          <a:ln/>
-        </p:spPr>
-        <p:txBody>
-          <a:bodyPr wrap="square" lIns="0" tIns="0" rIns="0" bIns="0" rtlCol="0" anchor="ctr"/>
-          <a:lstStyle/>
+              <a:rPr lang="en-US" sz="1050" dirty="0">
+                <a:solidFill>
+                  <a:srgbClr val="059669"/>
+                </a:solidFill>
+                <a:latin typeface="Calibri" pitchFamily="34" charset="0"/>
+                <a:ea typeface="Calibri" pitchFamily="34" charset="-122"/>
+                <a:cs typeface="Calibri" pitchFamily="34" charset="-120"/>
+              </a:rPr>
+              <a:t>✅  9x P/E — market pricing in decline too aggressively near-term</a:t>
+            </a:r>
+            <a:endParaRPr lang="en-US" sz="1050" dirty="0"/>
+          </a:p>
           <a:p>
             <a:pPr indent="0" marL="0">
               <a:buNone/>
             </a:pPr>
             <a:r>
-              <a:rPr lang="en-US" sz="1100" b="1" dirty="0">
-                <a:solidFill>
-                  <a:srgbClr val="0F172A"/>
-                </a:solidFill>
-                <a:latin typeface="Calibri" pitchFamily="34" charset="0"/>
-                <a:ea typeface="Calibri" pitchFamily="34" charset="-122"/>
-                <a:cs typeface="Calibri" pitchFamily="34" charset="-120"/>
-              </a:rPr>
-              <a:t>3. E-Auction Price Compression</a:t>
-            </a:r>
-            <a:endParaRPr lang="en-US" sz="1100" dirty="0"/>
-          </a:p>
-        </p:txBody>
-      </p:sp>
-      <p:sp>
-        <p:nvSpPr>
-          <p:cNvPr id="21" name="Text 19"/>
-          <p:cNvSpPr/>
-          <p:nvPr/>
-        </p:nvSpPr>
-        <p:spPr>
-          <a:xfrm>
-            <a:off x="530352" y="2706624"/>
-            <a:ext cx="7406640" cy="347472"/>
-          </a:xfrm>
-          <a:prstGeom prst="rect">
-            <a:avLst/>
-          </a:prstGeom>
-          <a:noFill/>
-          <a:ln/>
-        </p:spPr>
-        <p:txBody>
-          <a:bodyPr wrap="square" lIns="0" tIns="0" rIns="0" bIns="0" rtlCol="0" anchor="ctr"/>
-          <a:lstStyle/>
+              <a:rPr lang="en-US" sz="1050" dirty="0">
+                <a:solidFill>
+                  <a:srgbClr val="D97706"/>
+                </a:solidFill>
+                <a:latin typeface="Calibri" pitchFamily="34" charset="0"/>
+                <a:ea typeface="Calibri" pitchFamily="34" charset="-122"/>
+                <a:cs typeface="Calibri" pitchFamily="34" charset="-120"/>
+              </a:rPr>
+              <a:t>⚠️  Energy transition risk is real — India renewables scaling fast</a:t>
+            </a:r>
+            <a:endParaRPr lang="en-US" sz="1050" dirty="0"/>
+          </a:p>
           <a:p>
             <a:pPr indent="0" marL="0">
               <a:buNone/>
             </a:pPr>
             <a:r>
-              <a:rPr lang="en-US" sz="950" dirty="0">
-                <a:solidFill>
-                  <a:srgbClr val="334155"/>
-                </a:solidFill>
-                <a:latin typeface="Calibri" pitchFamily="34" charset="0"/>
-                <a:ea typeface="Calibri" pitchFamily="34" charset="-122"/>
-                <a:cs typeface="Calibri" pitchFamily="34" charset="-120"/>
-              </a:rPr>
-              <a:t>E-auction premiums (higher-margin sales) are compressing as global coal prices soften. FY2026 operating margin fell to 18.5% from 32.5% in FY2024 — margin pressure is real.</a:t>
-            </a:r>
-            <a:endParaRPr lang="en-US" sz="950" dirty="0"/>
-          </a:p>
-        </p:txBody>
-      </p:sp>
-      <p:sp>
-        <p:nvSpPr>
-          <p:cNvPr id="22" name="Shape 20"/>
-          <p:cNvSpPr/>
-          <p:nvPr/>
-        </p:nvSpPr>
-        <p:spPr>
-          <a:xfrm>
-            <a:off x="274320" y="3227832"/>
-            <a:ext cx="8595360" cy="786384"/>
-          </a:xfrm>
-          <a:prstGeom prst="rect">
-            <a:avLst/>
-          </a:prstGeom>
-          <a:solidFill>
-            <a:srgbClr val="FFFFFF"/>
-          </a:solidFill>
-          <a:ln/>
-          <a:effectLst>
-            <a:outerShdw sx="100000" sy="100000" kx="0" ky="0" algn="bl" rotWithShape="0" blurRad="101600" dist="38100" dir="8100000">
-              <a:srgbClr val="000000">
-                <a:alpha val="10000"/>
-              </a:srgbClr>
-            </a:outerShdw>
-          </a:effectLst>
-        </p:spPr>
-      </p:sp>
-      <p:sp>
-        <p:nvSpPr>
-          <p:cNvPr id="23" name="Shape 21"/>
-          <p:cNvSpPr/>
-          <p:nvPr/>
-        </p:nvSpPr>
-        <p:spPr>
-          <a:xfrm>
-            <a:off x="274320" y="3227832"/>
-            <a:ext cx="164592" cy="786384"/>
-          </a:xfrm>
-          <a:prstGeom prst="rect">
-            <a:avLst/>
-          </a:prstGeom>
-          <a:solidFill>
-            <a:srgbClr val="D97706"/>
-          </a:solidFill>
-          <a:ln/>
-        </p:spPr>
-      </p:sp>
-      <p:sp>
-        <p:nvSpPr>
-          <p:cNvPr id="24" name="Shape 22"/>
-          <p:cNvSpPr/>
-          <p:nvPr/>
-        </p:nvSpPr>
-        <p:spPr>
-          <a:xfrm>
-            <a:off x="8119872" y="3429000"/>
-            <a:ext cx="713232" cy="256032"/>
-          </a:xfrm>
-          <a:prstGeom prst="rect">
-            <a:avLst/>
-          </a:prstGeom>
-          <a:solidFill>
-            <a:srgbClr val="D97706"/>
-          </a:solidFill>
-          <a:ln/>
-        </p:spPr>
-      </p:sp>
-      <p:sp>
-        <p:nvSpPr>
-          <p:cNvPr id="25" name="Text 23"/>
-          <p:cNvSpPr/>
-          <p:nvPr/>
-        </p:nvSpPr>
-        <p:spPr>
-          <a:xfrm>
-            <a:off x="8119872" y="3429000"/>
-            <a:ext cx="713232" cy="256032"/>
-          </a:xfrm>
-          <a:prstGeom prst="rect">
-            <a:avLst/>
-          </a:prstGeom>
-          <a:noFill/>
-          <a:ln/>
-        </p:spPr>
-        <p:txBody>
-          <a:bodyPr wrap="square" lIns="0" tIns="0" rIns="0" bIns="0" rtlCol="0" anchor="ctr"/>
-          <a:lstStyle/>
-          <a:p>
-            <a:pPr algn="ctr" indent="0" marL="0">
-              <a:buNone/>
-            </a:pPr>
-            <a:r>
-              <a:rPr lang="en-US" sz="750" b="1" dirty="0">
-                <a:solidFill>
-                  <a:srgbClr val="FFFFFF"/>
-                </a:solidFill>
-                <a:latin typeface="Calibri" pitchFamily="34" charset="0"/>
-                <a:ea typeface="Calibri" pitchFamily="34" charset="-122"/>
-                <a:cs typeface="Calibri" pitchFamily="34" charset="-120"/>
-              </a:rPr>
-              <a:t>MEDIUM</a:t>
-            </a:r>
-            <a:endParaRPr lang="en-US" sz="750" dirty="0"/>
-          </a:p>
-        </p:txBody>
-      </p:sp>
-      <p:sp>
-        <p:nvSpPr>
-          <p:cNvPr id="26" name="Text 24"/>
-          <p:cNvSpPr/>
-          <p:nvPr/>
-        </p:nvSpPr>
-        <p:spPr>
-          <a:xfrm>
-            <a:off x="530352" y="3300984"/>
-            <a:ext cx="7406640" cy="237744"/>
-          </a:xfrm>
-          <a:prstGeom prst="rect">
-            <a:avLst/>
-          </a:prstGeom>
-          <a:noFill/>
-          <a:ln/>
-        </p:spPr>
-        <p:txBody>
-          <a:bodyPr wrap="square" lIns="0" tIns="0" rIns="0" bIns="0" rtlCol="0" anchor="ctr"/>
-          <a:lstStyle/>
-          <a:p>
-            <a:pPr indent="0" marL="0">
-              <a:buNone/>
-            </a:pPr>
-            <a:r>
-              <a:rPr lang="en-US" sz="1100" b="1" dirty="0">
-                <a:solidFill>
-                  <a:srgbClr val="0F172A"/>
-                </a:solidFill>
-                <a:latin typeface="Calibri" pitchFamily="34" charset="0"/>
-                <a:ea typeface="Calibri" pitchFamily="34" charset="-122"/>
-                <a:cs typeface="Calibri" pitchFamily="34" charset="-120"/>
-              </a:rPr>
-              <a:t>4. Wage &amp; Cost Inflation</a:t>
-            </a:r>
-            <a:endParaRPr lang="en-US" sz="1100" dirty="0"/>
-          </a:p>
-        </p:txBody>
-      </p:sp>
-      <p:sp>
-        <p:nvSpPr>
-          <p:cNvPr id="27" name="Text 25"/>
-          <p:cNvSpPr/>
-          <p:nvPr/>
-        </p:nvSpPr>
-        <p:spPr>
-          <a:xfrm>
-            <a:off x="530352" y="3575304"/>
-            <a:ext cx="7406640" cy="347472"/>
-          </a:xfrm>
-          <a:prstGeom prst="rect">
-            <a:avLst/>
-          </a:prstGeom>
-          <a:noFill/>
-          <a:ln/>
-        </p:spPr>
-        <p:txBody>
-          <a:bodyPr wrap="square" lIns="0" tIns="0" rIns="0" bIns="0" rtlCol="0" anchor="ctr"/>
-          <a:lstStyle/>
-          <a:p>
-            <a:pPr indent="0" marL="0">
-              <a:buNone/>
-            </a:pPr>
-            <a:r>
-              <a:rPr lang="en-US" sz="950" dirty="0">
-                <a:solidFill>
-                  <a:srgbClr val="334155"/>
-                </a:solidFill>
-                <a:latin typeface="Calibri" pitchFamily="34" charset="0"/>
-                <a:ea typeface="Calibri" pitchFamily="34" charset="-122"/>
-                <a:cs typeface="Calibri" pitchFamily="34" charset="-120"/>
-              </a:rPr>
-              <a:t>240,000+ employees. Court-mandated pay hike added INR 1,458 crore one-time provision in FY2026. Structural wage inflation erodes fixed-cost leverage.</a:t>
-            </a:r>
-            <a:endParaRPr lang="en-US" sz="950" dirty="0"/>
-          </a:p>
-        </p:txBody>
-      </p:sp>
-      <p:sp>
-        <p:nvSpPr>
-          <p:cNvPr id="28" name="Shape 26"/>
-          <p:cNvSpPr/>
-          <p:nvPr/>
-        </p:nvSpPr>
-        <p:spPr>
-          <a:xfrm>
-            <a:off x="274320" y="4096512"/>
-            <a:ext cx="8595360" cy="786384"/>
-          </a:xfrm>
-          <a:prstGeom prst="rect">
-            <a:avLst/>
-          </a:prstGeom>
-          <a:solidFill>
-            <a:srgbClr val="FFFFFF"/>
-          </a:solidFill>
-          <a:ln/>
-          <a:effectLst>
-            <a:outerShdw sx="100000" sy="100000" kx="0" ky="0" algn="bl" rotWithShape="0" blurRad="101600" dist="38100" dir="8100000">
-              <a:srgbClr val="000000">
-                <a:alpha val="10000"/>
-              </a:srgbClr>
-            </a:outerShdw>
-          </a:effectLst>
-        </p:spPr>
-      </p:sp>
-      <p:sp>
-        <p:nvSpPr>
-          <p:cNvPr id="29" name="Shape 27"/>
-          <p:cNvSpPr/>
-          <p:nvPr/>
-        </p:nvSpPr>
-        <p:spPr>
-          <a:xfrm>
-            <a:off x="274320" y="4096512"/>
-            <a:ext cx="164592" cy="786384"/>
-          </a:xfrm>
-          <a:prstGeom prst="rect">
-            <a:avLst/>
-          </a:prstGeom>
-          <a:solidFill>
-            <a:srgbClr val="059669"/>
-          </a:solidFill>
-          <a:ln/>
-        </p:spPr>
-      </p:sp>
-      <p:sp>
-        <p:nvSpPr>
-          <p:cNvPr id="30" name="Shape 28"/>
-          <p:cNvSpPr/>
-          <p:nvPr/>
-        </p:nvSpPr>
-        <p:spPr>
-          <a:xfrm>
-            <a:off x="8119872" y="4297680"/>
-            <a:ext cx="713232" cy="256032"/>
-          </a:xfrm>
-          <a:prstGeom prst="rect">
-            <a:avLst/>
-          </a:prstGeom>
-          <a:solidFill>
-            <a:srgbClr val="059669"/>
-          </a:solidFill>
-          <a:ln/>
-        </p:spPr>
-      </p:sp>
-      <p:sp>
-        <p:nvSpPr>
-          <p:cNvPr id="31" name="Text 29"/>
-          <p:cNvSpPr/>
-          <p:nvPr/>
-        </p:nvSpPr>
-        <p:spPr>
-          <a:xfrm>
-            <a:off x="8119872" y="4297680"/>
-            <a:ext cx="713232" cy="256032"/>
-          </a:xfrm>
-          <a:prstGeom prst="rect">
-            <a:avLst/>
-          </a:prstGeom>
-          <a:noFill/>
-          <a:ln/>
-        </p:spPr>
-        <p:txBody>
-          <a:bodyPr wrap="square" lIns="0" tIns="0" rIns="0" bIns="0" rtlCol="0" anchor="ctr"/>
-          <a:lstStyle/>
-          <a:p>
-            <a:pPr algn="ctr" indent="0" marL="0">
-              <a:buNone/>
-            </a:pPr>
-            <a:r>
-              <a:rPr lang="en-US" sz="750" b="1" dirty="0">
-                <a:solidFill>
-                  <a:srgbClr val="FFFFFF"/>
-                </a:solidFill>
-                <a:latin typeface="Calibri" pitchFamily="34" charset="0"/>
-                <a:ea typeface="Calibri" pitchFamily="34" charset="-122"/>
-                <a:cs typeface="Calibri" pitchFamily="34" charset="-120"/>
-              </a:rPr>
-              <a:t>LOW</a:t>
-            </a:r>
-            <a:endParaRPr lang="en-US" sz="750" dirty="0"/>
-          </a:p>
-        </p:txBody>
-      </p:sp>
-      <p:sp>
-        <p:nvSpPr>
-          <p:cNvPr id="32" name="Text 30"/>
-          <p:cNvSpPr/>
-          <p:nvPr/>
-        </p:nvSpPr>
-        <p:spPr>
-          <a:xfrm>
-            <a:off x="530352" y="4169664"/>
-            <a:ext cx="7406640" cy="237744"/>
-          </a:xfrm>
-          <a:prstGeom prst="rect">
-            <a:avLst/>
-          </a:prstGeom>
-          <a:noFill/>
-          <a:ln/>
-        </p:spPr>
-        <p:txBody>
-          <a:bodyPr wrap="square" lIns="0" tIns="0" rIns="0" bIns="0" rtlCol="0" anchor="ctr"/>
-          <a:lstStyle/>
-          <a:p>
-            <a:pPr indent="0" marL="0">
-              <a:buNone/>
-            </a:pPr>
-            <a:r>
-              <a:rPr lang="en-US" sz="1100" b="1" dirty="0">
-                <a:solidFill>
-                  <a:srgbClr val="0F172A"/>
-                </a:solidFill>
-                <a:latin typeface="Calibri" pitchFamily="34" charset="0"/>
-                <a:ea typeface="Calibri" pitchFamily="34" charset="-122"/>
-                <a:cs typeface="Calibri" pitchFamily="34" charset="-120"/>
-              </a:rPr>
-              <a:t>5. Production Volume Shortfalls</a:t>
-            </a:r>
-            <a:endParaRPr lang="en-US" sz="1100" dirty="0"/>
-          </a:p>
-        </p:txBody>
-      </p:sp>
-      <p:sp>
-        <p:nvSpPr>
-          <p:cNvPr id="33" name="Text 31"/>
-          <p:cNvSpPr/>
-          <p:nvPr/>
-        </p:nvSpPr>
-        <p:spPr>
-          <a:xfrm>
-            <a:off x="530352" y="4443984"/>
-            <a:ext cx="7406640" cy="347472"/>
-          </a:xfrm>
-          <a:prstGeom prst="rect">
-            <a:avLst/>
-          </a:prstGeom>
-          <a:noFill/>
-          <a:ln/>
-        </p:spPr>
-        <p:txBody>
-          <a:bodyPr wrap="square" lIns="0" tIns="0" rIns="0" bIns="0" rtlCol="0" anchor="ctr"/>
-          <a:lstStyle/>
-          <a:p>
-            <a:pPr indent="0" marL="0">
-              <a:buNone/>
-            </a:pPr>
-            <a:r>
-              <a:rPr lang="en-US" sz="950" dirty="0">
-                <a:solidFill>
-                  <a:srgbClr val="334155"/>
-                </a:solidFill>
-                <a:latin typeface="Calibri" pitchFamily="34" charset="0"/>
-                <a:ea typeface="Calibri" pitchFamily="34" charset="-122"/>
-                <a:cs typeface="Calibri" pitchFamily="34" charset="-120"/>
-              </a:rPr>
-              <a:t>CIL has historically missed production targets. If India's power demand disappoints or renewables scale faster, 810MT FY2028 guidance could be missed.</a:t>
-            </a:r>
-            <a:endParaRPr lang="en-US" sz="950" dirty="0"/>
-          </a:p>
-        </p:txBody>
-      </p:sp>
-      <p:sp>
-        <p:nvSpPr>
-          <p:cNvPr id="34" name="Text 32"/>
-          <p:cNvSpPr/>
-          <p:nvPr/>
-        </p:nvSpPr>
-        <p:spPr>
-          <a:xfrm>
-            <a:off x="8778240" y="4846320"/>
-            <a:ext cx="274320" cy="182880"/>
-          </a:xfrm>
-          <a:prstGeom prst="rect">
-            <a:avLst/>
-          </a:prstGeom>
-          <a:noFill/>
-          <a:ln/>
-        </p:spPr>
-        <p:txBody>
-          <a:bodyPr wrap="square" lIns="0" tIns="0" rIns="0" bIns="0" rtlCol="0" anchor="ctr"/>
-          <a:lstStyle/>
-          <a:p>
-            <a:pPr algn="r" indent="0" marL="0">
-              <a:buNone/>
-            </a:pPr>
-            <a:r>
-              <a:rPr lang="en-US" sz="800" dirty="0">
-                <a:solidFill>
-                  <a:srgbClr val="64748B"/>
-                </a:solidFill>
-                <a:latin typeface="Calibri" pitchFamily="34" charset="0"/>
-                <a:ea typeface="Calibri" pitchFamily="34" charset="-122"/>
-                <a:cs typeface="Calibri" pitchFamily="34" charset="-120"/>
-              </a:rPr>
-              <a:t>8</a:t>
-            </a:r>
-            <a:endParaRPr lang="en-US" sz="800" dirty="0"/>
-          </a:p>
-        </p:txBody>
-      </p:sp>
-    </p:spTree>
-  </p:cSld>
-  <p:clrMapOvr>
-    <a:masterClrMapping/>
-  </p:clrMapOvr>
-</p:sld>
-</file>
-
-<file path=ppt/slides/slide9.xml><?xml version="1.0" encoding="utf-8"?>
-<p:sld xmlns:a="http://schemas.openxmlformats.org/drawingml/2006/main" xmlns:r="http://schemas.openxmlformats.org/officeDocument/2006/relationships" xmlns:p="http://schemas.openxmlformats.org/presentationml/2006/main">
-  <p:cSld name="Slide 9">
-    <p:bg>
-      <p:bgPr>
-        <a:solidFill>
-          <a:srgbClr val="F0F4FF"/>
-        </a:solidFill>
-      </p:bgPr>
-    </p:bg>
-    <p:spTree>
-      <p:nvGrpSpPr>
-        <p:cNvPr id="1" name=""/>
-        <p:cNvGrpSpPr/>
-        <p:nvPr/>
-      </p:nvGrpSpPr>
-      <p:grpSpPr>
-        <a:xfrm>
-          <a:off x="0" y="0"/>
-          <a:ext cx="0" cy="0"/>
-          <a:chOff x="0" y="0"/>
-          <a:chExt cx="0" cy="0"/>
-        </a:xfrm>
-      </p:grpSpPr>
-      <p:sp>
-        <p:nvSpPr>
-          <p:cNvPr id="2" name="Shape 0"/>
-          <p:cNvSpPr/>
-          <p:nvPr/>
-        </p:nvSpPr>
-        <p:spPr>
-          <a:xfrm>
-            <a:off x="0" y="0"/>
-            <a:ext cx="9144000" cy="502920"/>
+              <a:rPr lang="en-US" sz="1050" dirty="0">
+                <a:solidFill>
+                  <a:srgbClr val="D97706"/>
+                </a:solidFill>
+                <a:latin typeface="Calibri" pitchFamily="34" charset="0"/>
+                <a:ea typeface="Calibri" pitchFamily="34" charset="-122"/>
+                <a:cs typeface="Calibri" pitchFamily="34" charset="-120"/>
+              </a:rPr>
+              <a:t>⚠️  Buy INR 380–430 · Collect yield · Hold 5–7 yrs · Exit plan needed</a:t>
+            </a:r>
+            <a:endParaRPr lang="en-US" sz="1050" dirty="0"/>
+          </a:p>
+        </p:txBody>
+      </p:sp>
+      <p:sp>
+        <p:nvSpPr>
+          <p:cNvPr id="12" name="Shape 9"/>
+          <p:cNvSpPr/>
+          <p:nvPr/>
+        </p:nvSpPr>
+        <p:spPr>
+          <a:xfrm>
+            <a:off x="256032" y="4023360"/>
+            <a:ext cx="8631936" cy="868680"/>
           </a:xfrm>
           <a:prstGeom prst="rect">
             <a:avLst/>
@@ -12683,14 +10060,14 @@
       </p:sp>
       <p:sp>
         <p:nvSpPr>
-          <p:cNvPr id="3" name="Text 1"/>
-          <p:cNvSpPr/>
-          <p:nvPr/>
-        </p:nvSpPr>
-        <p:spPr>
-          <a:xfrm>
-            <a:off x="365760" y="73152"/>
-            <a:ext cx="8412480" cy="347472"/>
+          <p:cNvPr id="13" name="Text 10"/>
+          <p:cNvSpPr/>
+          <p:nvPr/>
+        </p:nvSpPr>
+        <p:spPr>
+          <a:xfrm>
+            <a:off x="420624" y="4114800"/>
+            <a:ext cx="8321040" cy="685800"/>
           </a:xfrm>
           <a:prstGeom prst="rect">
             <a:avLst/>
@@ -12706,7 +10083,7 @@
               <a:buNone/>
             </a:pPr>
             <a:r>
-              <a:rPr lang="en-US" sz="1300" b="1" dirty="0">
+              <a:rPr lang="en-US" sz="1100" i="1" dirty="0">
                 <a:solidFill>
                   <a:srgbClr val="FFFFFF"/>
                 </a:solidFill>
@@ -12714,392 +10091,7 @@
                 <a:ea typeface="Calibri" pitchFamily="34" charset="-122"/>
                 <a:cs typeface="Calibri" pitchFamily="34" charset="-120"/>
               </a:rPr>
-              <a:t>ANALYST CONSENSUS &amp; FINAL VERDICT</a:t>
-            </a:r>
-            <a:endParaRPr lang="en-US" sz="1300" dirty="0"/>
-          </a:p>
-        </p:txBody>
-      </p:sp>
-      <p:graphicFrame>
-        <p:nvGraphicFramePr>
-          <p:cNvPr id="4" name="Chart 0" descr=""/>
-          <p:cNvGraphicFramePr/>
-          <p:nvPr/>
-        </p:nvGraphicFramePr>
-        <p:xfrm>
-          <a:off x="274320" y="640080"/>
-          <a:ext cx="3657600" cy="3200400"/>
-        </p:xfrm>
-        <a:graphic xmlns:a="http://schemas.openxmlformats.org/drawingml/2006/main">
-          <a:graphicData uri="http://schemas.openxmlformats.org/drawingml/2006/chart">
-            <c:chart xmlns:c="http://schemas.openxmlformats.org/drawingml/2006/chart" r:id="rId1"/>
-          </a:graphicData>
-        </a:graphic>
-      </p:graphicFrame>
-      <p:sp>
-        <p:nvSpPr>
-          <p:cNvPr id="5" name="Shape 2"/>
-          <p:cNvSpPr/>
-          <p:nvPr/>
-        </p:nvSpPr>
-        <p:spPr>
-          <a:xfrm>
-            <a:off x="4206240" y="658368"/>
-            <a:ext cx="4663440" cy="1188720"/>
-          </a:xfrm>
-          <a:prstGeom prst="rect">
-            <a:avLst/>
-          </a:prstGeom>
-          <a:solidFill>
-            <a:srgbClr val="1C2B5E"/>
-          </a:solidFill>
-          <a:ln/>
-        </p:spPr>
-      </p:sp>
-      <p:sp>
-        <p:nvSpPr>
-          <p:cNvPr id="6" name="Text 3"/>
-          <p:cNvSpPr/>
-          <p:nvPr/>
-        </p:nvSpPr>
-        <p:spPr>
-          <a:xfrm>
-            <a:off x="4389120" y="749808"/>
-            <a:ext cx="4297680" cy="228600"/>
-          </a:xfrm>
-          <a:prstGeom prst="rect">
-            <a:avLst/>
-          </a:prstGeom>
-          <a:noFill/>
-          <a:ln/>
-        </p:spPr>
-        <p:txBody>
-          <a:bodyPr wrap="square" lIns="0" tIns="0" rIns="0" bIns="0" rtlCol="0" anchor="ctr"/>
-          <a:lstStyle/>
-          <a:p>
-            <a:pPr indent="0" marL="0">
-              <a:buNone/>
-            </a:pPr>
-            <a:r>
-              <a:rPr lang="en-US" sz="950" b="1" spc="200" kern="0" dirty="0">
-                <a:solidFill>
-                  <a:srgbClr val="D97706"/>
-                </a:solidFill>
-                <a:latin typeface="Calibri" pitchFamily="34" charset="0"/>
-                <a:ea typeface="Calibri" pitchFamily="34" charset="-122"/>
-                <a:cs typeface="Calibri" pitchFamily="34" charset="-120"/>
-              </a:rPr>
-              <a:t>CONSENSUS: HOLD</a:t>
-            </a:r>
-            <a:endParaRPr lang="en-US" sz="950" dirty="0"/>
-          </a:p>
-        </p:txBody>
-      </p:sp>
-      <p:sp>
-        <p:nvSpPr>
-          <p:cNvPr id="7" name="Text 4"/>
-          <p:cNvSpPr/>
-          <p:nvPr/>
-        </p:nvSpPr>
-        <p:spPr>
-          <a:xfrm>
-            <a:off x="4389120" y="987552"/>
-            <a:ext cx="4297680" cy="201168"/>
-          </a:xfrm>
-          <a:prstGeom prst="rect">
-            <a:avLst/>
-          </a:prstGeom>
-          <a:noFill/>
-          <a:ln/>
-        </p:spPr>
-        <p:txBody>
-          <a:bodyPr wrap="square" lIns="0" tIns="0" rIns="0" bIns="0" rtlCol="0" anchor="ctr"/>
-          <a:lstStyle/>
-          <a:p>
-            <a:pPr indent="0" marL="0">
-              <a:buNone/>
-            </a:pPr>
-            <a:r>
-              <a:rPr lang="en-US" sz="1000" dirty="0">
-                <a:solidFill>
-                  <a:srgbClr val="FFFFFF"/>
-                </a:solidFill>
-                <a:latin typeface="Calibri" pitchFamily="34" charset="0"/>
-                <a:ea typeface="Calibri" pitchFamily="34" charset="-122"/>
-                <a:cs typeface="Calibri" pitchFamily="34" charset="-120"/>
-              </a:rPr>
-              <a:t>26 analysts  |  39% Bullish  |  35% Hold  |  24% Bearish</a:t>
-            </a:r>
-            <a:endParaRPr lang="en-US" sz="1000" dirty="0"/>
-          </a:p>
-        </p:txBody>
-      </p:sp>
-      <p:sp>
-        <p:nvSpPr>
-          <p:cNvPr id="8" name="Text 5"/>
-          <p:cNvSpPr/>
-          <p:nvPr/>
-        </p:nvSpPr>
-        <p:spPr>
-          <a:xfrm>
-            <a:off x="4389120" y="1188720"/>
-            <a:ext cx="4297680" cy="201168"/>
-          </a:xfrm>
-          <a:prstGeom prst="rect">
-            <a:avLst/>
-          </a:prstGeom>
-          <a:noFill/>
-          <a:ln/>
-        </p:spPr>
-        <p:txBody>
-          <a:bodyPr wrap="square" lIns="0" tIns="0" rIns="0" bIns="0" rtlCol="0" anchor="ctr"/>
-          <a:lstStyle/>
-          <a:p>
-            <a:pPr indent="0" marL="0">
-              <a:buNone/>
-            </a:pPr>
-            <a:r>
-              <a:rPr lang="en-US" sz="1000" dirty="0">
-                <a:solidFill>
-                  <a:srgbClr val="D6E4FF"/>
-                </a:solidFill>
-                <a:latin typeface="Calibri" pitchFamily="34" charset="0"/>
-                <a:ea typeface="Calibri" pitchFamily="34" charset="-122"/>
-                <a:cs typeface="Calibri" pitchFamily="34" charset="-120"/>
-              </a:rPr>
-              <a:t>Mean target: INR 452  |  Range: INR 290 – INR 550</a:t>
-            </a:r>
-            <a:endParaRPr lang="en-US" sz="1000" dirty="0"/>
-          </a:p>
-        </p:txBody>
-      </p:sp>
-      <p:sp>
-        <p:nvSpPr>
-          <p:cNvPr id="9" name="Shape 6"/>
-          <p:cNvSpPr/>
-          <p:nvPr/>
-        </p:nvSpPr>
-        <p:spPr>
-          <a:xfrm>
-            <a:off x="4206240" y="1965960"/>
-            <a:ext cx="4663440" cy="1883664"/>
-          </a:xfrm>
-          <a:prstGeom prst="rect">
-            <a:avLst/>
-          </a:prstGeom>
-          <a:solidFill>
-            <a:srgbClr val="FFFFFF"/>
-          </a:solidFill>
-          <a:ln/>
-          <a:effectLst>
-            <a:outerShdw sx="100000" sy="100000" kx="0" ky="0" algn="bl" rotWithShape="0" blurRad="101600" dist="38100" dir="8100000">
-              <a:srgbClr val="000000">
-                <a:alpha val="10000"/>
-              </a:srgbClr>
-            </a:outerShdw>
-          </a:effectLst>
-        </p:spPr>
-      </p:sp>
-      <p:sp>
-        <p:nvSpPr>
-          <p:cNvPr id="10" name="Text 7"/>
-          <p:cNvSpPr/>
-          <p:nvPr/>
-        </p:nvSpPr>
-        <p:spPr>
-          <a:xfrm>
-            <a:off x="4389120" y="2066544"/>
-            <a:ext cx="4297680" cy="219456"/>
-          </a:xfrm>
-          <a:prstGeom prst="rect">
-            <a:avLst/>
-          </a:prstGeom>
-          <a:noFill/>
-          <a:ln/>
-        </p:spPr>
-        <p:txBody>
-          <a:bodyPr wrap="square" lIns="0" tIns="0" rIns="0" bIns="0" rtlCol="0" anchor="ctr"/>
-          <a:lstStyle/>
-          <a:p>
-            <a:pPr indent="0" marL="0">
-              <a:buNone/>
-            </a:pPr>
-            <a:r>
-              <a:rPr lang="en-US" sz="1000" b="1" dirty="0">
-                <a:solidFill>
-                  <a:srgbClr val="D97706"/>
-                </a:solidFill>
-                <a:latin typeface="Calibri" pitchFamily="34" charset="0"/>
-                <a:ea typeface="Calibri" pitchFamily="34" charset="-122"/>
-                <a:cs typeface="Calibri" pitchFamily="34" charset="-120"/>
-              </a:rPr>
-              <a:t>FINAL VERDICT — WATCH</a:t>
-            </a:r>
-            <a:endParaRPr lang="en-US" sz="1000" dirty="0"/>
-          </a:p>
-        </p:txBody>
-      </p:sp>
-      <p:sp>
-        <p:nvSpPr>
-          <p:cNvPr id="11" name="Text 8"/>
-          <p:cNvSpPr/>
-          <p:nvPr/>
-        </p:nvSpPr>
-        <p:spPr>
-          <a:xfrm>
-            <a:off x="4389120" y="2322576"/>
-            <a:ext cx="4389120" cy="1417320"/>
-          </a:xfrm>
-          <a:prstGeom prst="rect">
-            <a:avLst/>
-          </a:prstGeom>
-          <a:noFill/>
-          <a:ln/>
-        </p:spPr>
-        <p:txBody>
-          <a:bodyPr wrap="square" lIns="0" tIns="0" rIns="0" bIns="0" rtlCol="0" anchor="ctr"/>
-          <a:lstStyle/>
-          <a:p>
-            <a:pPr indent="0" marL="0">
-              <a:buNone/>
-            </a:pPr>
-            <a:r>
-              <a:rPr lang="en-US" sz="1050" dirty="0">
-                <a:solidFill>
-                  <a:srgbClr val="059669"/>
-                </a:solidFill>
-                <a:latin typeface="Calibri" pitchFamily="34" charset="0"/>
-                <a:ea typeface="Calibri" pitchFamily="34" charset="-122"/>
-                <a:cs typeface="Calibri" pitchFamily="34" charset="-120"/>
-              </a:rPr>
-              <a:t>✅  Pristine balance sheet — 0.1x ND/EBITDA, 35x interest coverage</a:t>
-            </a:r>
-            <a:endParaRPr lang="en-US" sz="1050" dirty="0"/>
-          </a:p>
-          <a:p>
-            <a:pPr indent="0" marL="0">
-              <a:buNone/>
-            </a:pPr>
-            <a:r>
-              <a:rPr lang="en-US" sz="1050" dirty="0">
-                <a:solidFill>
-                  <a:srgbClr val="059669"/>
-                </a:solidFill>
-                <a:latin typeface="Calibri" pitchFamily="34" charset="0"/>
-                <a:ea typeface="Calibri" pitchFamily="34" charset="-122"/>
-                <a:cs typeface="Calibri" pitchFamily="34" charset="-120"/>
-              </a:rPr>
-              <a:t>✅  Exceptional ROCE (35.3%) and consistent dividend (5.7% yield)</a:t>
-            </a:r>
-            <a:endParaRPr lang="en-US" sz="1050" dirty="0"/>
-          </a:p>
-          <a:p>
-            <a:pPr indent="0" marL="0">
-              <a:buNone/>
-            </a:pPr>
-            <a:r>
-              <a:rPr lang="en-US" sz="1050" dirty="0">
-                <a:solidFill>
-                  <a:srgbClr val="059669"/>
-                </a:solidFill>
-                <a:latin typeface="Calibri" pitchFamily="34" charset="0"/>
-                <a:ea typeface="Calibri" pitchFamily="34" charset="-122"/>
-                <a:cs typeface="Calibri" pitchFamily="34" charset="-120"/>
-              </a:rPr>
-              <a:t>✅  Ultra-cheap at 9x P/E — market pricing in decline too aggressively</a:t>
-            </a:r>
-            <a:endParaRPr lang="en-US" sz="1050" dirty="0"/>
-          </a:p>
-          <a:p>
-            <a:pPr indent="0" marL="0">
-              <a:buNone/>
-            </a:pPr>
-            <a:r>
-              <a:rPr lang="en-US" sz="1050" dirty="0">
-                <a:solidFill>
-                  <a:srgbClr val="D97706"/>
-                </a:solidFill>
-                <a:latin typeface="Calibri" pitchFamily="34" charset="0"/>
-                <a:ea typeface="Calibri" pitchFamily="34" charset="-122"/>
-                <a:cs typeface="Calibri" pitchFamily="34" charset="-120"/>
-              </a:rPr>
-              <a:t>⚠️  Energy transition is real — India's renewables scaling fast</a:t>
-            </a:r>
-            <a:endParaRPr lang="en-US" sz="1050" dirty="0"/>
-          </a:p>
-          <a:p>
-            <a:pPr indent="0" marL="0">
-              <a:buNone/>
-            </a:pPr>
-            <a:r>
-              <a:rPr lang="en-US" sz="1050" dirty="0">
-                <a:solidFill>
-                  <a:srgbClr val="D97706"/>
-                </a:solidFill>
-                <a:latin typeface="Calibri" pitchFamily="34" charset="0"/>
-                <a:ea typeface="Calibri" pitchFamily="34" charset="-122"/>
-                <a:cs typeface="Calibri" pitchFamily="34" charset="-120"/>
-              </a:rPr>
-              <a:t>⚠️  Buy at INR 380–430 for margin of safety. Hold 5–7 years max.</a:t>
-            </a:r>
-            <a:endParaRPr lang="en-US" sz="1050" dirty="0"/>
-          </a:p>
-        </p:txBody>
-      </p:sp>
-      <p:sp>
-        <p:nvSpPr>
-          <p:cNvPr id="12" name="Shape 9"/>
-          <p:cNvSpPr/>
-          <p:nvPr/>
-        </p:nvSpPr>
-        <p:spPr>
-          <a:xfrm>
-            <a:off x="274320" y="3977640"/>
-            <a:ext cx="8595360" cy="896112"/>
-          </a:xfrm>
-          <a:prstGeom prst="rect">
-            <a:avLst/>
-          </a:prstGeom>
-          <a:solidFill>
-            <a:srgbClr val="1C2B5E"/>
-          </a:solidFill>
-          <a:ln/>
-        </p:spPr>
-      </p:sp>
-      <p:sp>
-        <p:nvSpPr>
-          <p:cNvPr id="13" name="Text 10"/>
-          <p:cNvSpPr/>
-          <p:nvPr/>
-        </p:nvSpPr>
-        <p:spPr>
-          <a:xfrm>
-            <a:off x="457200" y="4078224"/>
-            <a:ext cx="8321040" cy="658368"/>
-          </a:xfrm>
-          <a:prstGeom prst="rect">
-            <a:avLst/>
-          </a:prstGeom>
-          <a:noFill/>
-          <a:ln/>
-        </p:spPr>
-        <p:txBody>
-          <a:bodyPr wrap="square" lIns="0" tIns="0" rIns="0" bIns="0" rtlCol="0" anchor="ctr"/>
-          <a:lstStyle/>
-          <a:p>
-            <a:pPr indent="0" marL="0">
-              <a:buNone/>
-            </a:pPr>
-            <a:r>
-              <a:rPr lang="en-US" sz="1100" i="1" dirty="0">
-                <a:solidFill>
-                  <a:srgbClr val="FFFFFF"/>
-                </a:solidFill>
-                <a:latin typeface="Calibri" pitchFamily="34" charset="0"/>
-                <a:ea typeface="Calibri" pitchFamily="34" charset="-122"/>
-                <a:cs typeface="Calibri" pitchFamily="34" charset="-120"/>
-              </a:rPr>
-              <a:t>Coal India is a fantastic income vehicle for the next 5–7 years. It is not a 15-year compounder. Buy below INR 430 · Collect the 5.7% yield · Exit as India's renewable mix approaches 60%.</a:t>
+              <a:t>Coal India is a fantastic income vehicle for the next 5–7 years. Not a 15-year compounder. Buy below INR 430 · Collect the 5.7% annual yield · Exit as India's renewable mix approaches 60% of power generation.</a:t>
             </a:r>
             <a:endParaRPr lang="en-US" sz="1100" dirty="0"/>
           </a:p>
@@ -13138,7 +10130,7 @@
                 <a:ea typeface="Calibri" pitchFamily="34" charset="-122"/>
                 <a:cs typeface="Calibri" pitchFamily="34" charset="-120"/>
               </a:rPr>
-              <a:t>9</a:t>
+              <a:t>8</a:t>
             </a:r>
             <a:endParaRPr lang="en-US" sz="800" dirty="0"/>
           </a:p>
